--- a/ppts/Architecture_chapter4.pptx
+++ b/ppts/Architecture_chapter4.pptx
@@ -3203,7 +3203,7 @@
           <a:p>
             <a:fld id="{F129488A-22F5-F54C-A8CA-F9B4F91C0607}" type="datetimeFigureOut">
               <a:rPr lang="en-US" smtClean="0"/>
-              <a:t>6/24/24</a:t>
+              <a:t>6/29/24</a:t>
             </a:fld>
             <a:endParaRPr lang="en-US"/>
           </a:p>
@@ -4729,7 +4729,7 @@
           <a:p>
             <a:fld id="{40A464C0-CF97-9245-A0D9-54D08FA6B5D8}" type="datetime1">
               <a:rPr lang="en-CA" smtClean="0"/>
-              <a:t>2024-06-24</a:t>
+              <a:t>2024-06-29</a:t>
             </a:fld>
             <a:endParaRPr lang="en-US"/>
           </a:p>
@@ -4927,7 +4927,7 @@
           <a:p>
             <a:fld id="{2BB3E4C0-BBF0-8544-8AD2-F06F5E15103B}" type="datetime1">
               <a:rPr lang="en-CA" smtClean="0"/>
-              <a:t>2024-06-24</a:t>
+              <a:t>2024-06-29</a:t>
             </a:fld>
             <a:endParaRPr lang="en-US"/>
           </a:p>
@@ -5135,7 +5135,7 @@
           <a:p>
             <a:fld id="{6C6218AA-097A-FD4B-9D21-4196BAA4809C}" type="datetime1">
               <a:rPr lang="en-CA" smtClean="0"/>
-              <a:t>2024-06-24</a:t>
+              <a:t>2024-06-29</a:t>
             </a:fld>
             <a:endParaRPr lang="en-US"/>
           </a:p>
@@ -5333,7 +5333,7 @@
           <a:p>
             <a:fld id="{AEB02DB1-7EAE-4F43-BD24-667A2CBE6F33}" type="datetime1">
               <a:rPr lang="en-CA" smtClean="0"/>
-              <a:t>2024-06-24</a:t>
+              <a:t>2024-06-29</a:t>
             </a:fld>
             <a:endParaRPr lang="en-US"/>
           </a:p>
@@ -5608,7 +5608,7 @@
           <a:p>
             <a:fld id="{1EEBCC8E-AC73-B041-A643-881D14AC9E96}" type="datetime1">
               <a:rPr lang="en-CA" smtClean="0"/>
-              <a:t>2024-06-24</a:t>
+              <a:t>2024-06-29</a:t>
             </a:fld>
             <a:endParaRPr lang="en-US"/>
           </a:p>
@@ -5873,7 +5873,7 @@
           <a:p>
             <a:fld id="{B7D153E5-9259-1046-AF8C-708564DBBA6B}" type="datetime1">
               <a:rPr lang="en-CA" smtClean="0"/>
-              <a:t>2024-06-24</a:t>
+              <a:t>2024-06-29</a:t>
             </a:fld>
             <a:endParaRPr lang="en-US"/>
           </a:p>
@@ -6285,7 +6285,7 @@
           <a:p>
             <a:fld id="{81F41693-106C-2543-9C96-20B50D639AA3}" type="datetime1">
               <a:rPr lang="en-CA" smtClean="0"/>
-              <a:t>2024-06-24</a:t>
+              <a:t>2024-06-29</a:t>
             </a:fld>
             <a:endParaRPr lang="en-US"/>
           </a:p>
@@ -6426,7 +6426,7 @@
           <a:p>
             <a:fld id="{8B01BA73-A6C9-724F-BEE4-DD6E0535B08A}" type="datetime1">
               <a:rPr lang="en-CA" smtClean="0"/>
-              <a:t>2024-06-24</a:t>
+              <a:t>2024-06-29</a:t>
             </a:fld>
             <a:endParaRPr lang="en-US"/>
           </a:p>
@@ -6539,7 +6539,7 @@
           <a:p>
             <a:fld id="{64F10FC2-143A-8A49-B6D2-34756D069D62}" type="datetime1">
               <a:rPr lang="en-CA" smtClean="0"/>
-              <a:t>2024-06-24</a:t>
+              <a:t>2024-06-29</a:t>
             </a:fld>
             <a:endParaRPr lang="en-US"/>
           </a:p>
@@ -6850,7 +6850,7 @@
           <a:p>
             <a:fld id="{B274F44D-2F0C-7F4F-BCFD-8868E9836F56}" type="datetime1">
               <a:rPr lang="en-CA" smtClean="0"/>
-              <a:t>2024-06-24</a:t>
+              <a:t>2024-06-29</a:t>
             </a:fld>
             <a:endParaRPr lang="en-US"/>
           </a:p>
@@ -7138,7 +7138,7 @@
           <a:p>
             <a:fld id="{85DE3116-6E4F-D74A-8C8D-D8CF0F626DCF}" type="datetime1">
               <a:rPr lang="en-CA" smtClean="0"/>
-              <a:t>2024-06-24</a:t>
+              <a:t>2024-06-29</a:t>
             </a:fld>
             <a:endParaRPr lang="en-US"/>
           </a:p>
@@ -7379,7 +7379,7 @@
           <a:p>
             <a:fld id="{9A5E96CB-08FF-C240-B43E-C3C6CBABEAD7}" type="datetime1">
               <a:rPr lang="en-CA" smtClean="0"/>
-              <a:t>2024-06-24</a:t>
+              <a:t>2024-06-29</a:t>
             </a:fld>
             <a:endParaRPr lang="en-US"/>
           </a:p>

--- a/ppts/Architecture_chapter4.pptx
+++ b/ppts/Architecture_chapter4.pptx
@@ -5,43 +5,44 @@
     <p:sldMasterId id="2147483648" r:id="rId1"/>
   </p:sldMasterIdLst>
   <p:notesMasterIdLst>
-    <p:notesMasterId r:id="rId36"/>
+    <p:notesMasterId r:id="rId37"/>
   </p:notesMasterIdLst>
   <p:sldIdLst>
     <p:sldId id="256" r:id="rId2"/>
     <p:sldId id="257" r:id="rId3"/>
     <p:sldId id="261" r:id="rId4"/>
     <p:sldId id="267" r:id="rId5"/>
-    <p:sldId id="260" r:id="rId6"/>
-    <p:sldId id="264" r:id="rId7"/>
-    <p:sldId id="262" r:id="rId8"/>
-    <p:sldId id="266" r:id="rId9"/>
-    <p:sldId id="268" r:id="rId10"/>
-    <p:sldId id="269" r:id="rId11"/>
-    <p:sldId id="273" r:id="rId12"/>
-    <p:sldId id="274" r:id="rId13"/>
-    <p:sldId id="270" r:id="rId14"/>
-    <p:sldId id="275" r:id="rId15"/>
-    <p:sldId id="271" r:id="rId16"/>
-    <p:sldId id="276" r:id="rId17"/>
-    <p:sldId id="277" r:id="rId18"/>
-    <p:sldId id="258" r:id="rId19"/>
-    <p:sldId id="278" r:id="rId20"/>
-    <p:sldId id="279" r:id="rId21"/>
-    <p:sldId id="280" r:id="rId22"/>
-    <p:sldId id="282" r:id="rId23"/>
-    <p:sldId id="283" r:id="rId24"/>
-    <p:sldId id="284" r:id="rId25"/>
-    <p:sldId id="285" r:id="rId26"/>
-    <p:sldId id="286" r:id="rId27"/>
-    <p:sldId id="289" r:id="rId28"/>
-    <p:sldId id="290" r:id="rId29"/>
-    <p:sldId id="291" r:id="rId30"/>
-    <p:sldId id="287" r:id="rId31"/>
-    <p:sldId id="293" r:id="rId32"/>
-    <p:sldId id="259" r:id="rId33"/>
-    <p:sldId id="294" r:id="rId34"/>
-    <p:sldId id="288" r:id="rId35"/>
+    <p:sldId id="295" r:id="rId6"/>
+    <p:sldId id="260" r:id="rId7"/>
+    <p:sldId id="264" r:id="rId8"/>
+    <p:sldId id="262" r:id="rId9"/>
+    <p:sldId id="266" r:id="rId10"/>
+    <p:sldId id="268" r:id="rId11"/>
+    <p:sldId id="269" r:id="rId12"/>
+    <p:sldId id="273" r:id="rId13"/>
+    <p:sldId id="274" r:id="rId14"/>
+    <p:sldId id="270" r:id="rId15"/>
+    <p:sldId id="275" r:id="rId16"/>
+    <p:sldId id="271" r:id="rId17"/>
+    <p:sldId id="276" r:id="rId18"/>
+    <p:sldId id="277" r:id="rId19"/>
+    <p:sldId id="258" r:id="rId20"/>
+    <p:sldId id="278" r:id="rId21"/>
+    <p:sldId id="279" r:id="rId22"/>
+    <p:sldId id="280" r:id="rId23"/>
+    <p:sldId id="282" r:id="rId24"/>
+    <p:sldId id="283" r:id="rId25"/>
+    <p:sldId id="284" r:id="rId26"/>
+    <p:sldId id="285" r:id="rId27"/>
+    <p:sldId id="286" r:id="rId28"/>
+    <p:sldId id="289" r:id="rId29"/>
+    <p:sldId id="290" r:id="rId30"/>
+    <p:sldId id="291" r:id="rId31"/>
+    <p:sldId id="287" r:id="rId32"/>
+    <p:sldId id="293" r:id="rId33"/>
+    <p:sldId id="259" r:id="rId34"/>
+    <p:sldId id="294" r:id="rId35"/>
+    <p:sldId id="288" r:id="rId36"/>
   </p:sldIdLst>
   <p:sldSz cx="12192000" cy="6858000"/>
   <p:notesSz cx="6858000" cy="9144000"/>
@@ -157,6 +158,7 @@
         <p14:section name="4.2 Running Usecase" id="{F3333B0D-0956-4147-91DF-F22748C5EBB3}">
           <p14:sldIdLst>
             <p14:sldId id="267"/>
+            <p14:sldId id="295"/>
             <p14:sldId id="260"/>
             <p14:sldId id="264"/>
             <p14:sldId id="262"/>
@@ -989,7 +991,990 @@
 </dgm:colorsDef>
 </file>
 
+<file path=ppt/diagrams/colors2.xml><?xml version="1.0" encoding="utf-8"?>
+<dgm:colorsDef xmlns:dgm="http://schemas.openxmlformats.org/drawingml/2006/diagram" xmlns:a="http://schemas.openxmlformats.org/drawingml/2006/main" uniqueId="urn:microsoft.com/office/officeart/2005/8/colors/accent1_2">
+  <dgm:title val=""/>
+  <dgm:desc val=""/>
+  <dgm:catLst>
+    <dgm:cat type="accent1" pri="11200"/>
+  </dgm:catLst>
+  <dgm:styleLbl name="node0">
+    <dgm:fillClrLst meth="repeat">
+      <a:schemeClr val="accent1"/>
+    </dgm:fillClrLst>
+    <dgm:linClrLst meth="repeat">
+      <a:schemeClr val="lt1"/>
+    </dgm:linClrLst>
+    <dgm:effectClrLst/>
+    <dgm:txLinClrLst/>
+    <dgm:txFillClrLst/>
+    <dgm:txEffectClrLst/>
+  </dgm:styleLbl>
+  <dgm:styleLbl name="alignNode1">
+    <dgm:fillClrLst meth="repeat">
+      <a:schemeClr val="accent1"/>
+    </dgm:fillClrLst>
+    <dgm:linClrLst meth="repeat">
+      <a:schemeClr val="accent1"/>
+    </dgm:linClrLst>
+    <dgm:effectClrLst/>
+    <dgm:txLinClrLst/>
+    <dgm:txFillClrLst/>
+    <dgm:txEffectClrLst/>
+  </dgm:styleLbl>
+  <dgm:styleLbl name="node1">
+    <dgm:fillClrLst meth="repeat">
+      <a:schemeClr val="accent1"/>
+    </dgm:fillClrLst>
+    <dgm:linClrLst meth="repeat">
+      <a:schemeClr val="lt1"/>
+    </dgm:linClrLst>
+    <dgm:effectClrLst/>
+    <dgm:txLinClrLst/>
+    <dgm:txFillClrLst/>
+    <dgm:txEffectClrLst/>
+  </dgm:styleLbl>
+  <dgm:styleLbl name="lnNode1">
+    <dgm:fillClrLst meth="repeat">
+      <a:schemeClr val="accent1"/>
+    </dgm:fillClrLst>
+    <dgm:linClrLst meth="repeat">
+      <a:schemeClr val="lt1"/>
+    </dgm:linClrLst>
+    <dgm:effectClrLst/>
+    <dgm:txLinClrLst/>
+    <dgm:txFillClrLst/>
+    <dgm:txEffectClrLst/>
+  </dgm:styleLbl>
+  <dgm:styleLbl name="vennNode1">
+    <dgm:fillClrLst meth="repeat">
+      <a:schemeClr val="accent1">
+        <a:alpha val="50000"/>
+      </a:schemeClr>
+    </dgm:fillClrLst>
+    <dgm:linClrLst meth="repeat">
+      <a:schemeClr val="lt1"/>
+    </dgm:linClrLst>
+    <dgm:effectClrLst/>
+    <dgm:txLinClrLst/>
+    <dgm:txFillClrLst/>
+    <dgm:txEffectClrLst/>
+  </dgm:styleLbl>
+  <dgm:styleLbl name="node2">
+    <dgm:fillClrLst meth="repeat">
+      <a:schemeClr val="accent1"/>
+    </dgm:fillClrLst>
+    <dgm:linClrLst meth="repeat">
+      <a:schemeClr val="lt1"/>
+    </dgm:linClrLst>
+    <dgm:effectClrLst/>
+    <dgm:txLinClrLst/>
+    <dgm:txFillClrLst/>
+    <dgm:txEffectClrLst/>
+  </dgm:styleLbl>
+  <dgm:styleLbl name="node3">
+    <dgm:fillClrLst meth="repeat">
+      <a:schemeClr val="accent1"/>
+    </dgm:fillClrLst>
+    <dgm:linClrLst meth="repeat">
+      <a:schemeClr val="lt1"/>
+    </dgm:linClrLst>
+    <dgm:effectClrLst/>
+    <dgm:txLinClrLst/>
+    <dgm:txFillClrLst/>
+    <dgm:txEffectClrLst/>
+  </dgm:styleLbl>
+  <dgm:styleLbl name="node4">
+    <dgm:fillClrLst meth="repeat">
+      <a:schemeClr val="accent1"/>
+    </dgm:fillClrLst>
+    <dgm:linClrLst meth="repeat">
+      <a:schemeClr val="lt1"/>
+    </dgm:linClrLst>
+    <dgm:effectClrLst/>
+    <dgm:txLinClrLst/>
+    <dgm:txFillClrLst/>
+    <dgm:txEffectClrLst/>
+  </dgm:styleLbl>
+  <dgm:styleLbl name="fgImgPlace1">
+    <dgm:fillClrLst meth="repeat">
+      <a:schemeClr val="accent1">
+        <a:tint val="50000"/>
+      </a:schemeClr>
+    </dgm:fillClrLst>
+    <dgm:linClrLst meth="repeat">
+      <a:schemeClr val="lt1"/>
+    </dgm:linClrLst>
+    <dgm:effectClrLst/>
+    <dgm:txLinClrLst/>
+    <dgm:txFillClrLst meth="repeat">
+      <a:schemeClr val="lt1"/>
+    </dgm:txFillClrLst>
+    <dgm:txEffectClrLst/>
+  </dgm:styleLbl>
+  <dgm:styleLbl name="alignImgPlace1">
+    <dgm:fillClrLst meth="repeat">
+      <a:schemeClr val="accent1">
+        <a:tint val="50000"/>
+      </a:schemeClr>
+    </dgm:fillClrLst>
+    <dgm:linClrLst meth="repeat">
+      <a:schemeClr val="lt1"/>
+    </dgm:linClrLst>
+    <dgm:effectClrLst/>
+    <dgm:txLinClrLst/>
+    <dgm:txFillClrLst meth="repeat">
+      <a:schemeClr val="lt1"/>
+    </dgm:txFillClrLst>
+    <dgm:txEffectClrLst/>
+  </dgm:styleLbl>
+  <dgm:styleLbl name="bgImgPlace1">
+    <dgm:fillClrLst meth="repeat">
+      <a:schemeClr val="accent1">
+        <a:tint val="50000"/>
+      </a:schemeClr>
+    </dgm:fillClrLst>
+    <dgm:linClrLst meth="repeat">
+      <a:schemeClr val="lt1"/>
+    </dgm:linClrLst>
+    <dgm:effectClrLst/>
+    <dgm:txLinClrLst/>
+    <dgm:txFillClrLst meth="repeat">
+      <a:schemeClr val="lt1"/>
+    </dgm:txFillClrLst>
+    <dgm:txEffectClrLst/>
+  </dgm:styleLbl>
+  <dgm:styleLbl name="sibTrans2D1">
+    <dgm:fillClrLst meth="repeat">
+      <a:schemeClr val="accent1">
+        <a:tint val="60000"/>
+      </a:schemeClr>
+    </dgm:fillClrLst>
+    <dgm:linClrLst meth="repeat">
+      <a:schemeClr val="accent1">
+        <a:tint val="60000"/>
+      </a:schemeClr>
+    </dgm:linClrLst>
+    <dgm:effectClrLst/>
+    <dgm:txLinClrLst/>
+    <dgm:txFillClrLst/>
+    <dgm:txEffectClrLst/>
+  </dgm:styleLbl>
+  <dgm:styleLbl name="fgSibTrans2D1">
+    <dgm:fillClrLst meth="repeat">
+      <a:schemeClr val="accent1">
+        <a:tint val="60000"/>
+      </a:schemeClr>
+    </dgm:fillClrLst>
+    <dgm:linClrLst meth="repeat">
+      <a:schemeClr val="accent1">
+        <a:tint val="60000"/>
+      </a:schemeClr>
+    </dgm:linClrLst>
+    <dgm:effectClrLst/>
+    <dgm:txLinClrLst/>
+    <dgm:txFillClrLst/>
+    <dgm:txEffectClrLst/>
+  </dgm:styleLbl>
+  <dgm:styleLbl name="bgSibTrans2D1">
+    <dgm:fillClrLst meth="repeat">
+      <a:schemeClr val="accent1">
+        <a:tint val="60000"/>
+      </a:schemeClr>
+    </dgm:fillClrLst>
+    <dgm:linClrLst meth="repeat">
+      <a:schemeClr val="accent1">
+        <a:tint val="60000"/>
+      </a:schemeClr>
+    </dgm:linClrLst>
+    <dgm:effectClrLst/>
+    <dgm:txLinClrLst/>
+    <dgm:txFillClrLst/>
+    <dgm:txEffectClrLst/>
+  </dgm:styleLbl>
+  <dgm:styleLbl name="sibTrans1D1">
+    <dgm:fillClrLst meth="repeat">
+      <a:schemeClr val="accent1"/>
+    </dgm:fillClrLst>
+    <dgm:linClrLst meth="repeat">
+      <a:schemeClr val="accent1"/>
+    </dgm:linClrLst>
+    <dgm:effectClrLst/>
+    <dgm:txLinClrLst/>
+    <dgm:txFillClrLst meth="repeat">
+      <a:schemeClr val="tx1"/>
+    </dgm:txFillClrLst>
+    <dgm:txEffectClrLst/>
+  </dgm:styleLbl>
+  <dgm:styleLbl name="callout">
+    <dgm:fillClrLst meth="repeat">
+      <a:schemeClr val="accent1"/>
+    </dgm:fillClrLst>
+    <dgm:linClrLst meth="repeat">
+      <a:schemeClr val="accent1">
+        <a:tint val="50000"/>
+      </a:schemeClr>
+    </dgm:linClrLst>
+    <dgm:effectClrLst/>
+    <dgm:txLinClrLst/>
+    <dgm:txFillClrLst meth="repeat">
+      <a:schemeClr val="tx1"/>
+    </dgm:txFillClrLst>
+    <dgm:txEffectClrLst/>
+  </dgm:styleLbl>
+  <dgm:styleLbl name="asst0">
+    <dgm:fillClrLst meth="repeat">
+      <a:schemeClr val="accent1"/>
+    </dgm:fillClrLst>
+    <dgm:linClrLst meth="repeat">
+      <a:schemeClr val="lt1"/>
+    </dgm:linClrLst>
+    <dgm:effectClrLst/>
+    <dgm:txLinClrLst/>
+    <dgm:txFillClrLst/>
+    <dgm:txEffectClrLst/>
+  </dgm:styleLbl>
+  <dgm:styleLbl name="asst1">
+    <dgm:fillClrLst meth="repeat">
+      <a:schemeClr val="accent1"/>
+    </dgm:fillClrLst>
+    <dgm:linClrLst meth="repeat">
+      <a:schemeClr val="lt1"/>
+    </dgm:linClrLst>
+    <dgm:effectClrLst/>
+    <dgm:txLinClrLst/>
+    <dgm:txFillClrLst/>
+    <dgm:txEffectClrLst/>
+  </dgm:styleLbl>
+  <dgm:styleLbl name="asst2">
+    <dgm:fillClrLst meth="repeat">
+      <a:schemeClr val="accent1"/>
+    </dgm:fillClrLst>
+    <dgm:linClrLst meth="repeat">
+      <a:schemeClr val="lt1"/>
+    </dgm:linClrLst>
+    <dgm:effectClrLst/>
+    <dgm:txLinClrLst/>
+    <dgm:txFillClrLst/>
+    <dgm:txEffectClrLst/>
+  </dgm:styleLbl>
+  <dgm:styleLbl name="asst3">
+    <dgm:fillClrLst meth="repeat">
+      <a:schemeClr val="accent1"/>
+    </dgm:fillClrLst>
+    <dgm:linClrLst meth="repeat">
+      <a:schemeClr val="lt1"/>
+    </dgm:linClrLst>
+    <dgm:effectClrLst/>
+    <dgm:txLinClrLst/>
+    <dgm:txFillClrLst/>
+    <dgm:txEffectClrLst/>
+  </dgm:styleLbl>
+  <dgm:styleLbl name="asst4">
+    <dgm:fillClrLst meth="repeat">
+      <a:schemeClr val="accent1"/>
+    </dgm:fillClrLst>
+    <dgm:linClrLst meth="repeat">
+      <a:schemeClr val="lt1"/>
+    </dgm:linClrLst>
+    <dgm:effectClrLst/>
+    <dgm:txLinClrLst/>
+    <dgm:txFillClrLst/>
+    <dgm:txEffectClrLst/>
+  </dgm:styleLbl>
+  <dgm:styleLbl name="parChTrans2D1">
+    <dgm:fillClrLst meth="repeat">
+      <a:schemeClr val="accent1">
+        <a:tint val="60000"/>
+      </a:schemeClr>
+    </dgm:fillClrLst>
+    <dgm:linClrLst meth="repeat">
+      <a:schemeClr val="accent1">
+        <a:tint val="60000"/>
+      </a:schemeClr>
+    </dgm:linClrLst>
+    <dgm:effectClrLst/>
+    <dgm:txLinClrLst/>
+    <dgm:txFillClrLst meth="repeat">
+      <a:schemeClr val="lt1"/>
+    </dgm:txFillClrLst>
+    <dgm:txEffectClrLst/>
+  </dgm:styleLbl>
+  <dgm:styleLbl name="parChTrans2D2">
+    <dgm:fillClrLst meth="repeat">
+      <a:schemeClr val="accent1"/>
+    </dgm:fillClrLst>
+    <dgm:linClrLst meth="repeat">
+      <a:schemeClr val="accent1"/>
+    </dgm:linClrLst>
+    <dgm:effectClrLst/>
+    <dgm:txLinClrLst/>
+    <dgm:txFillClrLst meth="repeat">
+      <a:schemeClr val="lt1"/>
+    </dgm:txFillClrLst>
+    <dgm:txEffectClrLst/>
+  </dgm:styleLbl>
+  <dgm:styleLbl name="parChTrans2D3">
+    <dgm:fillClrLst meth="repeat">
+      <a:schemeClr val="accent1"/>
+    </dgm:fillClrLst>
+    <dgm:linClrLst meth="repeat">
+      <a:schemeClr val="accent1"/>
+    </dgm:linClrLst>
+    <dgm:effectClrLst/>
+    <dgm:txLinClrLst/>
+    <dgm:txFillClrLst meth="repeat">
+      <a:schemeClr val="lt1"/>
+    </dgm:txFillClrLst>
+    <dgm:txEffectClrLst/>
+  </dgm:styleLbl>
+  <dgm:styleLbl name="parChTrans2D4">
+    <dgm:fillClrLst meth="repeat">
+      <a:schemeClr val="accent1"/>
+    </dgm:fillClrLst>
+    <dgm:linClrLst meth="repeat">
+      <a:schemeClr val="accent1"/>
+    </dgm:linClrLst>
+    <dgm:effectClrLst/>
+    <dgm:txLinClrLst/>
+    <dgm:txFillClrLst meth="repeat">
+      <a:schemeClr val="lt1"/>
+    </dgm:txFillClrLst>
+    <dgm:txEffectClrLst/>
+  </dgm:styleLbl>
+  <dgm:styleLbl name="parChTrans1D1">
+    <dgm:fillClrLst meth="repeat">
+      <a:schemeClr val="accent1"/>
+    </dgm:fillClrLst>
+    <dgm:linClrLst meth="repeat">
+      <a:schemeClr val="accent1">
+        <a:shade val="60000"/>
+      </a:schemeClr>
+    </dgm:linClrLst>
+    <dgm:effectClrLst/>
+    <dgm:txLinClrLst/>
+    <dgm:txFillClrLst meth="repeat">
+      <a:schemeClr val="tx1"/>
+    </dgm:txFillClrLst>
+    <dgm:txEffectClrLst/>
+  </dgm:styleLbl>
+  <dgm:styleLbl name="parChTrans1D2">
+    <dgm:fillClrLst meth="repeat">
+      <a:schemeClr val="accent1"/>
+    </dgm:fillClrLst>
+    <dgm:linClrLst meth="repeat">
+      <a:schemeClr val="accent1">
+        <a:shade val="60000"/>
+      </a:schemeClr>
+    </dgm:linClrLst>
+    <dgm:effectClrLst/>
+    <dgm:txLinClrLst/>
+    <dgm:txFillClrLst meth="repeat">
+      <a:schemeClr val="tx1"/>
+    </dgm:txFillClrLst>
+    <dgm:txEffectClrLst/>
+  </dgm:styleLbl>
+  <dgm:styleLbl name="parChTrans1D3">
+    <dgm:fillClrLst meth="repeat">
+      <a:schemeClr val="accent1"/>
+    </dgm:fillClrLst>
+    <dgm:linClrLst meth="repeat">
+      <a:schemeClr val="accent1">
+        <a:shade val="80000"/>
+      </a:schemeClr>
+    </dgm:linClrLst>
+    <dgm:effectClrLst/>
+    <dgm:txLinClrLst/>
+    <dgm:txFillClrLst meth="repeat">
+      <a:schemeClr val="tx1"/>
+    </dgm:txFillClrLst>
+    <dgm:txEffectClrLst/>
+  </dgm:styleLbl>
+  <dgm:styleLbl name="parChTrans1D4">
+    <dgm:fillClrLst meth="repeat">
+      <a:schemeClr val="accent1"/>
+    </dgm:fillClrLst>
+    <dgm:linClrLst meth="repeat">
+      <a:schemeClr val="accent1">
+        <a:shade val="80000"/>
+      </a:schemeClr>
+    </dgm:linClrLst>
+    <dgm:effectClrLst/>
+    <dgm:txLinClrLst/>
+    <dgm:txFillClrLst meth="repeat">
+      <a:schemeClr val="tx1"/>
+    </dgm:txFillClrLst>
+    <dgm:txEffectClrLst/>
+  </dgm:styleLbl>
+  <dgm:styleLbl name="fgAcc1">
+    <dgm:fillClrLst meth="repeat">
+      <a:schemeClr val="lt1">
+        <a:alpha val="90000"/>
+      </a:schemeClr>
+    </dgm:fillClrLst>
+    <dgm:linClrLst meth="repeat">
+      <a:schemeClr val="accent1"/>
+    </dgm:linClrLst>
+    <dgm:effectClrLst/>
+    <dgm:txLinClrLst/>
+    <dgm:txFillClrLst meth="repeat">
+      <a:schemeClr val="dk1"/>
+    </dgm:txFillClrLst>
+    <dgm:txEffectClrLst/>
+  </dgm:styleLbl>
+  <dgm:styleLbl name="conFgAcc1">
+    <dgm:fillClrLst meth="repeat">
+      <a:schemeClr val="lt1">
+        <a:alpha val="90000"/>
+      </a:schemeClr>
+    </dgm:fillClrLst>
+    <dgm:linClrLst meth="repeat">
+      <a:schemeClr val="accent1"/>
+    </dgm:linClrLst>
+    <dgm:effectClrLst/>
+    <dgm:txLinClrLst/>
+    <dgm:txFillClrLst meth="repeat">
+      <a:schemeClr val="dk1"/>
+    </dgm:txFillClrLst>
+    <dgm:txEffectClrLst/>
+  </dgm:styleLbl>
+  <dgm:styleLbl name="alignAcc1">
+    <dgm:fillClrLst meth="repeat">
+      <a:schemeClr val="lt1">
+        <a:alpha val="90000"/>
+      </a:schemeClr>
+    </dgm:fillClrLst>
+    <dgm:linClrLst meth="repeat">
+      <a:schemeClr val="accent1"/>
+    </dgm:linClrLst>
+    <dgm:effectClrLst/>
+    <dgm:txLinClrLst/>
+    <dgm:txFillClrLst meth="repeat">
+      <a:schemeClr val="dk1"/>
+    </dgm:txFillClrLst>
+    <dgm:txEffectClrLst/>
+  </dgm:styleLbl>
+  <dgm:styleLbl name="trAlignAcc1">
+    <dgm:fillClrLst meth="repeat">
+      <a:schemeClr val="lt1">
+        <a:alpha val="40000"/>
+      </a:schemeClr>
+    </dgm:fillClrLst>
+    <dgm:linClrLst meth="repeat">
+      <a:schemeClr val="accent1"/>
+    </dgm:linClrLst>
+    <dgm:effectClrLst/>
+    <dgm:txLinClrLst/>
+    <dgm:txFillClrLst meth="repeat">
+      <a:schemeClr val="dk1"/>
+    </dgm:txFillClrLst>
+    <dgm:txEffectClrLst/>
+  </dgm:styleLbl>
+  <dgm:styleLbl name="bgAcc1">
+    <dgm:fillClrLst meth="repeat">
+      <a:schemeClr val="lt1">
+        <a:alpha val="90000"/>
+      </a:schemeClr>
+    </dgm:fillClrLst>
+    <dgm:linClrLst meth="repeat">
+      <a:schemeClr val="accent1"/>
+    </dgm:linClrLst>
+    <dgm:effectClrLst/>
+    <dgm:txLinClrLst/>
+    <dgm:txFillClrLst meth="repeat">
+      <a:schemeClr val="dk1"/>
+    </dgm:txFillClrLst>
+    <dgm:txEffectClrLst/>
+  </dgm:styleLbl>
+  <dgm:styleLbl name="solidFgAcc1">
+    <dgm:fillClrLst meth="repeat">
+      <a:schemeClr val="lt1"/>
+    </dgm:fillClrLst>
+    <dgm:linClrLst meth="repeat">
+      <a:schemeClr val="accent1"/>
+    </dgm:linClrLst>
+    <dgm:effectClrLst/>
+    <dgm:txLinClrLst/>
+    <dgm:txFillClrLst meth="repeat">
+      <a:schemeClr val="dk1"/>
+    </dgm:txFillClrLst>
+    <dgm:txEffectClrLst/>
+  </dgm:styleLbl>
+  <dgm:styleLbl name="solidAlignAcc1">
+    <dgm:fillClrLst meth="repeat">
+      <a:schemeClr val="lt1"/>
+    </dgm:fillClrLst>
+    <dgm:linClrLst meth="repeat">
+      <a:schemeClr val="accent1"/>
+    </dgm:linClrLst>
+    <dgm:effectClrLst/>
+    <dgm:txLinClrLst/>
+    <dgm:txFillClrLst meth="repeat">
+      <a:schemeClr val="dk1"/>
+    </dgm:txFillClrLst>
+    <dgm:txEffectClrLst/>
+  </dgm:styleLbl>
+  <dgm:styleLbl name="solidBgAcc1">
+    <dgm:fillClrLst meth="repeat">
+      <a:schemeClr val="lt1"/>
+    </dgm:fillClrLst>
+    <dgm:linClrLst meth="repeat">
+      <a:schemeClr val="accent1"/>
+    </dgm:linClrLst>
+    <dgm:effectClrLst/>
+    <dgm:txLinClrLst/>
+    <dgm:txFillClrLst meth="repeat">
+      <a:schemeClr val="dk1"/>
+    </dgm:txFillClrLst>
+    <dgm:txEffectClrLst/>
+  </dgm:styleLbl>
+  <dgm:styleLbl name="fgAccFollowNode1">
+    <dgm:fillClrLst meth="repeat">
+      <a:schemeClr val="accent1">
+        <a:alpha val="90000"/>
+        <a:tint val="40000"/>
+      </a:schemeClr>
+    </dgm:fillClrLst>
+    <dgm:linClrLst meth="repeat">
+      <a:schemeClr val="accent1">
+        <a:alpha val="90000"/>
+        <a:tint val="40000"/>
+      </a:schemeClr>
+    </dgm:linClrLst>
+    <dgm:effectClrLst/>
+    <dgm:txLinClrLst/>
+    <dgm:txFillClrLst meth="repeat">
+      <a:schemeClr val="dk1"/>
+    </dgm:txFillClrLst>
+    <dgm:txEffectClrLst/>
+  </dgm:styleLbl>
+  <dgm:styleLbl name="alignAccFollowNode1">
+    <dgm:fillClrLst meth="repeat">
+      <a:schemeClr val="accent1">
+        <a:alpha val="90000"/>
+        <a:tint val="40000"/>
+      </a:schemeClr>
+    </dgm:fillClrLst>
+    <dgm:linClrLst meth="repeat">
+      <a:schemeClr val="accent1">
+        <a:alpha val="90000"/>
+        <a:tint val="40000"/>
+      </a:schemeClr>
+    </dgm:linClrLst>
+    <dgm:effectClrLst/>
+    <dgm:txLinClrLst/>
+    <dgm:txFillClrLst meth="repeat">
+      <a:schemeClr val="dk1"/>
+    </dgm:txFillClrLst>
+    <dgm:txEffectClrLst/>
+  </dgm:styleLbl>
+  <dgm:styleLbl name="bgAccFollowNode1">
+    <dgm:fillClrLst meth="repeat">
+      <a:schemeClr val="accent1">
+        <a:alpha val="90000"/>
+        <a:tint val="40000"/>
+      </a:schemeClr>
+    </dgm:fillClrLst>
+    <dgm:linClrLst meth="repeat">
+      <a:schemeClr val="accent1">
+        <a:alpha val="90000"/>
+        <a:tint val="40000"/>
+      </a:schemeClr>
+    </dgm:linClrLst>
+    <dgm:effectClrLst/>
+    <dgm:txLinClrLst/>
+    <dgm:txFillClrLst meth="repeat">
+      <a:schemeClr val="dk1"/>
+    </dgm:txFillClrLst>
+    <dgm:txEffectClrLst/>
+  </dgm:styleLbl>
+  <dgm:styleLbl name="fgAcc0">
+    <dgm:fillClrLst meth="repeat">
+      <a:schemeClr val="lt1">
+        <a:alpha val="90000"/>
+      </a:schemeClr>
+    </dgm:fillClrLst>
+    <dgm:linClrLst meth="repeat">
+      <a:schemeClr val="accent1"/>
+    </dgm:linClrLst>
+    <dgm:effectClrLst/>
+    <dgm:txLinClrLst/>
+    <dgm:txFillClrLst meth="repeat">
+      <a:schemeClr val="dk1"/>
+    </dgm:txFillClrLst>
+    <dgm:txEffectClrLst/>
+  </dgm:styleLbl>
+  <dgm:styleLbl name="fgAcc2">
+    <dgm:fillClrLst meth="repeat">
+      <a:schemeClr val="lt1">
+        <a:alpha val="90000"/>
+      </a:schemeClr>
+    </dgm:fillClrLst>
+    <dgm:linClrLst meth="repeat">
+      <a:schemeClr val="accent1"/>
+    </dgm:linClrLst>
+    <dgm:effectClrLst/>
+    <dgm:txLinClrLst/>
+    <dgm:txFillClrLst meth="repeat">
+      <a:schemeClr val="dk1"/>
+    </dgm:txFillClrLst>
+    <dgm:txEffectClrLst/>
+  </dgm:styleLbl>
+  <dgm:styleLbl name="fgAcc3">
+    <dgm:fillClrLst meth="repeat">
+      <a:schemeClr val="lt1">
+        <a:alpha val="90000"/>
+      </a:schemeClr>
+    </dgm:fillClrLst>
+    <dgm:linClrLst meth="repeat">
+      <a:schemeClr val="accent1"/>
+    </dgm:linClrLst>
+    <dgm:effectClrLst/>
+    <dgm:txLinClrLst/>
+    <dgm:txFillClrLst meth="repeat">
+      <a:schemeClr val="dk1"/>
+    </dgm:txFillClrLst>
+    <dgm:txEffectClrLst/>
+  </dgm:styleLbl>
+  <dgm:styleLbl name="fgAcc4">
+    <dgm:fillClrLst meth="repeat">
+      <a:schemeClr val="lt1">
+        <a:alpha val="90000"/>
+      </a:schemeClr>
+    </dgm:fillClrLst>
+    <dgm:linClrLst meth="repeat">
+      <a:schemeClr val="accent1"/>
+    </dgm:linClrLst>
+    <dgm:effectClrLst/>
+    <dgm:txLinClrLst/>
+    <dgm:txFillClrLst meth="repeat">
+      <a:schemeClr val="dk1"/>
+    </dgm:txFillClrLst>
+    <dgm:txEffectClrLst/>
+  </dgm:styleLbl>
+  <dgm:styleLbl name="bgShp">
+    <dgm:fillClrLst meth="repeat">
+      <a:schemeClr val="accent1">
+        <a:tint val="40000"/>
+      </a:schemeClr>
+    </dgm:fillClrLst>
+    <dgm:linClrLst meth="repeat">
+      <a:schemeClr val="accent1"/>
+    </dgm:linClrLst>
+    <dgm:effectClrLst/>
+    <dgm:txLinClrLst/>
+    <dgm:txFillClrLst meth="repeat">
+      <a:schemeClr val="dk1"/>
+    </dgm:txFillClrLst>
+    <dgm:txEffectClrLst/>
+  </dgm:styleLbl>
+  <dgm:styleLbl name="dkBgShp">
+    <dgm:fillClrLst meth="repeat">
+      <a:schemeClr val="accent1">
+        <a:shade val="80000"/>
+      </a:schemeClr>
+    </dgm:fillClrLst>
+    <dgm:linClrLst meth="repeat">
+      <a:schemeClr val="accent1"/>
+    </dgm:linClrLst>
+    <dgm:effectClrLst/>
+    <dgm:txLinClrLst/>
+    <dgm:txFillClrLst meth="repeat">
+      <a:schemeClr val="lt1"/>
+    </dgm:txFillClrLst>
+    <dgm:txEffectClrLst/>
+  </dgm:styleLbl>
+  <dgm:styleLbl name="trBgShp">
+    <dgm:fillClrLst meth="repeat">
+      <a:schemeClr val="accent1">
+        <a:tint val="50000"/>
+        <a:alpha val="40000"/>
+      </a:schemeClr>
+    </dgm:fillClrLst>
+    <dgm:linClrLst meth="repeat">
+      <a:schemeClr val="accent1"/>
+    </dgm:linClrLst>
+    <dgm:effectClrLst/>
+    <dgm:txLinClrLst/>
+    <dgm:txFillClrLst meth="repeat">
+      <a:schemeClr val="lt1"/>
+    </dgm:txFillClrLst>
+    <dgm:txEffectClrLst/>
+  </dgm:styleLbl>
+  <dgm:styleLbl name="fgShp">
+    <dgm:fillClrLst meth="repeat">
+      <a:schemeClr val="accent1">
+        <a:tint val="60000"/>
+      </a:schemeClr>
+    </dgm:fillClrLst>
+    <dgm:linClrLst meth="repeat">
+      <a:schemeClr val="lt1"/>
+    </dgm:linClrLst>
+    <dgm:effectClrLst/>
+    <dgm:txLinClrLst/>
+    <dgm:txFillClrLst meth="repeat">
+      <a:schemeClr val="dk1"/>
+    </dgm:txFillClrLst>
+    <dgm:txEffectClrLst/>
+  </dgm:styleLbl>
+  <dgm:styleLbl name="revTx">
+    <dgm:fillClrLst meth="repeat">
+      <a:schemeClr val="lt1">
+        <a:alpha val="0"/>
+      </a:schemeClr>
+    </dgm:fillClrLst>
+    <dgm:linClrLst meth="repeat">
+      <a:schemeClr val="dk1">
+        <a:alpha val="0"/>
+      </a:schemeClr>
+    </dgm:linClrLst>
+    <dgm:effectClrLst/>
+    <dgm:txLinClrLst/>
+    <dgm:txFillClrLst meth="repeat">
+      <a:schemeClr val="tx1"/>
+    </dgm:txFillClrLst>
+    <dgm:txEffectClrLst/>
+  </dgm:styleLbl>
+</dgm:colorsDef>
+</file>
+
 <file path=ppt/diagrams/data1.xml><?xml version="1.0" encoding="utf-8"?>
+<dgm:dataModel xmlns:dgm="http://schemas.openxmlformats.org/drawingml/2006/diagram" xmlns:a="http://schemas.openxmlformats.org/drawingml/2006/main">
+  <dgm:ptLst>
+    <dgm:pt modelId="{427B3608-5B1F-E841-BE6C-E1C72F307E5E}" type="doc">
+      <dgm:prSet loTypeId="urn:microsoft.com/office/officeart/2005/8/layout/pyramid1" loCatId="" qsTypeId="urn:microsoft.com/office/officeart/2005/8/quickstyle/simple1" qsCatId="simple" csTypeId="urn:microsoft.com/office/officeart/2005/8/colors/accent1_2" csCatId="accent1" phldr="1"/>
+      <dgm:spPr/>
+    </dgm:pt>
+    <dgm:pt modelId="{46AD4E2E-4473-FF4C-A5E1-A1E87DC874F2}">
+      <dgm:prSet phldrT="[Text]" custT="1"/>
+      <dgm:spPr>
+        <a:solidFill>
+          <a:srgbClr val="FFAF45"/>
+        </a:solidFill>
+      </dgm:spPr>
+      <dgm:t>
+        <a:bodyPr/>
+        <a:lstStyle/>
+        <a:p>
+          <a:r>
+            <a:rPr lang="en-US" sz="3600" dirty="0"/>
+            <a:t>API</a:t>
+          </a:r>
+          <a:endParaRPr lang="en-US" sz="2400" dirty="0"/>
+        </a:p>
+      </dgm:t>
+    </dgm:pt>
+    <dgm:pt modelId="{7FA58BE9-E554-964B-8326-8CFFB1D3B09A}" type="parTrans" cxnId="{209C345B-B6AD-9247-96CE-00346C003B07}">
+      <dgm:prSet/>
+      <dgm:spPr/>
+      <dgm:t>
+        <a:bodyPr/>
+        <a:lstStyle/>
+        <a:p>
+          <a:endParaRPr lang="en-US"/>
+        </a:p>
+      </dgm:t>
+    </dgm:pt>
+    <dgm:pt modelId="{18973BD3-F275-1141-BF49-27E510464C8C}" type="sibTrans" cxnId="{209C345B-B6AD-9247-96CE-00346C003B07}">
+      <dgm:prSet/>
+      <dgm:spPr/>
+      <dgm:t>
+        <a:bodyPr/>
+        <a:lstStyle/>
+        <a:p>
+          <a:endParaRPr lang="en-US"/>
+        </a:p>
+      </dgm:t>
+    </dgm:pt>
+    <dgm:pt modelId="{3143BF36-0ACA-2648-8AC0-294D1D8D5C77}">
+      <dgm:prSet phldrT="[Text]" custT="1"/>
+      <dgm:spPr>
+        <a:solidFill>
+          <a:srgbClr val="FB6D48"/>
+        </a:solidFill>
+      </dgm:spPr>
+      <dgm:t>
+        <a:bodyPr/>
+        <a:lstStyle/>
+        <a:p>
+          <a:r>
+            <a:rPr lang="en-US" sz="3600" dirty="0"/>
+            <a:t>Framework for Efficient Operators</a:t>
+          </a:r>
+        </a:p>
+      </dgm:t>
+    </dgm:pt>
+    <dgm:pt modelId="{C6130023-5A06-6A47-ACB2-2A652496C0D7}" type="parTrans" cxnId="{099489F3-24BB-914E-8E4B-1C761192F725}">
+      <dgm:prSet/>
+      <dgm:spPr/>
+      <dgm:t>
+        <a:bodyPr/>
+        <a:lstStyle/>
+        <a:p>
+          <a:endParaRPr lang="en-US"/>
+        </a:p>
+      </dgm:t>
+    </dgm:pt>
+    <dgm:pt modelId="{183DB980-65AB-ED47-8B24-14EFF176A284}" type="sibTrans" cxnId="{099489F3-24BB-914E-8E4B-1C761192F725}">
+      <dgm:prSet/>
+      <dgm:spPr/>
+      <dgm:t>
+        <a:bodyPr/>
+        <a:lstStyle/>
+        <a:p>
+          <a:endParaRPr lang="en-US"/>
+        </a:p>
+      </dgm:t>
+    </dgm:pt>
+    <dgm:pt modelId="{A13013FD-ED7B-8948-ADC0-443E703424CF}">
+      <dgm:prSet phldrT="[Text]" custT="1"/>
+      <dgm:spPr>
+        <a:solidFill>
+          <a:srgbClr val="D74B76"/>
+        </a:solidFill>
+      </dgm:spPr>
+      <dgm:t>
+        <a:bodyPr/>
+        <a:lstStyle/>
+        <a:p>
+          <a:r>
+            <a:rPr lang="en-US" sz="3600" dirty="0"/>
+            <a:t>Graph Representation</a:t>
+          </a:r>
+        </a:p>
+      </dgm:t>
+    </dgm:pt>
+    <dgm:pt modelId="{84DD2C71-B78D-3042-A621-B09A48864BBA}" type="parTrans" cxnId="{BBE3A374-4EA0-3F4A-9D82-2D8871521FB7}">
+      <dgm:prSet/>
+      <dgm:spPr/>
+      <dgm:t>
+        <a:bodyPr/>
+        <a:lstStyle/>
+        <a:p>
+          <a:endParaRPr lang="en-US"/>
+        </a:p>
+      </dgm:t>
+    </dgm:pt>
+    <dgm:pt modelId="{8C3AD0B7-451F-8441-B687-487FB05B1DB9}" type="sibTrans" cxnId="{BBE3A374-4EA0-3F4A-9D82-2D8871521FB7}">
+      <dgm:prSet/>
+      <dgm:spPr/>
+      <dgm:t>
+        <a:bodyPr/>
+        <a:lstStyle/>
+        <a:p>
+          <a:endParaRPr lang="en-US"/>
+        </a:p>
+      </dgm:t>
+    </dgm:pt>
+    <dgm:pt modelId="{B90557EF-5532-FB48-8369-7ECBC4FAA9A5}" type="pres">
+      <dgm:prSet presAssocID="{427B3608-5B1F-E841-BE6C-E1C72F307E5E}" presName="Name0" presStyleCnt="0">
+        <dgm:presLayoutVars>
+          <dgm:dir/>
+          <dgm:animLvl val="lvl"/>
+          <dgm:resizeHandles val="exact"/>
+        </dgm:presLayoutVars>
+      </dgm:prSet>
+      <dgm:spPr/>
+    </dgm:pt>
+    <dgm:pt modelId="{E081E212-1FC7-2844-8BF3-11D62AA82ECB}" type="pres">
+      <dgm:prSet presAssocID="{46AD4E2E-4473-FF4C-A5E1-A1E87DC874F2}" presName="Name8" presStyleCnt="0"/>
+      <dgm:spPr/>
+    </dgm:pt>
+    <dgm:pt modelId="{6DDF814E-369D-5F4B-A0C4-C17BCE68CA23}" type="pres">
+      <dgm:prSet presAssocID="{46AD4E2E-4473-FF4C-A5E1-A1E87DC874F2}" presName="level" presStyleLbl="node1" presStyleIdx="0" presStyleCnt="3">
+        <dgm:presLayoutVars>
+          <dgm:chMax val="1"/>
+          <dgm:bulletEnabled val="1"/>
+        </dgm:presLayoutVars>
+      </dgm:prSet>
+      <dgm:spPr/>
+    </dgm:pt>
+    <dgm:pt modelId="{2BFCB081-A678-F344-A7F9-6D64DFB10ABE}" type="pres">
+      <dgm:prSet presAssocID="{46AD4E2E-4473-FF4C-A5E1-A1E87DC874F2}" presName="levelTx" presStyleLbl="revTx" presStyleIdx="0" presStyleCnt="0">
+        <dgm:presLayoutVars>
+          <dgm:chMax val="1"/>
+          <dgm:bulletEnabled val="1"/>
+        </dgm:presLayoutVars>
+      </dgm:prSet>
+      <dgm:spPr/>
+    </dgm:pt>
+    <dgm:pt modelId="{7EFE8F88-3DC5-F245-8F46-6B9220169344}" type="pres">
+      <dgm:prSet presAssocID="{3143BF36-0ACA-2648-8AC0-294D1D8D5C77}" presName="Name8" presStyleCnt="0"/>
+      <dgm:spPr/>
+    </dgm:pt>
+    <dgm:pt modelId="{C5488AB7-8642-0C42-B81C-654D9C147FFE}" type="pres">
+      <dgm:prSet presAssocID="{3143BF36-0ACA-2648-8AC0-294D1D8D5C77}" presName="level" presStyleLbl="node1" presStyleIdx="1" presStyleCnt="3">
+        <dgm:presLayoutVars>
+          <dgm:chMax val="1"/>
+          <dgm:bulletEnabled val="1"/>
+        </dgm:presLayoutVars>
+      </dgm:prSet>
+      <dgm:spPr/>
+    </dgm:pt>
+    <dgm:pt modelId="{DD8A261D-CD78-634C-ACF5-2F6AA4EB5F70}" type="pres">
+      <dgm:prSet presAssocID="{3143BF36-0ACA-2648-8AC0-294D1D8D5C77}" presName="levelTx" presStyleLbl="revTx" presStyleIdx="0" presStyleCnt="0">
+        <dgm:presLayoutVars>
+          <dgm:chMax val="1"/>
+          <dgm:bulletEnabled val="1"/>
+        </dgm:presLayoutVars>
+      </dgm:prSet>
+      <dgm:spPr/>
+    </dgm:pt>
+    <dgm:pt modelId="{3399933A-D203-2346-9F3A-B88BA52A820C}" type="pres">
+      <dgm:prSet presAssocID="{A13013FD-ED7B-8948-ADC0-443E703424CF}" presName="Name8" presStyleCnt="0"/>
+      <dgm:spPr/>
+    </dgm:pt>
+    <dgm:pt modelId="{6BF72CD1-BCBF-EC4D-AC18-E01BE8783D12}" type="pres">
+      <dgm:prSet presAssocID="{A13013FD-ED7B-8948-ADC0-443E703424CF}" presName="level" presStyleLbl="node1" presStyleIdx="2" presStyleCnt="3">
+        <dgm:presLayoutVars>
+          <dgm:chMax val="1"/>
+          <dgm:bulletEnabled val="1"/>
+        </dgm:presLayoutVars>
+      </dgm:prSet>
+      <dgm:spPr/>
+    </dgm:pt>
+    <dgm:pt modelId="{287F4998-291E-9943-AA49-B2812690BCAA}" type="pres">
+      <dgm:prSet presAssocID="{A13013FD-ED7B-8948-ADC0-443E703424CF}" presName="levelTx" presStyleLbl="revTx" presStyleIdx="0" presStyleCnt="0">
+        <dgm:presLayoutVars>
+          <dgm:chMax val="1"/>
+          <dgm:bulletEnabled val="1"/>
+        </dgm:presLayoutVars>
+      </dgm:prSet>
+      <dgm:spPr/>
+    </dgm:pt>
+  </dgm:ptLst>
+  <dgm:cxnLst>
+    <dgm:cxn modelId="{D4DEB609-7CB1-934B-B05B-16999B33C7DD}" type="presOf" srcId="{A13013FD-ED7B-8948-ADC0-443E703424CF}" destId="{287F4998-291E-9943-AA49-B2812690BCAA}" srcOrd="1" destOrd="0" presId="urn:microsoft.com/office/officeart/2005/8/layout/pyramid1"/>
+    <dgm:cxn modelId="{A4EE4E24-F6C7-F04F-88A8-4D8E098ACC72}" type="presOf" srcId="{46AD4E2E-4473-FF4C-A5E1-A1E87DC874F2}" destId="{2BFCB081-A678-F344-A7F9-6D64DFB10ABE}" srcOrd="1" destOrd="0" presId="urn:microsoft.com/office/officeart/2005/8/layout/pyramid1"/>
+    <dgm:cxn modelId="{14AF955A-EE8B-3B45-BE52-81F9A92E98D4}" type="presOf" srcId="{427B3608-5B1F-E841-BE6C-E1C72F307E5E}" destId="{B90557EF-5532-FB48-8369-7ECBC4FAA9A5}" srcOrd="0" destOrd="0" presId="urn:microsoft.com/office/officeart/2005/8/layout/pyramid1"/>
+    <dgm:cxn modelId="{209C345B-B6AD-9247-96CE-00346C003B07}" srcId="{427B3608-5B1F-E841-BE6C-E1C72F307E5E}" destId="{46AD4E2E-4473-FF4C-A5E1-A1E87DC874F2}" srcOrd="0" destOrd="0" parTransId="{7FA58BE9-E554-964B-8326-8CFFB1D3B09A}" sibTransId="{18973BD3-F275-1141-BF49-27E510464C8C}"/>
+    <dgm:cxn modelId="{ED88995F-EEBC-604D-AF84-1BA1F5C8A810}" type="presOf" srcId="{46AD4E2E-4473-FF4C-A5E1-A1E87DC874F2}" destId="{6DDF814E-369D-5F4B-A0C4-C17BCE68CA23}" srcOrd="0" destOrd="0" presId="urn:microsoft.com/office/officeart/2005/8/layout/pyramid1"/>
+    <dgm:cxn modelId="{BBE3A374-4EA0-3F4A-9D82-2D8871521FB7}" srcId="{427B3608-5B1F-E841-BE6C-E1C72F307E5E}" destId="{A13013FD-ED7B-8948-ADC0-443E703424CF}" srcOrd="2" destOrd="0" parTransId="{84DD2C71-B78D-3042-A621-B09A48864BBA}" sibTransId="{8C3AD0B7-451F-8441-B687-487FB05B1DB9}"/>
+    <dgm:cxn modelId="{DAB971AC-F67B-BE4A-B74D-2D87A390AB05}" type="presOf" srcId="{3143BF36-0ACA-2648-8AC0-294D1D8D5C77}" destId="{DD8A261D-CD78-634C-ACF5-2F6AA4EB5F70}" srcOrd="1" destOrd="0" presId="urn:microsoft.com/office/officeart/2005/8/layout/pyramid1"/>
+    <dgm:cxn modelId="{B45878CA-6DFA-C943-A8A7-5852236348FB}" type="presOf" srcId="{3143BF36-0ACA-2648-8AC0-294D1D8D5C77}" destId="{C5488AB7-8642-0C42-B81C-654D9C147FFE}" srcOrd="0" destOrd="0" presId="urn:microsoft.com/office/officeart/2005/8/layout/pyramid1"/>
+    <dgm:cxn modelId="{099489F3-24BB-914E-8E4B-1C761192F725}" srcId="{427B3608-5B1F-E841-BE6C-E1C72F307E5E}" destId="{3143BF36-0ACA-2648-8AC0-294D1D8D5C77}" srcOrd="1" destOrd="0" parTransId="{C6130023-5A06-6A47-ACB2-2A652496C0D7}" sibTransId="{183DB980-65AB-ED47-8B24-14EFF176A284}"/>
+    <dgm:cxn modelId="{7766B0F3-995B-C848-80B8-F356B92B1938}" type="presOf" srcId="{A13013FD-ED7B-8948-ADC0-443E703424CF}" destId="{6BF72CD1-BCBF-EC4D-AC18-E01BE8783D12}" srcOrd="0" destOrd="0" presId="urn:microsoft.com/office/officeart/2005/8/layout/pyramid1"/>
+    <dgm:cxn modelId="{73B5B92B-C033-C947-9EE1-DE13F555A32A}" type="presParOf" srcId="{B90557EF-5532-FB48-8369-7ECBC4FAA9A5}" destId="{E081E212-1FC7-2844-8BF3-11D62AA82ECB}" srcOrd="0" destOrd="0" presId="urn:microsoft.com/office/officeart/2005/8/layout/pyramid1"/>
+    <dgm:cxn modelId="{8EE36B72-ABCA-3342-BA2E-55DFF9F1A7E2}" type="presParOf" srcId="{E081E212-1FC7-2844-8BF3-11D62AA82ECB}" destId="{6DDF814E-369D-5F4B-A0C4-C17BCE68CA23}" srcOrd="0" destOrd="0" presId="urn:microsoft.com/office/officeart/2005/8/layout/pyramid1"/>
+    <dgm:cxn modelId="{C824A728-DE40-8B46-AD06-DA6B2CA587AD}" type="presParOf" srcId="{E081E212-1FC7-2844-8BF3-11D62AA82ECB}" destId="{2BFCB081-A678-F344-A7F9-6D64DFB10ABE}" srcOrd="1" destOrd="0" presId="urn:microsoft.com/office/officeart/2005/8/layout/pyramid1"/>
+    <dgm:cxn modelId="{3788C7EF-9099-1648-B99C-E15AD3F05B33}" type="presParOf" srcId="{B90557EF-5532-FB48-8369-7ECBC4FAA9A5}" destId="{7EFE8F88-3DC5-F245-8F46-6B9220169344}" srcOrd="1" destOrd="0" presId="urn:microsoft.com/office/officeart/2005/8/layout/pyramid1"/>
+    <dgm:cxn modelId="{FBFACBDB-2496-2E4C-935B-4601809383A9}" type="presParOf" srcId="{7EFE8F88-3DC5-F245-8F46-6B9220169344}" destId="{C5488AB7-8642-0C42-B81C-654D9C147FFE}" srcOrd="0" destOrd="0" presId="urn:microsoft.com/office/officeart/2005/8/layout/pyramid1"/>
+    <dgm:cxn modelId="{9FA1B2FD-A480-F040-BB79-A70D35315E53}" type="presParOf" srcId="{7EFE8F88-3DC5-F245-8F46-6B9220169344}" destId="{DD8A261D-CD78-634C-ACF5-2F6AA4EB5F70}" srcOrd="1" destOrd="0" presId="urn:microsoft.com/office/officeart/2005/8/layout/pyramid1"/>
+    <dgm:cxn modelId="{0B87652B-EC74-DA41-837D-FA1CA4A45BA3}" type="presParOf" srcId="{B90557EF-5532-FB48-8369-7ECBC4FAA9A5}" destId="{3399933A-D203-2346-9F3A-B88BA52A820C}" srcOrd="2" destOrd="0" presId="urn:microsoft.com/office/officeart/2005/8/layout/pyramid1"/>
+    <dgm:cxn modelId="{8AE916FA-1300-2C4D-B211-9AAA5C0D81E0}" type="presParOf" srcId="{3399933A-D203-2346-9F3A-B88BA52A820C}" destId="{6BF72CD1-BCBF-EC4D-AC18-E01BE8783D12}" srcOrd="0" destOrd="0" presId="urn:microsoft.com/office/officeart/2005/8/layout/pyramid1"/>
+    <dgm:cxn modelId="{8754225D-4E64-3440-A0BB-22C90DD1F8AA}" type="presParOf" srcId="{3399933A-D203-2346-9F3A-B88BA52A820C}" destId="{287F4998-291E-9943-AA49-B2812690BCAA}" srcOrd="1" destOrd="0" presId="urn:microsoft.com/office/officeart/2005/8/layout/pyramid1"/>
+  </dgm:cxnLst>
+  <dgm:bg/>
+  <dgm:whole/>
+  <dgm:extLst>
+    <a:ext uri="http://schemas.microsoft.com/office/drawing/2008/diagram">
+      <dsp:dataModelExt xmlns:dsp="http://schemas.microsoft.com/office/drawing/2008/diagram" relId="rId6" minVer="http://schemas.openxmlformats.org/drawingml/2006/diagram"/>
+    </a:ext>
+  </dgm:extLst>
+</dgm:dataModel>
+</file>
+
+<file path=ppt/diagrams/data2.xml><?xml version="1.0" encoding="utf-8"?>
 <dgm:dataModel xmlns:dgm="http://schemas.openxmlformats.org/drawingml/2006/diagram" xmlns:a="http://schemas.openxmlformats.org/drawingml/2006/main">
   <dgm:ptLst>
     <dgm:pt modelId="{91C121A3-8018-E444-850E-76E741014697}" type="doc">
@@ -1225,6 +2210,244 @@
 </file>
 
 <file path=ppt/diagrams/drawing1.xml><?xml version="1.0" encoding="utf-8"?>
+<dsp:drawing xmlns:dgm="http://schemas.openxmlformats.org/drawingml/2006/diagram" xmlns:dsp="http://schemas.microsoft.com/office/drawing/2008/diagram" xmlns:a="http://schemas.openxmlformats.org/drawingml/2006/main">
+  <dsp:spTree>
+    <dsp:nvGrpSpPr>
+      <dsp:cNvPr id="0" name=""/>
+      <dsp:cNvGrpSpPr/>
+    </dsp:nvGrpSpPr>
+    <dsp:grpSpPr/>
+    <dsp:sp modelId="{6DDF814E-369D-5F4B-A0C4-C17BCE68CA23}">
+      <dsp:nvSpPr>
+        <dsp:cNvPr id="0" name=""/>
+        <dsp:cNvSpPr/>
+      </dsp:nvSpPr>
+      <dsp:spPr>
+        <a:xfrm>
+          <a:off x="2506662" y="0"/>
+          <a:ext cx="2506662" cy="1693917"/>
+        </a:xfrm>
+        <a:prstGeom prst="trapezoid">
+          <a:avLst>
+            <a:gd name="adj" fmla="val 73990"/>
+          </a:avLst>
+        </a:prstGeom>
+        <a:solidFill>
+          <a:srgbClr val="FFAF45"/>
+        </a:solidFill>
+        <a:ln w="19050" cap="flat" cmpd="sng" algn="ctr">
+          <a:solidFill>
+            <a:schemeClr val="lt1">
+              <a:hueOff val="0"/>
+              <a:satOff val="0"/>
+              <a:lumOff val="0"/>
+              <a:alphaOff val="0"/>
+            </a:schemeClr>
+          </a:solidFill>
+          <a:prstDash val="solid"/>
+          <a:miter lim="800000"/>
+        </a:ln>
+        <a:effectLst/>
+      </dsp:spPr>
+      <dsp:style>
+        <a:lnRef idx="2">
+          <a:scrgbClr r="0" g="0" b="0"/>
+        </a:lnRef>
+        <a:fillRef idx="1">
+          <a:scrgbClr r="0" g="0" b="0"/>
+        </a:fillRef>
+        <a:effectRef idx="0">
+          <a:scrgbClr r="0" g="0" b="0"/>
+        </a:effectRef>
+        <a:fontRef idx="minor">
+          <a:schemeClr val="lt1"/>
+        </a:fontRef>
+      </dsp:style>
+      <dsp:txBody>
+        <a:bodyPr spcFirstLastPara="0" vert="horz" wrap="square" lIns="45720" tIns="45720" rIns="45720" bIns="45720" numCol="1" spcCol="1270" anchor="ctr" anchorCtr="0">
+          <a:noAutofit/>
+        </a:bodyPr>
+        <a:lstStyle/>
+        <a:p>
+          <a:pPr marL="0" lvl="0" indent="0" algn="ctr" defTabSz="1600200">
+            <a:lnSpc>
+              <a:spcPct val="90000"/>
+            </a:lnSpc>
+            <a:spcBef>
+              <a:spcPct val="0"/>
+            </a:spcBef>
+            <a:spcAft>
+              <a:spcPct val="35000"/>
+            </a:spcAft>
+            <a:buNone/>
+          </a:pPr>
+          <a:r>
+            <a:rPr lang="en-US" sz="3600" kern="1200" dirty="0"/>
+            <a:t>API</a:t>
+          </a:r>
+          <a:endParaRPr lang="en-US" sz="2400" kern="1200" dirty="0"/>
+        </a:p>
+      </dsp:txBody>
+      <dsp:txXfrm>
+        <a:off x="2506662" y="0"/>
+        <a:ext cx="2506662" cy="1693917"/>
+      </dsp:txXfrm>
+    </dsp:sp>
+    <dsp:sp modelId="{C5488AB7-8642-0C42-B81C-654D9C147FFE}">
+      <dsp:nvSpPr>
+        <dsp:cNvPr id="0" name=""/>
+        <dsp:cNvSpPr/>
+      </dsp:nvSpPr>
+      <dsp:spPr>
+        <a:xfrm>
+          <a:off x="1253331" y="1693917"/>
+          <a:ext cx="5013325" cy="1693917"/>
+        </a:xfrm>
+        <a:prstGeom prst="trapezoid">
+          <a:avLst>
+            <a:gd name="adj" fmla="val 73990"/>
+          </a:avLst>
+        </a:prstGeom>
+        <a:solidFill>
+          <a:srgbClr val="FB6D48"/>
+        </a:solidFill>
+        <a:ln w="19050" cap="flat" cmpd="sng" algn="ctr">
+          <a:solidFill>
+            <a:schemeClr val="lt1">
+              <a:hueOff val="0"/>
+              <a:satOff val="0"/>
+              <a:lumOff val="0"/>
+              <a:alphaOff val="0"/>
+            </a:schemeClr>
+          </a:solidFill>
+          <a:prstDash val="solid"/>
+          <a:miter lim="800000"/>
+        </a:ln>
+        <a:effectLst/>
+      </dsp:spPr>
+      <dsp:style>
+        <a:lnRef idx="2">
+          <a:scrgbClr r="0" g="0" b="0"/>
+        </a:lnRef>
+        <a:fillRef idx="1">
+          <a:scrgbClr r="0" g="0" b="0"/>
+        </a:fillRef>
+        <a:effectRef idx="0">
+          <a:scrgbClr r="0" g="0" b="0"/>
+        </a:effectRef>
+        <a:fontRef idx="minor">
+          <a:schemeClr val="lt1"/>
+        </a:fontRef>
+      </dsp:style>
+      <dsp:txBody>
+        <a:bodyPr spcFirstLastPara="0" vert="horz" wrap="square" lIns="45720" tIns="45720" rIns="45720" bIns="45720" numCol="1" spcCol="1270" anchor="ctr" anchorCtr="0">
+          <a:noAutofit/>
+        </a:bodyPr>
+        <a:lstStyle/>
+        <a:p>
+          <a:pPr marL="0" lvl="0" indent="0" algn="ctr" defTabSz="1600200">
+            <a:lnSpc>
+              <a:spcPct val="90000"/>
+            </a:lnSpc>
+            <a:spcBef>
+              <a:spcPct val="0"/>
+            </a:spcBef>
+            <a:spcAft>
+              <a:spcPct val="35000"/>
+            </a:spcAft>
+            <a:buNone/>
+          </a:pPr>
+          <a:r>
+            <a:rPr lang="en-US" sz="3600" kern="1200" dirty="0"/>
+            <a:t>Framework for Efficient Operators</a:t>
+          </a:r>
+        </a:p>
+      </dsp:txBody>
+      <dsp:txXfrm>
+        <a:off x="2130663" y="1693917"/>
+        <a:ext cx="3258661" cy="1693917"/>
+      </dsp:txXfrm>
+    </dsp:sp>
+    <dsp:sp modelId="{6BF72CD1-BCBF-EC4D-AC18-E01BE8783D12}">
+      <dsp:nvSpPr>
+        <dsp:cNvPr id="0" name=""/>
+        <dsp:cNvSpPr/>
+      </dsp:nvSpPr>
+      <dsp:spPr>
+        <a:xfrm>
+          <a:off x="0" y="3387834"/>
+          <a:ext cx="7519988" cy="1693917"/>
+        </a:xfrm>
+        <a:prstGeom prst="trapezoid">
+          <a:avLst>
+            <a:gd name="adj" fmla="val 73990"/>
+          </a:avLst>
+        </a:prstGeom>
+        <a:solidFill>
+          <a:srgbClr val="D74B76"/>
+        </a:solidFill>
+        <a:ln w="19050" cap="flat" cmpd="sng" algn="ctr">
+          <a:solidFill>
+            <a:schemeClr val="lt1">
+              <a:hueOff val="0"/>
+              <a:satOff val="0"/>
+              <a:lumOff val="0"/>
+              <a:alphaOff val="0"/>
+            </a:schemeClr>
+          </a:solidFill>
+          <a:prstDash val="solid"/>
+          <a:miter lim="800000"/>
+        </a:ln>
+        <a:effectLst/>
+      </dsp:spPr>
+      <dsp:style>
+        <a:lnRef idx="2">
+          <a:scrgbClr r="0" g="0" b="0"/>
+        </a:lnRef>
+        <a:fillRef idx="1">
+          <a:scrgbClr r="0" g="0" b="0"/>
+        </a:fillRef>
+        <a:effectRef idx="0">
+          <a:scrgbClr r="0" g="0" b="0"/>
+        </a:effectRef>
+        <a:fontRef idx="minor">
+          <a:schemeClr val="lt1"/>
+        </a:fontRef>
+      </dsp:style>
+      <dsp:txBody>
+        <a:bodyPr spcFirstLastPara="0" vert="horz" wrap="square" lIns="45720" tIns="45720" rIns="45720" bIns="45720" numCol="1" spcCol="1270" anchor="ctr" anchorCtr="0">
+          <a:noAutofit/>
+        </a:bodyPr>
+        <a:lstStyle/>
+        <a:p>
+          <a:pPr marL="0" lvl="0" indent="0" algn="ctr" defTabSz="1600200">
+            <a:lnSpc>
+              <a:spcPct val="90000"/>
+            </a:lnSpc>
+            <a:spcBef>
+              <a:spcPct val="0"/>
+            </a:spcBef>
+            <a:spcAft>
+              <a:spcPct val="35000"/>
+            </a:spcAft>
+            <a:buNone/>
+          </a:pPr>
+          <a:r>
+            <a:rPr lang="en-US" sz="3600" kern="1200" dirty="0"/>
+            <a:t>Graph Representation</a:t>
+          </a:r>
+        </a:p>
+      </dsp:txBody>
+      <dsp:txXfrm>
+        <a:off x="1315997" y="3387834"/>
+        <a:ext cx="4887992" cy="1693917"/>
+      </dsp:txXfrm>
+    </dsp:sp>
+  </dsp:spTree>
+</dsp:drawing>
+</file>
+
+<file path=ppt/diagrams/drawing2.xml><?xml version="1.0" encoding="utf-8"?>
 <dsp:drawing xmlns:dgm="http://schemas.openxmlformats.org/drawingml/2006/diagram" xmlns:dsp="http://schemas.microsoft.com/office/drawing/2008/diagram" xmlns:a="http://schemas.openxmlformats.org/drawingml/2006/main">
   <dsp:spTree>
     <dsp:nvGrpSpPr>
@@ -1615,6 +2838,238 @@
 </file>
 
 <file path=ppt/diagrams/layout1.xml><?xml version="1.0" encoding="utf-8"?>
+<dgm:layoutDef xmlns:dgm="http://schemas.openxmlformats.org/drawingml/2006/diagram" xmlns:a="http://schemas.openxmlformats.org/drawingml/2006/main" uniqueId="urn:microsoft.com/office/officeart/2005/8/layout/pyramid1">
+  <dgm:title val=""/>
+  <dgm:desc val=""/>
+  <dgm:catLst>
+    <dgm:cat type="pyramid" pri="1000"/>
+  </dgm:catLst>
+  <dgm:sampData useDef="1">
+    <dgm:dataModel>
+      <dgm:ptLst/>
+      <dgm:bg/>
+      <dgm:whole/>
+    </dgm:dataModel>
+  </dgm:sampData>
+  <dgm:styleData>
+    <dgm:dataModel>
+      <dgm:ptLst>
+        <dgm:pt modelId="0" type="doc"/>
+        <dgm:pt modelId="1"/>
+        <dgm:pt modelId="2"/>
+      </dgm:ptLst>
+      <dgm:cxnLst>
+        <dgm:cxn modelId="3" srcId="0" destId="1" srcOrd="0" destOrd="0"/>
+        <dgm:cxn modelId="4" srcId="0" destId="2" srcOrd="1" destOrd="0"/>
+      </dgm:cxnLst>
+      <dgm:bg/>
+      <dgm:whole/>
+    </dgm:dataModel>
+  </dgm:styleData>
+  <dgm:clrData>
+    <dgm:dataModel>
+      <dgm:ptLst>
+        <dgm:pt modelId="0" type="doc"/>
+        <dgm:pt modelId="1"/>
+        <dgm:pt modelId="2"/>
+        <dgm:pt modelId="3"/>
+        <dgm:pt modelId="4"/>
+      </dgm:ptLst>
+      <dgm:cxnLst>
+        <dgm:cxn modelId="5" srcId="0" destId="1" srcOrd="0" destOrd="0"/>
+        <dgm:cxn modelId="6" srcId="0" destId="2" srcOrd="1" destOrd="0"/>
+        <dgm:cxn modelId="7" srcId="0" destId="3" srcOrd="2" destOrd="0"/>
+        <dgm:cxn modelId="8" srcId="0" destId="4" srcOrd="3" destOrd="0"/>
+      </dgm:cxnLst>
+      <dgm:bg/>
+      <dgm:whole/>
+    </dgm:dataModel>
+  </dgm:clrData>
+  <dgm:layoutNode name="Name0">
+    <dgm:varLst>
+      <dgm:dir/>
+      <dgm:animLvl val="lvl"/>
+      <dgm:resizeHandles val="exact"/>
+    </dgm:varLst>
+    <dgm:choose name="Name1">
+      <dgm:if name="Name2" func="var" arg="dir" op="equ" val="norm">
+        <dgm:alg type="pyra">
+          <dgm:param type="linDir" val="fromB"/>
+          <dgm:param type="txDir" val="fromT"/>
+          <dgm:param type="pyraAcctPos" val="aft"/>
+          <dgm:param type="pyraAcctTxMar" val="step"/>
+          <dgm:param type="pyraAcctBkgdNode" val="acctBkgd"/>
+          <dgm:param type="pyraAcctTxNode" val="acctTx"/>
+          <dgm:param type="pyraLvlNode" val="level"/>
+        </dgm:alg>
+      </dgm:if>
+      <dgm:else name="Name3">
+        <dgm:alg type="pyra">
+          <dgm:param type="linDir" val="fromB"/>
+          <dgm:param type="txDir" val="fromT"/>
+          <dgm:param type="pyraAcctPos" val="bef"/>
+          <dgm:param type="pyraAcctTxMar" val="step"/>
+          <dgm:param type="pyraAcctBkgdNode" val="acctBkgd"/>
+          <dgm:param type="pyraAcctTxNode" val="acctTx"/>
+          <dgm:param type="pyraLvlNode" val="level"/>
+        </dgm:alg>
+      </dgm:else>
+    </dgm:choose>
+    <dgm:shape xmlns:r="http://schemas.openxmlformats.org/officeDocument/2006/relationships" r:blip="">
+      <dgm:adjLst/>
+    </dgm:shape>
+    <dgm:presOf/>
+    <dgm:choose name="Name4">
+      <dgm:if name="Name5" axis="root des" ptType="all node" func="maxDepth" op="gte" val="2">
+        <dgm:constrLst>
+          <dgm:constr type="primFontSz" for="des" forName="levelTx" op="equ"/>
+          <dgm:constr type="secFontSz" for="des" forName="acctTx" op="equ"/>
+          <dgm:constr type="pyraAcctRatio" val="0.32"/>
+        </dgm:constrLst>
+      </dgm:if>
+      <dgm:else name="Name6">
+        <dgm:constrLst>
+          <dgm:constr type="primFontSz" for="des" forName="levelTx" op="equ"/>
+          <dgm:constr type="secFontSz" for="des" forName="acctTx" op="equ"/>
+          <dgm:constr type="pyraAcctRatio"/>
+        </dgm:constrLst>
+      </dgm:else>
+    </dgm:choose>
+    <dgm:ruleLst/>
+    <dgm:forEach name="Name7" axis="ch" ptType="node">
+      <dgm:layoutNode name="Name8">
+        <dgm:alg type="composite">
+          <dgm:param type="horzAlign" val="none"/>
+        </dgm:alg>
+        <dgm:shape xmlns:r="http://schemas.openxmlformats.org/officeDocument/2006/relationships" r:blip="">
+          <dgm:adjLst/>
+        </dgm:shape>
+        <dgm:presOf/>
+        <dgm:choose name="Name9">
+          <dgm:if name="Name10" axis="self" ptType="node" func="pos" op="equ" val="1">
+            <dgm:constrLst>
+              <dgm:constr type="ctrX" for="ch" forName="acctBkgd" val="1"/>
+              <dgm:constr type="ctrY" for="ch" forName="acctBkgd" val="1"/>
+              <dgm:constr type="w" for="ch" forName="acctBkgd" val="1"/>
+              <dgm:constr type="h" for="ch" forName="acctBkgd" val="1"/>
+              <dgm:constr type="ctrX" for="ch" forName="acctTx" val="1"/>
+              <dgm:constr type="ctrY" for="ch" forName="acctTx" val="1"/>
+              <dgm:constr type="w" for="ch" forName="acctTx" val="1"/>
+              <dgm:constr type="h" for="ch" forName="acctTx" val="1"/>
+              <dgm:constr type="ctrX" for="ch" forName="level" val="1"/>
+              <dgm:constr type="ctrY" for="ch" forName="level" val="1"/>
+              <dgm:constr type="w" for="ch" forName="level" val="1"/>
+              <dgm:constr type="h" for="ch" forName="level" val="1"/>
+              <dgm:constr type="ctrX" for="ch" forName="levelTx" refType="ctrX" refFor="ch" refForName="level"/>
+              <dgm:constr type="ctrY" for="ch" forName="levelTx" refType="ctrY" refFor="ch" refForName="level"/>
+              <dgm:constr type="w" for="ch" forName="levelTx" refType="w" refFor="ch" refForName="level"/>
+              <dgm:constr type="h" for="ch" forName="levelTx" refType="h" refFor="ch" refForName="level"/>
+            </dgm:constrLst>
+          </dgm:if>
+          <dgm:else name="Name11">
+            <dgm:constrLst>
+              <dgm:constr type="ctrX" for="ch" forName="acctBkgd" val="1"/>
+              <dgm:constr type="ctrY" for="ch" forName="acctBkgd" val="1"/>
+              <dgm:constr type="w" for="ch" forName="acctBkgd" val="1"/>
+              <dgm:constr type="h" for="ch" forName="acctBkgd" val="1"/>
+              <dgm:constr type="ctrX" for="ch" forName="acctTx" val="1"/>
+              <dgm:constr type="ctrY" for="ch" forName="acctTx" val="1"/>
+              <dgm:constr type="w" for="ch" forName="acctTx" val="1"/>
+              <dgm:constr type="h" for="ch" forName="acctTx" val="1"/>
+              <dgm:constr type="ctrX" for="ch" forName="level" val="1"/>
+              <dgm:constr type="ctrY" for="ch" forName="level" val="1"/>
+              <dgm:constr type="w" for="ch" forName="level" val="1"/>
+              <dgm:constr type="h" for="ch" forName="level" val="1"/>
+              <dgm:constr type="ctrX" for="ch" forName="levelTx" refType="ctrX" refFor="ch" refForName="level"/>
+              <dgm:constr type="ctrY" for="ch" forName="levelTx" refType="ctrY" refFor="ch" refForName="level"/>
+              <dgm:constr type="w" for="ch" forName="levelTx" refType="w" refFor="ch" refForName="level" fact="0.65"/>
+              <dgm:constr type="h" for="ch" forName="levelTx" refType="h" refFor="ch" refForName="level"/>
+            </dgm:constrLst>
+          </dgm:else>
+        </dgm:choose>
+        <dgm:ruleLst/>
+        <dgm:choose name="Name12">
+          <dgm:if name="Name13" axis="ch" ptType="node" func="cnt" op="gte" val="1">
+            <dgm:layoutNode name="acctBkgd" styleLbl="alignAcc1">
+              <dgm:alg type="sp"/>
+              <dgm:shape xmlns:r="http://schemas.openxmlformats.org/officeDocument/2006/relationships" type="nonIsoscelesTrapezoid" r:blip="">
+                <dgm:adjLst/>
+              </dgm:shape>
+              <dgm:presOf axis="des" ptType="node"/>
+              <dgm:constrLst/>
+              <dgm:ruleLst/>
+            </dgm:layoutNode>
+            <dgm:layoutNode name="acctTx" styleLbl="alignAcc1">
+              <dgm:varLst>
+                <dgm:bulletEnabled val="1"/>
+              </dgm:varLst>
+              <dgm:alg type="tx">
+                <dgm:param type="stBulletLvl" val="1"/>
+                <dgm:param type="txAnchorVertCh" val="mid"/>
+              </dgm:alg>
+              <dgm:shape xmlns:r="http://schemas.openxmlformats.org/officeDocument/2006/relationships" type="nonIsoscelesTrapezoid" r:blip="" hideGeom="1">
+                <dgm:adjLst/>
+              </dgm:shape>
+              <dgm:presOf axis="des" ptType="node"/>
+              <dgm:constrLst>
+                <dgm:constr type="secFontSz" val="65"/>
+                <dgm:constr type="primFontSz" refType="secFontSz"/>
+                <dgm:constr type="tMarg" refType="secFontSz" fact="0.3"/>
+                <dgm:constr type="bMarg" refType="secFontSz" fact="0.3"/>
+                <dgm:constr type="lMarg" refType="secFontSz" fact="0.3"/>
+                <dgm:constr type="rMarg" refType="secFontSz" fact="0.3"/>
+              </dgm:constrLst>
+              <dgm:ruleLst>
+                <dgm:rule type="secFontSz" val="5" fact="NaN" max="NaN"/>
+              </dgm:ruleLst>
+            </dgm:layoutNode>
+          </dgm:if>
+          <dgm:else name="Name14"/>
+        </dgm:choose>
+        <dgm:layoutNode name="level">
+          <dgm:varLst>
+            <dgm:chMax val="1"/>
+            <dgm:bulletEnabled val="1"/>
+          </dgm:varLst>
+          <dgm:alg type="sp"/>
+          <dgm:shape xmlns:r="http://schemas.openxmlformats.org/officeDocument/2006/relationships" type="trapezoid" r:blip="">
+            <dgm:adjLst/>
+          </dgm:shape>
+          <dgm:presOf axis="self"/>
+          <dgm:constrLst>
+            <dgm:constr type="h" val="500"/>
+            <dgm:constr type="w" val="1"/>
+          </dgm:constrLst>
+          <dgm:ruleLst/>
+        </dgm:layoutNode>
+        <dgm:layoutNode name="levelTx" styleLbl="revTx">
+          <dgm:varLst>
+            <dgm:chMax val="1"/>
+            <dgm:bulletEnabled val="1"/>
+          </dgm:varLst>
+          <dgm:alg type="tx"/>
+          <dgm:shape xmlns:r="http://schemas.openxmlformats.org/officeDocument/2006/relationships" type="rect" r:blip="" hideGeom="1">
+            <dgm:adjLst/>
+          </dgm:shape>
+          <dgm:presOf axis="self"/>
+          <dgm:constrLst>
+            <dgm:constr type="tMarg" refType="primFontSz" fact="0.1"/>
+            <dgm:constr type="bMarg" refType="primFontSz" fact="0.1"/>
+            <dgm:constr type="lMarg" refType="primFontSz" fact="0.1"/>
+            <dgm:constr type="rMarg" refType="primFontSz" fact="0.1"/>
+            <dgm:constr type="primFontSz" val="65"/>
+          </dgm:constrLst>
+          <dgm:ruleLst>
+            <dgm:rule type="primFontSz" val="5" fact="NaN" max="NaN"/>
+          </dgm:ruleLst>
+        </dgm:layoutNode>
+      </dgm:layoutNode>
+    </dgm:forEach>
+  </dgm:layoutNode>
+</dgm:layoutDef>
+</file>
+
+<file path=ppt/diagrams/layout2.xml><?xml version="1.0" encoding="utf-8"?>
 <dgm:layoutDef xmlns:dgm="http://schemas.openxmlformats.org/drawingml/2006/diagram" xmlns:a="http://schemas.openxmlformats.org/drawingml/2006/main" uniqueId="urn:microsoft.com/office/officeart/2005/8/layout/gear1">
   <dgm:title val=""/>
   <dgm:desc val=""/>
@@ -3121,6 +4576,1040 @@
 </dgm:styleDef>
 </file>
 
+<file path=ppt/diagrams/quickStyle2.xml><?xml version="1.0" encoding="utf-8"?>
+<dgm:styleDef xmlns:dgm="http://schemas.openxmlformats.org/drawingml/2006/diagram" xmlns:a="http://schemas.openxmlformats.org/drawingml/2006/main" uniqueId="urn:microsoft.com/office/officeart/2005/8/quickstyle/simple1">
+  <dgm:title val=""/>
+  <dgm:desc val=""/>
+  <dgm:catLst>
+    <dgm:cat type="simple" pri="10100"/>
+  </dgm:catLst>
+  <dgm:scene3d>
+    <a:camera prst="orthographicFront"/>
+    <a:lightRig rig="threePt" dir="t"/>
+  </dgm:scene3d>
+  <dgm:styleLbl name="node0">
+    <dgm:scene3d>
+      <a:camera prst="orthographicFront"/>
+      <a:lightRig rig="threePt" dir="t"/>
+    </dgm:scene3d>
+    <dgm:sp3d/>
+    <dgm:txPr/>
+    <dgm:style>
+      <a:lnRef idx="2">
+        <a:scrgbClr r="0" g="0" b="0"/>
+      </a:lnRef>
+      <a:fillRef idx="1">
+        <a:scrgbClr r="0" g="0" b="0"/>
+      </a:fillRef>
+      <a:effectRef idx="0">
+        <a:scrgbClr r="0" g="0" b="0"/>
+      </a:effectRef>
+      <a:fontRef idx="minor">
+        <a:schemeClr val="lt1"/>
+      </a:fontRef>
+    </dgm:style>
+  </dgm:styleLbl>
+  <dgm:styleLbl name="lnNode1">
+    <dgm:scene3d>
+      <a:camera prst="orthographicFront"/>
+      <a:lightRig rig="threePt" dir="t"/>
+    </dgm:scene3d>
+    <dgm:sp3d/>
+    <dgm:txPr/>
+    <dgm:style>
+      <a:lnRef idx="2">
+        <a:scrgbClr r="0" g="0" b="0"/>
+      </a:lnRef>
+      <a:fillRef idx="1">
+        <a:scrgbClr r="0" g="0" b="0"/>
+      </a:fillRef>
+      <a:effectRef idx="0">
+        <a:scrgbClr r="0" g="0" b="0"/>
+      </a:effectRef>
+      <a:fontRef idx="minor">
+        <a:schemeClr val="lt1"/>
+      </a:fontRef>
+    </dgm:style>
+  </dgm:styleLbl>
+  <dgm:styleLbl name="vennNode1">
+    <dgm:scene3d>
+      <a:camera prst="orthographicFront"/>
+      <a:lightRig rig="threePt" dir="t"/>
+    </dgm:scene3d>
+    <dgm:sp3d/>
+    <dgm:txPr/>
+    <dgm:style>
+      <a:lnRef idx="2">
+        <a:scrgbClr r="0" g="0" b="0"/>
+      </a:lnRef>
+      <a:fillRef idx="1">
+        <a:scrgbClr r="0" g="0" b="0"/>
+      </a:fillRef>
+      <a:effectRef idx="0">
+        <a:scrgbClr r="0" g="0" b="0"/>
+      </a:effectRef>
+      <a:fontRef idx="minor">
+        <a:schemeClr val="tx1"/>
+      </a:fontRef>
+    </dgm:style>
+  </dgm:styleLbl>
+  <dgm:styleLbl name="alignNode1">
+    <dgm:scene3d>
+      <a:camera prst="orthographicFront"/>
+      <a:lightRig rig="threePt" dir="t"/>
+    </dgm:scene3d>
+    <dgm:sp3d/>
+    <dgm:txPr/>
+    <dgm:style>
+      <a:lnRef idx="2">
+        <a:scrgbClr r="0" g="0" b="0"/>
+      </a:lnRef>
+      <a:fillRef idx="1">
+        <a:scrgbClr r="0" g="0" b="0"/>
+      </a:fillRef>
+      <a:effectRef idx="0">
+        <a:scrgbClr r="0" g="0" b="0"/>
+      </a:effectRef>
+      <a:fontRef idx="minor">
+        <a:schemeClr val="lt1"/>
+      </a:fontRef>
+    </dgm:style>
+  </dgm:styleLbl>
+  <dgm:styleLbl name="node1">
+    <dgm:scene3d>
+      <a:camera prst="orthographicFront"/>
+      <a:lightRig rig="threePt" dir="t"/>
+    </dgm:scene3d>
+    <dgm:sp3d/>
+    <dgm:txPr/>
+    <dgm:style>
+      <a:lnRef idx="2">
+        <a:scrgbClr r="0" g="0" b="0"/>
+      </a:lnRef>
+      <a:fillRef idx="1">
+        <a:scrgbClr r="0" g="0" b="0"/>
+      </a:fillRef>
+      <a:effectRef idx="0">
+        <a:scrgbClr r="0" g="0" b="0"/>
+      </a:effectRef>
+      <a:fontRef idx="minor">
+        <a:schemeClr val="lt1"/>
+      </a:fontRef>
+    </dgm:style>
+  </dgm:styleLbl>
+  <dgm:styleLbl name="node2">
+    <dgm:scene3d>
+      <a:camera prst="orthographicFront"/>
+      <a:lightRig rig="threePt" dir="t"/>
+    </dgm:scene3d>
+    <dgm:sp3d/>
+    <dgm:txPr/>
+    <dgm:style>
+      <a:lnRef idx="2">
+        <a:scrgbClr r="0" g="0" b="0"/>
+      </a:lnRef>
+      <a:fillRef idx="1">
+        <a:scrgbClr r="0" g="0" b="0"/>
+      </a:fillRef>
+      <a:effectRef idx="0">
+        <a:scrgbClr r="0" g="0" b="0"/>
+      </a:effectRef>
+      <a:fontRef idx="minor">
+        <a:schemeClr val="lt1"/>
+      </a:fontRef>
+    </dgm:style>
+  </dgm:styleLbl>
+  <dgm:styleLbl name="node3">
+    <dgm:scene3d>
+      <a:camera prst="orthographicFront"/>
+      <a:lightRig rig="threePt" dir="t"/>
+    </dgm:scene3d>
+    <dgm:sp3d/>
+    <dgm:txPr/>
+    <dgm:style>
+      <a:lnRef idx="2">
+        <a:scrgbClr r="0" g="0" b="0"/>
+      </a:lnRef>
+      <a:fillRef idx="1">
+        <a:scrgbClr r="0" g="0" b="0"/>
+      </a:fillRef>
+      <a:effectRef idx="0">
+        <a:scrgbClr r="0" g="0" b="0"/>
+      </a:effectRef>
+      <a:fontRef idx="minor">
+        <a:schemeClr val="lt1"/>
+      </a:fontRef>
+    </dgm:style>
+  </dgm:styleLbl>
+  <dgm:styleLbl name="node4">
+    <dgm:scene3d>
+      <a:camera prst="orthographicFront"/>
+      <a:lightRig rig="threePt" dir="t"/>
+    </dgm:scene3d>
+    <dgm:sp3d/>
+    <dgm:txPr/>
+    <dgm:style>
+      <a:lnRef idx="2">
+        <a:scrgbClr r="0" g="0" b="0"/>
+      </a:lnRef>
+      <a:fillRef idx="1">
+        <a:scrgbClr r="0" g="0" b="0"/>
+      </a:fillRef>
+      <a:effectRef idx="0">
+        <a:scrgbClr r="0" g="0" b="0"/>
+      </a:effectRef>
+      <a:fontRef idx="minor">
+        <a:schemeClr val="lt1"/>
+      </a:fontRef>
+    </dgm:style>
+  </dgm:styleLbl>
+  <dgm:styleLbl name="fgImgPlace1">
+    <dgm:scene3d>
+      <a:camera prst="orthographicFront"/>
+      <a:lightRig rig="threePt" dir="t"/>
+    </dgm:scene3d>
+    <dgm:sp3d/>
+    <dgm:txPr/>
+    <dgm:style>
+      <a:lnRef idx="2">
+        <a:scrgbClr r="0" g="0" b="0"/>
+      </a:lnRef>
+      <a:fillRef idx="1">
+        <a:scrgbClr r="0" g="0" b="0"/>
+      </a:fillRef>
+      <a:effectRef idx="0">
+        <a:scrgbClr r="0" g="0" b="0"/>
+      </a:effectRef>
+      <a:fontRef idx="minor"/>
+    </dgm:style>
+  </dgm:styleLbl>
+  <dgm:styleLbl name="alignImgPlace1">
+    <dgm:scene3d>
+      <a:camera prst="orthographicFront"/>
+      <a:lightRig rig="threePt" dir="t"/>
+    </dgm:scene3d>
+    <dgm:sp3d/>
+    <dgm:txPr/>
+    <dgm:style>
+      <a:lnRef idx="2">
+        <a:scrgbClr r="0" g="0" b="0"/>
+      </a:lnRef>
+      <a:fillRef idx="1">
+        <a:scrgbClr r="0" g="0" b="0"/>
+      </a:fillRef>
+      <a:effectRef idx="0">
+        <a:scrgbClr r="0" g="0" b="0"/>
+      </a:effectRef>
+      <a:fontRef idx="minor"/>
+    </dgm:style>
+  </dgm:styleLbl>
+  <dgm:styleLbl name="bgImgPlace1">
+    <dgm:scene3d>
+      <a:camera prst="orthographicFront"/>
+      <a:lightRig rig="threePt" dir="t"/>
+    </dgm:scene3d>
+    <dgm:sp3d/>
+    <dgm:txPr/>
+    <dgm:style>
+      <a:lnRef idx="2">
+        <a:scrgbClr r="0" g="0" b="0"/>
+      </a:lnRef>
+      <a:fillRef idx="1">
+        <a:scrgbClr r="0" g="0" b="0"/>
+      </a:fillRef>
+      <a:effectRef idx="0">
+        <a:scrgbClr r="0" g="0" b="0"/>
+      </a:effectRef>
+      <a:fontRef idx="minor"/>
+    </dgm:style>
+  </dgm:styleLbl>
+  <dgm:styleLbl name="sibTrans2D1">
+    <dgm:scene3d>
+      <a:camera prst="orthographicFront"/>
+      <a:lightRig rig="threePt" dir="t"/>
+    </dgm:scene3d>
+    <dgm:sp3d/>
+    <dgm:txPr/>
+    <dgm:style>
+      <a:lnRef idx="0">
+        <a:scrgbClr r="0" g="0" b="0"/>
+      </a:lnRef>
+      <a:fillRef idx="1">
+        <a:scrgbClr r="0" g="0" b="0"/>
+      </a:fillRef>
+      <a:effectRef idx="0">
+        <a:scrgbClr r="0" g="0" b="0"/>
+      </a:effectRef>
+      <a:fontRef idx="minor">
+        <a:schemeClr val="lt1"/>
+      </a:fontRef>
+    </dgm:style>
+  </dgm:styleLbl>
+  <dgm:styleLbl name="fgSibTrans2D1">
+    <dgm:scene3d>
+      <a:camera prst="orthographicFront"/>
+      <a:lightRig rig="threePt" dir="t"/>
+    </dgm:scene3d>
+    <dgm:sp3d/>
+    <dgm:txPr/>
+    <dgm:style>
+      <a:lnRef idx="0">
+        <a:scrgbClr r="0" g="0" b="0"/>
+      </a:lnRef>
+      <a:fillRef idx="1">
+        <a:scrgbClr r="0" g="0" b="0"/>
+      </a:fillRef>
+      <a:effectRef idx="0">
+        <a:scrgbClr r="0" g="0" b="0"/>
+      </a:effectRef>
+      <a:fontRef idx="minor">
+        <a:schemeClr val="lt1"/>
+      </a:fontRef>
+    </dgm:style>
+  </dgm:styleLbl>
+  <dgm:styleLbl name="bgSibTrans2D1">
+    <dgm:scene3d>
+      <a:camera prst="orthographicFront"/>
+      <a:lightRig rig="threePt" dir="t"/>
+    </dgm:scene3d>
+    <dgm:sp3d/>
+    <dgm:txPr/>
+    <dgm:style>
+      <a:lnRef idx="0">
+        <a:scrgbClr r="0" g="0" b="0"/>
+      </a:lnRef>
+      <a:fillRef idx="1">
+        <a:scrgbClr r="0" g="0" b="0"/>
+      </a:fillRef>
+      <a:effectRef idx="0">
+        <a:scrgbClr r="0" g="0" b="0"/>
+      </a:effectRef>
+      <a:fontRef idx="minor">
+        <a:schemeClr val="lt1"/>
+      </a:fontRef>
+    </dgm:style>
+  </dgm:styleLbl>
+  <dgm:styleLbl name="sibTrans1D1">
+    <dgm:scene3d>
+      <a:camera prst="orthographicFront"/>
+      <a:lightRig rig="threePt" dir="t"/>
+    </dgm:scene3d>
+    <dgm:sp3d/>
+    <dgm:txPr/>
+    <dgm:style>
+      <a:lnRef idx="1">
+        <a:scrgbClr r="0" g="0" b="0"/>
+      </a:lnRef>
+      <a:fillRef idx="0">
+        <a:scrgbClr r="0" g="0" b="0"/>
+      </a:fillRef>
+      <a:effectRef idx="0">
+        <a:scrgbClr r="0" g="0" b="0"/>
+      </a:effectRef>
+      <a:fontRef idx="minor"/>
+    </dgm:style>
+  </dgm:styleLbl>
+  <dgm:styleLbl name="callout">
+    <dgm:scene3d>
+      <a:camera prst="orthographicFront"/>
+      <a:lightRig rig="threePt" dir="t"/>
+    </dgm:scene3d>
+    <dgm:sp3d/>
+    <dgm:txPr/>
+    <dgm:style>
+      <a:lnRef idx="2">
+        <a:scrgbClr r="0" g="0" b="0"/>
+      </a:lnRef>
+      <a:fillRef idx="1">
+        <a:scrgbClr r="0" g="0" b="0"/>
+      </a:fillRef>
+      <a:effectRef idx="0">
+        <a:scrgbClr r="0" g="0" b="0"/>
+      </a:effectRef>
+      <a:fontRef idx="minor"/>
+    </dgm:style>
+  </dgm:styleLbl>
+  <dgm:styleLbl name="asst0">
+    <dgm:scene3d>
+      <a:camera prst="orthographicFront"/>
+      <a:lightRig rig="threePt" dir="t"/>
+    </dgm:scene3d>
+    <dgm:sp3d/>
+    <dgm:txPr/>
+    <dgm:style>
+      <a:lnRef idx="2">
+        <a:scrgbClr r="0" g="0" b="0"/>
+      </a:lnRef>
+      <a:fillRef idx="1">
+        <a:scrgbClr r="0" g="0" b="0"/>
+      </a:fillRef>
+      <a:effectRef idx="0">
+        <a:scrgbClr r="0" g="0" b="0"/>
+      </a:effectRef>
+      <a:fontRef idx="minor">
+        <a:schemeClr val="lt1"/>
+      </a:fontRef>
+    </dgm:style>
+  </dgm:styleLbl>
+  <dgm:styleLbl name="asst1">
+    <dgm:scene3d>
+      <a:camera prst="orthographicFront"/>
+      <a:lightRig rig="threePt" dir="t"/>
+    </dgm:scene3d>
+    <dgm:sp3d/>
+    <dgm:txPr/>
+    <dgm:style>
+      <a:lnRef idx="2">
+        <a:scrgbClr r="0" g="0" b="0"/>
+      </a:lnRef>
+      <a:fillRef idx="1">
+        <a:scrgbClr r="0" g="0" b="0"/>
+      </a:fillRef>
+      <a:effectRef idx="0">
+        <a:scrgbClr r="0" g="0" b="0"/>
+      </a:effectRef>
+      <a:fontRef idx="minor">
+        <a:schemeClr val="lt1"/>
+      </a:fontRef>
+    </dgm:style>
+  </dgm:styleLbl>
+  <dgm:styleLbl name="asst2">
+    <dgm:scene3d>
+      <a:camera prst="orthographicFront"/>
+      <a:lightRig rig="threePt" dir="t"/>
+    </dgm:scene3d>
+    <dgm:sp3d/>
+    <dgm:txPr/>
+    <dgm:style>
+      <a:lnRef idx="2">
+        <a:scrgbClr r="0" g="0" b="0"/>
+      </a:lnRef>
+      <a:fillRef idx="1">
+        <a:scrgbClr r="0" g="0" b="0"/>
+      </a:fillRef>
+      <a:effectRef idx="0">
+        <a:scrgbClr r="0" g="0" b="0"/>
+      </a:effectRef>
+      <a:fontRef idx="minor">
+        <a:schemeClr val="lt1"/>
+      </a:fontRef>
+    </dgm:style>
+  </dgm:styleLbl>
+  <dgm:styleLbl name="asst3">
+    <dgm:scene3d>
+      <a:camera prst="orthographicFront"/>
+      <a:lightRig rig="threePt" dir="t"/>
+    </dgm:scene3d>
+    <dgm:sp3d/>
+    <dgm:txPr/>
+    <dgm:style>
+      <a:lnRef idx="2">
+        <a:scrgbClr r="0" g="0" b="0"/>
+      </a:lnRef>
+      <a:fillRef idx="1">
+        <a:scrgbClr r="0" g="0" b="0"/>
+      </a:fillRef>
+      <a:effectRef idx="0">
+        <a:scrgbClr r="0" g="0" b="0"/>
+      </a:effectRef>
+      <a:fontRef idx="minor">
+        <a:schemeClr val="lt1"/>
+      </a:fontRef>
+    </dgm:style>
+  </dgm:styleLbl>
+  <dgm:styleLbl name="asst4">
+    <dgm:scene3d>
+      <a:camera prst="orthographicFront"/>
+      <a:lightRig rig="threePt" dir="t"/>
+    </dgm:scene3d>
+    <dgm:sp3d/>
+    <dgm:txPr/>
+    <dgm:style>
+      <a:lnRef idx="2">
+        <a:scrgbClr r="0" g="0" b="0"/>
+      </a:lnRef>
+      <a:fillRef idx="1">
+        <a:scrgbClr r="0" g="0" b="0"/>
+      </a:fillRef>
+      <a:effectRef idx="0">
+        <a:scrgbClr r="0" g="0" b="0"/>
+      </a:effectRef>
+      <a:fontRef idx="minor">
+        <a:schemeClr val="lt1"/>
+      </a:fontRef>
+    </dgm:style>
+  </dgm:styleLbl>
+  <dgm:styleLbl name="parChTrans2D1">
+    <dgm:scene3d>
+      <a:camera prst="orthographicFront"/>
+      <a:lightRig rig="threePt" dir="t"/>
+    </dgm:scene3d>
+    <dgm:sp3d/>
+    <dgm:txPr/>
+    <dgm:style>
+      <a:lnRef idx="2">
+        <a:scrgbClr r="0" g="0" b="0"/>
+      </a:lnRef>
+      <a:fillRef idx="1">
+        <a:scrgbClr r="0" g="0" b="0"/>
+      </a:fillRef>
+      <a:effectRef idx="0">
+        <a:scrgbClr r="0" g="0" b="0"/>
+      </a:effectRef>
+      <a:fontRef idx="minor">
+        <a:schemeClr val="lt1"/>
+      </a:fontRef>
+    </dgm:style>
+  </dgm:styleLbl>
+  <dgm:styleLbl name="parChTrans2D2">
+    <dgm:scene3d>
+      <a:camera prst="orthographicFront"/>
+      <a:lightRig rig="threePt" dir="t"/>
+    </dgm:scene3d>
+    <dgm:sp3d/>
+    <dgm:txPr/>
+    <dgm:style>
+      <a:lnRef idx="2">
+        <a:scrgbClr r="0" g="0" b="0"/>
+      </a:lnRef>
+      <a:fillRef idx="1">
+        <a:scrgbClr r="0" g="0" b="0"/>
+      </a:fillRef>
+      <a:effectRef idx="0">
+        <a:scrgbClr r="0" g="0" b="0"/>
+      </a:effectRef>
+      <a:fontRef idx="minor">
+        <a:schemeClr val="lt1"/>
+      </a:fontRef>
+    </dgm:style>
+  </dgm:styleLbl>
+  <dgm:styleLbl name="parChTrans2D3">
+    <dgm:scene3d>
+      <a:camera prst="orthographicFront"/>
+      <a:lightRig rig="threePt" dir="t"/>
+    </dgm:scene3d>
+    <dgm:sp3d/>
+    <dgm:txPr/>
+    <dgm:style>
+      <a:lnRef idx="2">
+        <a:scrgbClr r="0" g="0" b="0"/>
+      </a:lnRef>
+      <a:fillRef idx="1">
+        <a:scrgbClr r="0" g="0" b="0"/>
+      </a:fillRef>
+      <a:effectRef idx="0">
+        <a:scrgbClr r="0" g="0" b="0"/>
+      </a:effectRef>
+      <a:fontRef idx="minor">
+        <a:schemeClr val="lt1"/>
+      </a:fontRef>
+    </dgm:style>
+  </dgm:styleLbl>
+  <dgm:styleLbl name="parChTrans2D4">
+    <dgm:scene3d>
+      <a:camera prst="orthographicFront"/>
+      <a:lightRig rig="threePt" dir="t"/>
+    </dgm:scene3d>
+    <dgm:sp3d/>
+    <dgm:txPr/>
+    <dgm:style>
+      <a:lnRef idx="2">
+        <a:scrgbClr r="0" g="0" b="0"/>
+      </a:lnRef>
+      <a:fillRef idx="1">
+        <a:scrgbClr r="0" g="0" b="0"/>
+      </a:fillRef>
+      <a:effectRef idx="0">
+        <a:scrgbClr r="0" g="0" b="0"/>
+      </a:effectRef>
+      <a:fontRef idx="minor">
+        <a:schemeClr val="lt1"/>
+      </a:fontRef>
+    </dgm:style>
+  </dgm:styleLbl>
+  <dgm:styleLbl name="parChTrans1D1">
+    <dgm:scene3d>
+      <a:camera prst="orthographicFront"/>
+      <a:lightRig rig="threePt" dir="t"/>
+    </dgm:scene3d>
+    <dgm:sp3d/>
+    <dgm:txPr/>
+    <dgm:style>
+      <a:lnRef idx="2">
+        <a:scrgbClr r="0" g="0" b="0"/>
+      </a:lnRef>
+      <a:fillRef idx="0">
+        <a:scrgbClr r="0" g="0" b="0"/>
+      </a:fillRef>
+      <a:effectRef idx="0">
+        <a:scrgbClr r="0" g="0" b="0"/>
+      </a:effectRef>
+      <a:fontRef idx="minor"/>
+    </dgm:style>
+  </dgm:styleLbl>
+  <dgm:styleLbl name="parChTrans1D2">
+    <dgm:scene3d>
+      <a:camera prst="orthographicFront"/>
+      <a:lightRig rig="threePt" dir="t"/>
+    </dgm:scene3d>
+    <dgm:sp3d/>
+    <dgm:txPr/>
+    <dgm:style>
+      <a:lnRef idx="2">
+        <a:scrgbClr r="0" g="0" b="0"/>
+      </a:lnRef>
+      <a:fillRef idx="0">
+        <a:scrgbClr r="0" g="0" b="0"/>
+      </a:fillRef>
+      <a:effectRef idx="0">
+        <a:scrgbClr r="0" g="0" b="0"/>
+      </a:effectRef>
+      <a:fontRef idx="minor"/>
+    </dgm:style>
+  </dgm:styleLbl>
+  <dgm:styleLbl name="parChTrans1D3">
+    <dgm:scene3d>
+      <a:camera prst="orthographicFront"/>
+      <a:lightRig rig="threePt" dir="t"/>
+    </dgm:scene3d>
+    <dgm:sp3d/>
+    <dgm:txPr/>
+    <dgm:style>
+      <a:lnRef idx="2">
+        <a:scrgbClr r="0" g="0" b="0"/>
+      </a:lnRef>
+      <a:fillRef idx="0">
+        <a:scrgbClr r="0" g="0" b="0"/>
+      </a:fillRef>
+      <a:effectRef idx="0">
+        <a:scrgbClr r="0" g="0" b="0"/>
+      </a:effectRef>
+      <a:fontRef idx="minor"/>
+    </dgm:style>
+  </dgm:styleLbl>
+  <dgm:styleLbl name="parChTrans1D4">
+    <dgm:scene3d>
+      <a:camera prst="orthographicFront"/>
+      <a:lightRig rig="threePt" dir="t"/>
+    </dgm:scene3d>
+    <dgm:sp3d/>
+    <dgm:txPr/>
+    <dgm:style>
+      <a:lnRef idx="2">
+        <a:scrgbClr r="0" g="0" b="0"/>
+      </a:lnRef>
+      <a:fillRef idx="0">
+        <a:scrgbClr r="0" g="0" b="0"/>
+      </a:fillRef>
+      <a:effectRef idx="0">
+        <a:scrgbClr r="0" g="0" b="0"/>
+      </a:effectRef>
+      <a:fontRef idx="minor"/>
+    </dgm:style>
+  </dgm:styleLbl>
+  <dgm:styleLbl name="fgAcc1">
+    <dgm:scene3d>
+      <a:camera prst="orthographicFront"/>
+      <a:lightRig rig="threePt" dir="t"/>
+    </dgm:scene3d>
+    <dgm:sp3d/>
+    <dgm:txPr/>
+    <dgm:style>
+      <a:lnRef idx="2">
+        <a:scrgbClr r="0" g="0" b="0"/>
+      </a:lnRef>
+      <a:fillRef idx="1">
+        <a:scrgbClr r="0" g="0" b="0"/>
+      </a:fillRef>
+      <a:effectRef idx="0">
+        <a:scrgbClr r="0" g="0" b="0"/>
+      </a:effectRef>
+      <a:fontRef idx="minor"/>
+    </dgm:style>
+  </dgm:styleLbl>
+  <dgm:styleLbl name="conFgAcc1">
+    <dgm:scene3d>
+      <a:camera prst="orthographicFront"/>
+      <a:lightRig rig="threePt" dir="t"/>
+    </dgm:scene3d>
+    <dgm:sp3d/>
+    <dgm:txPr/>
+    <dgm:style>
+      <a:lnRef idx="2">
+        <a:scrgbClr r="0" g="0" b="0"/>
+      </a:lnRef>
+      <a:fillRef idx="1">
+        <a:scrgbClr r="0" g="0" b="0"/>
+      </a:fillRef>
+      <a:effectRef idx="0">
+        <a:scrgbClr r="0" g="0" b="0"/>
+      </a:effectRef>
+      <a:fontRef idx="minor"/>
+    </dgm:style>
+  </dgm:styleLbl>
+  <dgm:styleLbl name="alignAcc1">
+    <dgm:scene3d>
+      <a:camera prst="orthographicFront"/>
+      <a:lightRig rig="threePt" dir="t"/>
+    </dgm:scene3d>
+    <dgm:sp3d/>
+    <dgm:txPr/>
+    <dgm:style>
+      <a:lnRef idx="2">
+        <a:scrgbClr r="0" g="0" b="0"/>
+      </a:lnRef>
+      <a:fillRef idx="1">
+        <a:scrgbClr r="0" g="0" b="0"/>
+      </a:fillRef>
+      <a:effectRef idx="0">
+        <a:scrgbClr r="0" g="0" b="0"/>
+      </a:effectRef>
+      <a:fontRef idx="minor"/>
+    </dgm:style>
+  </dgm:styleLbl>
+  <dgm:styleLbl name="trAlignAcc1">
+    <dgm:scene3d>
+      <a:camera prst="orthographicFront"/>
+      <a:lightRig rig="threePt" dir="t"/>
+    </dgm:scene3d>
+    <dgm:sp3d/>
+    <dgm:txPr/>
+    <dgm:style>
+      <a:lnRef idx="1">
+        <a:scrgbClr r="0" g="0" b="0"/>
+      </a:lnRef>
+      <a:fillRef idx="1">
+        <a:scrgbClr r="0" g="0" b="0"/>
+      </a:fillRef>
+      <a:effectRef idx="0">
+        <a:scrgbClr r="0" g="0" b="0"/>
+      </a:effectRef>
+      <a:fontRef idx="minor"/>
+    </dgm:style>
+  </dgm:styleLbl>
+  <dgm:styleLbl name="bgAcc1">
+    <dgm:scene3d>
+      <a:camera prst="orthographicFront"/>
+      <a:lightRig rig="threePt" dir="t"/>
+    </dgm:scene3d>
+    <dgm:sp3d/>
+    <dgm:txPr/>
+    <dgm:style>
+      <a:lnRef idx="2">
+        <a:scrgbClr r="0" g="0" b="0"/>
+      </a:lnRef>
+      <a:fillRef idx="1">
+        <a:scrgbClr r="0" g="0" b="0"/>
+      </a:fillRef>
+      <a:effectRef idx="0">
+        <a:scrgbClr r="0" g="0" b="0"/>
+      </a:effectRef>
+      <a:fontRef idx="minor"/>
+    </dgm:style>
+  </dgm:styleLbl>
+  <dgm:styleLbl name="solidFgAcc1">
+    <dgm:scene3d>
+      <a:camera prst="orthographicFront"/>
+      <a:lightRig rig="threePt" dir="t"/>
+    </dgm:scene3d>
+    <dgm:sp3d/>
+    <dgm:txPr/>
+    <dgm:style>
+      <a:lnRef idx="2">
+        <a:scrgbClr r="0" g="0" b="0"/>
+      </a:lnRef>
+      <a:fillRef idx="1">
+        <a:scrgbClr r="0" g="0" b="0"/>
+      </a:fillRef>
+      <a:effectRef idx="0">
+        <a:scrgbClr r="0" g="0" b="0"/>
+      </a:effectRef>
+      <a:fontRef idx="minor"/>
+    </dgm:style>
+  </dgm:styleLbl>
+  <dgm:styleLbl name="solidAlignAcc1">
+    <dgm:scene3d>
+      <a:camera prst="orthographicFront"/>
+      <a:lightRig rig="threePt" dir="t"/>
+    </dgm:scene3d>
+    <dgm:sp3d/>
+    <dgm:txPr/>
+    <dgm:style>
+      <a:lnRef idx="2">
+        <a:scrgbClr r="0" g="0" b="0"/>
+      </a:lnRef>
+      <a:fillRef idx="1">
+        <a:scrgbClr r="0" g="0" b="0"/>
+      </a:fillRef>
+      <a:effectRef idx="0">
+        <a:scrgbClr r="0" g="0" b="0"/>
+      </a:effectRef>
+      <a:fontRef idx="minor"/>
+    </dgm:style>
+  </dgm:styleLbl>
+  <dgm:styleLbl name="solidBgAcc1">
+    <dgm:scene3d>
+      <a:camera prst="orthographicFront"/>
+      <a:lightRig rig="threePt" dir="t"/>
+    </dgm:scene3d>
+    <dgm:sp3d/>
+    <dgm:txPr/>
+    <dgm:style>
+      <a:lnRef idx="2">
+        <a:scrgbClr r="0" g="0" b="0"/>
+      </a:lnRef>
+      <a:fillRef idx="1">
+        <a:scrgbClr r="0" g="0" b="0"/>
+      </a:fillRef>
+      <a:effectRef idx="0">
+        <a:scrgbClr r="0" g="0" b="0"/>
+      </a:effectRef>
+      <a:fontRef idx="minor"/>
+    </dgm:style>
+  </dgm:styleLbl>
+  <dgm:styleLbl name="fgAccFollowNode1">
+    <dgm:scene3d>
+      <a:camera prst="orthographicFront"/>
+      <a:lightRig rig="threePt" dir="t"/>
+    </dgm:scene3d>
+    <dgm:sp3d/>
+    <dgm:txPr/>
+    <dgm:style>
+      <a:lnRef idx="2">
+        <a:scrgbClr r="0" g="0" b="0"/>
+      </a:lnRef>
+      <a:fillRef idx="1">
+        <a:scrgbClr r="0" g="0" b="0"/>
+      </a:fillRef>
+      <a:effectRef idx="0">
+        <a:scrgbClr r="0" g="0" b="0"/>
+      </a:effectRef>
+      <a:fontRef idx="minor"/>
+    </dgm:style>
+  </dgm:styleLbl>
+  <dgm:styleLbl name="alignAccFollowNode1">
+    <dgm:scene3d>
+      <a:camera prst="orthographicFront"/>
+      <a:lightRig rig="threePt" dir="t"/>
+    </dgm:scene3d>
+    <dgm:sp3d/>
+    <dgm:txPr/>
+    <dgm:style>
+      <a:lnRef idx="2">
+        <a:scrgbClr r="0" g="0" b="0"/>
+      </a:lnRef>
+      <a:fillRef idx="1">
+        <a:scrgbClr r="0" g="0" b="0"/>
+      </a:fillRef>
+      <a:effectRef idx="0">
+        <a:scrgbClr r="0" g="0" b="0"/>
+      </a:effectRef>
+      <a:fontRef idx="minor"/>
+    </dgm:style>
+  </dgm:styleLbl>
+  <dgm:styleLbl name="bgAccFollowNode1">
+    <dgm:scene3d>
+      <a:camera prst="orthographicFront"/>
+      <a:lightRig rig="threePt" dir="t"/>
+    </dgm:scene3d>
+    <dgm:sp3d/>
+    <dgm:txPr/>
+    <dgm:style>
+      <a:lnRef idx="2">
+        <a:scrgbClr r="0" g="0" b="0"/>
+      </a:lnRef>
+      <a:fillRef idx="1">
+        <a:scrgbClr r="0" g="0" b="0"/>
+      </a:fillRef>
+      <a:effectRef idx="0">
+        <a:scrgbClr r="0" g="0" b="0"/>
+      </a:effectRef>
+      <a:fontRef idx="minor"/>
+    </dgm:style>
+  </dgm:styleLbl>
+  <dgm:styleLbl name="fgAcc0">
+    <dgm:scene3d>
+      <a:camera prst="orthographicFront"/>
+      <a:lightRig rig="threePt" dir="t"/>
+    </dgm:scene3d>
+    <dgm:sp3d/>
+    <dgm:txPr/>
+    <dgm:style>
+      <a:lnRef idx="2">
+        <a:scrgbClr r="0" g="0" b="0"/>
+      </a:lnRef>
+      <a:fillRef idx="1">
+        <a:scrgbClr r="0" g="0" b="0"/>
+      </a:fillRef>
+      <a:effectRef idx="0">
+        <a:scrgbClr r="0" g="0" b="0"/>
+      </a:effectRef>
+      <a:fontRef idx="minor"/>
+    </dgm:style>
+  </dgm:styleLbl>
+  <dgm:styleLbl name="fgAcc2">
+    <dgm:scene3d>
+      <a:camera prst="orthographicFront"/>
+      <a:lightRig rig="threePt" dir="t"/>
+    </dgm:scene3d>
+    <dgm:sp3d/>
+    <dgm:txPr/>
+    <dgm:style>
+      <a:lnRef idx="2">
+        <a:scrgbClr r="0" g="0" b="0"/>
+      </a:lnRef>
+      <a:fillRef idx="1">
+        <a:scrgbClr r="0" g="0" b="0"/>
+      </a:fillRef>
+      <a:effectRef idx="0">
+        <a:scrgbClr r="0" g="0" b="0"/>
+      </a:effectRef>
+      <a:fontRef idx="minor"/>
+    </dgm:style>
+  </dgm:styleLbl>
+  <dgm:styleLbl name="fgAcc3">
+    <dgm:scene3d>
+      <a:camera prst="orthographicFront"/>
+      <a:lightRig rig="threePt" dir="t"/>
+    </dgm:scene3d>
+    <dgm:sp3d/>
+    <dgm:txPr/>
+    <dgm:style>
+      <a:lnRef idx="2">
+        <a:scrgbClr r="0" g="0" b="0"/>
+      </a:lnRef>
+      <a:fillRef idx="1">
+        <a:scrgbClr r="0" g="0" b="0"/>
+      </a:fillRef>
+      <a:effectRef idx="0">
+        <a:scrgbClr r="0" g="0" b="0"/>
+      </a:effectRef>
+      <a:fontRef idx="minor"/>
+    </dgm:style>
+  </dgm:styleLbl>
+  <dgm:styleLbl name="fgAcc4">
+    <dgm:scene3d>
+      <a:camera prst="orthographicFront"/>
+      <a:lightRig rig="threePt" dir="t"/>
+    </dgm:scene3d>
+    <dgm:sp3d/>
+    <dgm:txPr/>
+    <dgm:style>
+      <a:lnRef idx="2">
+        <a:scrgbClr r="0" g="0" b="0"/>
+      </a:lnRef>
+      <a:fillRef idx="1">
+        <a:scrgbClr r="0" g="0" b="0"/>
+      </a:fillRef>
+      <a:effectRef idx="0">
+        <a:scrgbClr r="0" g="0" b="0"/>
+      </a:effectRef>
+      <a:fontRef idx="minor"/>
+    </dgm:style>
+  </dgm:styleLbl>
+  <dgm:styleLbl name="bgShp">
+    <dgm:scene3d>
+      <a:camera prst="orthographicFront"/>
+      <a:lightRig rig="threePt" dir="t"/>
+    </dgm:scene3d>
+    <dgm:sp3d/>
+    <dgm:txPr/>
+    <dgm:style>
+      <a:lnRef idx="0">
+        <a:scrgbClr r="0" g="0" b="0"/>
+      </a:lnRef>
+      <a:fillRef idx="1">
+        <a:scrgbClr r="0" g="0" b="0"/>
+      </a:fillRef>
+      <a:effectRef idx="0">
+        <a:scrgbClr r="0" g="0" b="0"/>
+      </a:effectRef>
+      <a:fontRef idx="minor"/>
+    </dgm:style>
+  </dgm:styleLbl>
+  <dgm:styleLbl name="dkBgShp">
+    <dgm:scene3d>
+      <a:camera prst="orthographicFront"/>
+      <a:lightRig rig="threePt" dir="t"/>
+    </dgm:scene3d>
+    <dgm:sp3d/>
+    <dgm:txPr/>
+    <dgm:style>
+      <a:lnRef idx="0">
+        <a:scrgbClr r="0" g="0" b="0"/>
+      </a:lnRef>
+      <a:fillRef idx="1">
+        <a:scrgbClr r="0" g="0" b="0"/>
+      </a:fillRef>
+      <a:effectRef idx="0">
+        <a:scrgbClr r="0" g="0" b="0"/>
+      </a:effectRef>
+      <a:fontRef idx="minor"/>
+    </dgm:style>
+  </dgm:styleLbl>
+  <dgm:styleLbl name="trBgShp">
+    <dgm:scene3d>
+      <a:camera prst="orthographicFront"/>
+      <a:lightRig rig="threePt" dir="t"/>
+    </dgm:scene3d>
+    <dgm:sp3d/>
+    <dgm:txPr/>
+    <dgm:style>
+      <a:lnRef idx="0">
+        <a:scrgbClr r="0" g="0" b="0"/>
+      </a:lnRef>
+      <a:fillRef idx="1">
+        <a:scrgbClr r="0" g="0" b="0"/>
+      </a:fillRef>
+      <a:effectRef idx="0">
+        <a:scrgbClr r="0" g="0" b="0"/>
+      </a:effectRef>
+      <a:fontRef idx="minor"/>
+    </dgm:style>
+  </dgm:styleLbl>
+  <dgm:styleLbl name="fgShp">
+    <dgm:scene3d>
+      <a:camera prst="orthographicFront"/>
+      <a:lightRig rig="threePt" dir="t"/>
+    </dgm:scene3d>
+    <dgm:sp3d/>
+    <dgm:txPr/>
+    <dgm:style>
+      <a:lnRef idx="2">
+        <a:scrgbClr r="0" g="0" b="0"/>
+      </a:lnRef>
+      <a:fillRef idx="1">
+        <a:scrgbClr r="0" g="0" b="0"/>
+      </a:fillRef>
+      <a:effectRef idx="0">
+        <a:scrgbClr r="0" g="0" b="0"/>
+      </a:effectRef>
+      <a:fontRef idx="minor"/>
+    </dgm:style>
+  </dgm:styleLbl>
+  <dgm:styleLbl name="revTx">
+    <dgm:scene3d>
+      <a:camera prst="orthographicFront"/>
+      <a:lightRig rig="threePt" dir="t"/>
+    </dgm:scene3d>
+    <dgm:sp3d/>
+    <dgm:txPr/>
+    <dgm:style>
+      <a:lnRef idx="0">
+        <a:scrgbClr r="0" g="0" b="0"/>
+      </a:lnRef>
+      <a:fillRef idx="0">
+        <a:scrgbClr r="0" g="0" b="0"/>
+      </a:fillRef>
+      <a:effectRef idx="0">
+        <a:scrgbClr r="0" g="0" b="0"/>
+      </a:effectRef>
+      <a:fontRef idx="minor"/>
+    </dgm:style>
+  </dgm:styleLbl>
+</dgm:styleDef>
+</file>
+
 <file path=ppt/notesMasters/notesMaster1.xml><?xml version="1.0" encoding="utf-8"?>
 <p:notesMaster xmlns:a="http://schemas.openxmlformats.org/drawingml/2006/main" xmlns:r="http://schemas.openxmlformats.org/officeDocument/2006/relationships" xmlns:p="http://schemas.openxmlformats.org/presentationml/2006/main">
   <p:cSld>
@@ -3203,7 +5692,7 @@
           <a:p>
             <a:fld id="{F129488A-22F5-F54C-A8CA-F9B4F91C0607}" type="datetimeFigureOut">
               <a:rPr lang="en-US" smtClean="0"/>
-              <a:t>6/29/24</a:t>
+              <a:t>7/7/24</a:t>
             </a:fld>
             <a:endParaRPr lang="en-US"/>
           </a:p>
@@ -3622,7 +6111,7 @@
           <a:p>
             <a:fld id="{C674A667-ACEB-274E-B6A3-A942A5050705}" type="slidenum">
               <a:rPr lang="en-US" smtClean="0"/>
-              <a:t>22</a:t>
+              <a:t>23</a:t>
             </a:fld>
             <a:endParaRPr lang="en-US"/>
           </a:p>
@@ -3709,7 +6198,7 @@
           <a:p>
             <a:fld id="{C674A667-ACEB-274E-B6A3-A942A5050705}" type="slidenum">
               <a:rPr lang="en-US" smtClean="0"/>
-              <a:t>23</a:t>
+              <a:t>24</a:t>
             </a:fld>
             <a:endParaRPr lang="en-US"/>
           </a:p>
@@ -3796,7 +6285,7 @@
           <a:p>
             <a:fld id="{C674A667-ACEB-274E-B6A3-A942A5050705}" type="slidenum">
               <a:rPr lang="en-US" smtClean="0"/>
-              <a:t>27</a:t>
+              <a:t>28</a:t>
             </a:fld>
             <a:endParaRPr lang="en-US"/>
           </a:p>
@@ -3888,7 +6377,7 @@
           <a:p>
             <a:fld id="{C674A667-ACEB-274E-B6A3-A942A5050705}" type="slidenum">
               <a:rPr lang="en-US" smtClean="0"/>
-              <a:t>32</a:t>
+              <a:t>33</a:t>
             </a:fld>
             <a:endParaRPr lang="en-US"/>
           </a:p>
@@ -4059,7 +6548,7 @@
           <a:p>
             <a:fld id="{C674A667-ACEB-274E-B6A3-A942A5050705}" type="slidenum">
               <a:rPr lang="en-US" smtClean="0"/>
-              <a:t>5</a:t>
+              <a:t>6</a:t>
             </a:fld>
             <a:endParaRPr lang="en-US"/>
           </a:p>
@@ -4143,7 +6632,7 @@
           <a:p>
             <a:fld id="{C674A667-ACEB-274E-B6A3-A942A5050705}" type="slidenum">
               <a:rPr lang="en-US" smtClean="0"/>
-              <a:t>6</a:t>
+              <a:t>7</a:t>
             </a:fld>
             <a:endParaRPr lang="en-US"/>
           </a:p>
@@ -4227,7 +6716,7 @@
           <a:p>
             <a:fld id="{C674A667-ACEB-274E-B6A3-A942A5050705}" type="slidenum">
               <a:rPr lang="en-US" smtClean="0"/>
-              <a:t>10</a:t>
+              <a:t>11</a:t>
             </a:fld>
             <a:endParaRPr lang="en-US"/>
           </a:p>
@@ -4311,7 +6800,7 @@
           <a:p>
             <a:fld id="{C674A667-ACEB-274E-B6A3-A942A5050705}" type="slidenum">
               <a:rPr lang="en-US" smtClean="0"/>
-              <a:t>11</a:t>
+              <a:t>12</a:t>
             </a:fld>
             <a:endParaRPr lang="en-US"/>
           </a:p>
@@ -4395,7 +6884,7 @@
           <a:p>
             <a:fld id="{C674A667-ACEB-274E-B6A3-A942A5050705}" type="slidenum">
               <a:rPr lang="en-US" smtClean="0"/>
-              <a:t>19</a:t>
+              <a:t>20</a:t>
             </a:fld>
             <a:endParaRPr lang="en-US"/>
           </a:p>
@@ -4479,7 +6968,7 @@
           <a:p>
             <a:fld id="{C674A667-ACEB-274E-B6A3-A942A5050705}" type="slidenum">
               <a:rPr lang="en-US" smtClean="0"/>
-              <a:t>20</a:t>
+              <a:t>21</a:t>
             </a:fld>
             <a:endParaRPr lang="en-US"/>
           </a:p>
@@ -4563,7 +7052,7 @@
           <a:p>
             <a:fld id="{C674A667-ACEB-274E-B6A3-A942A5050705}" type="slidenum">
               <a:rPr lang="en-US" smtClean="0"/>
-              <a:t>21</a:t>
+              <a:t>22</a:t>
             </a:fld>
             <a:endParaRPr lang="en-US"/>
           </a:p>
@@ -4729,7 +7218,7 @@
           <a:p>
             <a:fld id="{40A464C0-CF97-9245-A0D9-54D08FA6B5D8}" type="datetime1">
               <a:rPr lang="en-CA" smtClean="0"/>
-              <a:t>2024-06-29</a:t>
+              <a:t>2024-07-07</a:t>
             </a:fld>
             <a:endParaRPr lang="en-US"/>
           </a:p>
@@ -4927,7 +7416,7 @@
           <a:p>
             <a:fld id="{2BB3E4C0-BBF0-8544-8AD2-F06F5E15103B}" type="datetime1">
               <a:rPr lang="en-CA" smtClean="0"/>
-              <a:t>2024-06-29</a:t>
+              <a:t>2024-07-07</a:t>
             </a:fld>
             <a:endParaRPr lang="en-US"/>
           </a:p>
@@ -5135,7 +7624,7 @@
           <a:p>
             <a:fld id="{6C6218AA-097A-FD4B-9D21-4196BAA4809C}" type="datetime1">
               <a:rPr lang="en-CA" smtClean="0"/>
-              <a:t>2024-06-29</a:t>
+              <a:t>2024-07-07</a:t>
             </a:fld>
             <a:endParaRPr lang="en-US"/>
           </a:p>
@@ -5333,7 +7822,7 @@
           <a:p>
             <a:fld id="{AEB02DB1-7EAE-4F43-BD24-667A2CBE6F33}" type="datetime1">
               <a:rPr lang="en-CA" smtClean="0"/>
-              <a:t>2024-06-29</a:t>
+              <a:t>2024-07-07</a:t>
             </a:fld>
             <a:endParaRPr lang="en-US"/>
           </a:p>
@@ -5608,7 +8097,7 @@
           <a:p>
             <a:fld id="{1EEBCC8E-AC73-B041-A643-881D14AC9E96}" type="datetime1">
               <a:rPr lang="en-CA" smtClean="0"/>
-              <a:t>2024-06-29</a:t>
+              <a:t>2024-07-07</a:t>
             </a:fld>
             <a:endParaRPr lang="en-US"/>
           </a:p>
@@ -5873,7 +8362,7 @@
           <a:p>
             <a:fld id="{B7D153E5-9259-1046-AF8C-708564DBBA6B}" type="datetime1">
               <a:rPr lang="en-CA" smtClean="0"/>
-              <a:t>2024-06-29</a:t>
+              <a:t>2024-07-07</a:t>
             </a:fld>
             <a:endParaRPr lang="en-US"/>
           </a:p>
@@ -6285,7 +8774,7 @@
           <a:p>
             <a:fld id="{81F41693-106C-2543-9C96-20B50D639AA3}" type="datetime1">
               <a:rPr lang="en-CA" smtClean="0"/>
-              <a:t>2024-06-29</a:t>
+              <a:t>2024-07-07</a:t>
             </a:fld>
             <a:endParaRPr lang="en-US"/>
           </a:p>
@@ -6426,7 +8915,7 @@
           <a:p>
             <a:fld id="{8B01BA73-A6C9-724F-BEE4-DD6E0535B08A}" type="datetime1">
               <a:rPr lang="en-CA" smtClean="0"/>
-              <a:t>2024-06-29</a:t>
+              <a:t>2024-07-07</a:t>
             </a:fld>
             <a:endParaRPr lang="en-US"/>
           </a:p>
@@ -6539,7 +9028,7 @@
           <a:p>
             <a:fld id="{64F10FC2-143A-8A49-B6D2-34756D069D62}" type="datetime1">
               <a:rPr lang="en-CA" smtClean="0"/>
-              <a:t>2024-06-29</a:t>
+              <a:t>2024-07-07</a:t>
             </a:fld>
             <a:endParaRPr lang="en-US"/>
           </a:p>
@@ -6850,7 +9339,7 @@
           <a:p>
             <a:fld id="{B274F44D-2F0C-7F4F-BCFD-8868E9836F56}" type="datetime1">
               <a:rPr lang="en-CA" smtClean="0"/>
-              <a:t>2024-06-29</a:t>
+              <a:t>2024-07-07</a:t>
             </a:fld>
             <a:endParaRPr lang="en-US"/>
           </a:p>
@@ -7138,7 +9627,7 @@
           <a:p>
             <a:fld id="{85DE3116-6E4F-D74A-8C8D-D8CF0F626DCF}" type="datetime1">
               <a:rPr lang="en-CA" smtClean="0"/>
-              <a:t>2024-06-29</a:t>
+              <a:t>2024-07-07</a:t>
             </a:fld>
             <a:endParaRPr lang="en-US"/>
           </a:p>
@@ -7379,7 +9868,7 @@
           <a:p>
             <a:fld id="{9A5E96CB-08FF-C240-B43E-C3C6CBABEAD7}" type="datetime1">
               <a:rPr lang="en-CA" smtClean="0"/>
-              <a:t>2024-06-29</a:t>
+              <a:t>2024-07-07</a:t>
             </a:fld>
             <a:endParaRPr lang="en-US"/>
           </a:p>
@@ -7917,7 +10406,7 @@
           <p:cNvPr id="2" name="Title 1">
             <a:extLst>
               <a:ext uri="{FF2B5EF4-FFF2-40B4-BE49-F238E27FC236}">
-                <a16:creationId xmlns:a16="http://schemas.microsoft.com/office/drawing/2014/main" id="{C6ED8DB8-BCA5-F81A-05FD-7072CBCEC692}"/>
+                <a16:creationId xmlns:a16="http://schemas.microsoft.com/office/drawing/2014/main" id="{40FF12ED-456E-BAED-281B-8F9FE4E7131B}"/>
               </a:ext>
             </a:extLst>
           </p:cNvPr>
@@ -7935,17 +10424,17 @@
           <a:p>
             <a:r>
               <a:rPr lang="en-US" dirty="0"/>
-              <a:t>4.3.1 Graph API</a:t>
-            </a:r>
-          </a:p>
-        </p:txBody>
-      </p:sp>
-      <p:sp>
-        <p:nvSpPr>
-          <p:cNvPr id="6" name="Content Placeholder 5">
-            <a:extLst>
-              <a:ext uri="{FF2B5EF4-FFF2-40B4-BE49-F238E27FC236}">
-                <a16:creationId xmlns:a16="http://schemas.microsoft.com/office/drawing/2014/main" id="{62395C89-C082-A2EB-62D5-CAEA641F6BF8}"/>
+              <a:t>4.3 Flexograph Architecture</a:t>
+            </a:r>
+          </a:p>
+        </p:txBody>
+      </p:sp>
+      <p:sp>
+        <p:nvSpPr>
+          <p:cNvPr id="7" name="Content Placeholder 6">
+            <a:extLst>
+              <a:ext uri="{FF2B5EF4-FFF2-40B4-BE49-F238E27FC236}">
+                <a16:creationId xmlns:a16="http://schemas.microsoft.com/office/drawing/2014/main" id="{C8B77D4E-FDF0-2DFE-153B-59C3DDCF605F}"/>
               </a:ext>
             </a:extLst>
           </p:cNvPr>
@@ -7953,81 +10442,47 @@
             <a:spLocks noGrp="1"/>
           </p:cNvSpPr>
           <p:nvPr>
-            <p:ph idx="1"/>
+            <p:ph sz="half" idx="1"/>
           </p:nvPr>
         </p:nvSpPr>
         <p:spPr/>
         <p:txBody>
-          <a:bodyPr>
-            <a:normAutofit/>
-          </a:bodyPr>
-          <a:lstStyle/>
-          <a:p>
-            <a:r>
-              <a:rPr lang="en-US" dirty="0"/>
-              <a:t>The Graph API provides the user a means to interact with the graph that elides the underlying storage backend or the representation used to store the graph</a:t>
-            </a:r>
-          </a:p>
-          <a:p>
-            <a:pPr lvl="1"/>
-            <a:r>
-              <a:rPr lang="en-US" dirty="0"/>
-              <a:t>This increases portability of the application code</a:t>
-            </a:r>
-          </a:p>
-          <a:p>
-            <a:pPr lvl="1"/>
-            <a:endParaRPr lang="en-US" dirty="0"/>
-          </a:p>
-          <a:p>
-            <a:r>
-              <a:rPr lang="en-US" dirty="0"/>
-              <a:t>The Graph API must provide methods for:</a:t>
-            </a:r>
-          </a:p>
-          <a:p>
-            <a:pPr lvl="1"/>
+          <a:bodyPr/>
+          <a:lstStyle/>
+          <a:p>
+            <a:r>
+              <a:rPr lang="en-US" dirty="0"/>
+              <a:t>In the previous section we saw the components needed to build a graph database</a:t>
+            </a:r>
+          </a:p>
+          <a:p>
+            <a:r>
+              <a:rPr lang="en-US" dirty="0"/>
+              <a:t>We now examine the architecture of Flexograph and its three building blocks: the </a:t>
+            </a:r>
             <a:r>
               <a:rPr lang="en-US" b="1" dirty="0"/>
-              <a:t>Structural</a:t>
-            </a:r>
-            <a:r>
-              <a:rPr lang="en-US" dirty="0"/>
-              <a:t> manipulation and querying (add/delete nodes and edges, get degrees, get a node’s neighborhood)</a:t>
-            </a:r>
-          </a:p>
-          <a:p>
-            <a:pPr lvl="1"/>
-            <a:r>
-              <a:rPr lang="en-US" b="1" dirty="0">
-                <a:highlight>
-                  <a:srgbClr val="C0C0C0"/>
-                </a:highlight>
-              </a:rPr>
-              <a:t>Property and Label </a:t>
-            </a:r>
-            <a:r>
-              <a:rPr lang="en-US" dirty="0">
-                <a:highlight>
-                  <a:srgbClr val="C0C0C0"/>
-                </a:highlight>
-              </a:rPr>
-              <a:t>manipulation and querying (add/query/remove property)</a:t>
-            </a:r>
-          </a:p>
-          <a:p>
-            <a:pPr lvl="1"/>
-            <a:r>
-              <a:rPr lang="en-US" dirty="0"/>
-              <a:t>Adding and retrieving </a:t>
+              <a:t>representations</a:t>
+            </a:r>
+            <a:r>
+              <a:rPr lang="en-US" dirty="0"/>
+              <a:t>, the </a:t>
             </a:r>
             <a:r>
               <a:rPr lang="en-US" b="1" dirty="0"/>
-              <a:t>Metadata</a:t>
-            </a:r>
-            <a:r>
-              <a:rPr lang="en-US" dirty="0"/>
-              <a:t> (querying the num nodes/edges, etc.)</a:t>
+              <a:t>API</a:t>
+            </a:r>
+            <a:r>
+              <a:rPr lang="en-US" dirty="0"/>
+              <a:t>, and the </a:t>
+            </a:r>
+            <a:r>
+              <a:rPr lang="en-US" b="1" dirty="0"/>
+              <a:t>framework</a:t>
+            </a:r>
+            <a:r>
+              <a:rPr lang="en-US" dirty="0"/>
+              <a:t> for higher level access primitives</a:t>
             </a:r>
           </a:p>
         </p:txBody>
@@ -8037,7 +10492,7 @@
           <p:cNvPr id="5" name="Slide Number Placeholder 4">
             <a:extLst>
               <a:ext uri="{FF2B5EF4-FFF2-40B4-BE49-F238E27FC236}">
-                <a16:creationId xmlns:a16="http://schemas.microsoft.com/office/drawing/2014/main" id="{32207CA5-2ED0-1A0B-BDDA-D9F6E1372CF1}"/>
+                <a16:creationId xmlns:a16="http://schemas.microsoft.com/office/drawing/2014/main" id="{C71D5E94-1BF3-2863-B618-3BC59CCE2665}"/>
               </a:ext>
             </a:extLst>
           </p:cNvPr>
@@ -8061,10 +10516,98 @@
           </a:p>
         </p:txBody>
       </p:sp>
+      <p:sp>
+        <p:nvSpPr>
+          <p:cNvPr id="11" name="Shape 4">
+            <a:extLst>
+              <a:ext uri="{FF2B5EF4-FFF2-40B4-BE49-F238E27FC236}">
+                <a16:creationId xmlns:a16="http://schemas.microsoft.com/office/drawing/2014/main" id="{12F13D56-F26E-36C8-0183-F258C754B8A3}"/>
+              </a:ext>
+            </a:extLst>
+          </p:cNvPr>
+          <p:cNvSpPr txBox="1"/>
+          <p:nvPr/>
+        </p:nvSpPr>
+        <p:spPr>
+          <a:xfrm>
+            <a:off x="7326452" y="4881021"/>
+            <a:ext cx="1192106" cy="1192106"/>
+          </a:xfrm>
+          <a:prstGeom prst="rect">
+            <a:avLst/>
+          </a:prstGeom>
+        </p:spPr>
+        <p:style>
+          <a:lnRef idx="0">
+            <a:scrgbClr r="0" g="0" b="0"/>
+          </a:lnRef>
+          <a:fillRef idx="0">
+            <a:scrgbClr r="0" g="0" b="0"/>
+          </a:fillRef>
+          <a:effectRef idx="0">
+            <a:scrgbClr r="0" g="0" b="0"/>
+          </a:effectRef>
+          <a:fontRef idx="minor">
+            <a:schemeClr val="lt1"/>
+          </a:fontRef>
+        </p:style>
+        <p:txBody>
+          <a:bodyPr spcFirstLastPara="0" vert="horz" wrap="square" lIns="24130" tIns="24130" rIns="24130" bIns="24130" numCol="1" spcCol="1270" anchor="ctr" anchorCtr="0">
+            <a:noAutofit/>
+          </a:bodyPr>
+          <a:lstStyle/>
+          <a:p>
+            <a:pPr marL="0" lvl="0" indent="0" algn="ctr" defTabSz="844550">
+              <a:lnSpc>
+                <a:spcPct val="90000"/>
+              </a:lnSpc>
+              <a:spcBef>
+                <a:spcPct val="0"/>
+              </a:spcBef>
+              <a:spcAft>
+                <a:spcPct val="35000"/>
+              </a:spcAft>
+              <a:buNone/>
+            </a:pPr>
+            <a:r>
+              <a:rPr lang="en-US" sz="1900" kern="1200" dirty="0"/>
+              <a:t>Storage Backend</a:t>
+            </a:r>
+          </a:p>
+        </p:txBody>
+      </p:sp>
+      <p:graphicFrame>
+        <p:nvGraphicFramePr>
+          <p:cNvPr id="12" name="Diagram 11">
+            <a:extLst>
+              <a:ext uri="{FF2B5EF4-FFF2-40B4-BE49-F238E27FC236}">
+                <a16:creationId xmlns:a16="http://schemas.microsoft.com/office/drawing/2014/main" id="{A869848C-75FE-A641-08A0-4A883BD86C5A}"/>
+              </a:ext>
+            </a:extLst>
+          </p:cNvPr>
+          <p:cNvGraphicFramePr/>
+          <p:nvPr>
+            <p:extLst>
+              <p:ext uri="{D42A27DB-BD31-4B8C-83A1-F6EECF244321}">
+                <p14:modId xmlns:p14="http://schemas.microsoft.com/office/powerpoint/2010/main" val="1019878231"/>
+              </p:ext>
+            </p:extLst>
+          </p:nvPr>
+        </p:nvGraphicFramePr>
+        <p:xfrm>
+          <a:off x="5321597" y="0"/>
+          <a:ext cx="6019798" cy="6721475"/>
+        </p:xfrm>
+        <a:graphic>
+          <a:graphicData uri="http://schemas.openxmlformats.org/drawingml/2006/diagram">
+            <dgm:relIds xmlns:dgm="http://schemas.openxmlformats.org/drawingml/2006/diagram" xmlns:r="http://schemas.openxmlformats.org/officeDocument/2006/relationships" r:dm="rId2" r:lo="rId3" r:qs="rId4" r:cs="rId5"/>
+          </a:graphicData>
+        </a:graphic>
+      </p:graphicFrame>
     </p:spTree>
     <p:extLst>
       <p:ext uri="{BB962C8B-B14F-4D97-AF65-F5344CB8AC3E}">
-        <p14:creationId xmlns:p14="http://schemas.microsoft.com/office/powerpoint/2010/main" val="3999592440"/>
+        <p14:creationId xmlns:p14="http://schemas.microsoft.com/office/powerpoint/2010/main" val="2618468705"/>
       </p:ext>
     </p:extLst>
   </p:cSld>
@@ -8138,63 +10681,75 @@
         <p:spPr/>
         <p:txBody>
           <a:bodyPr>
-            <a:normAutofit fontScale="92500" lnSpcReduction="10000"/>
+            <a:normAutofit/>
           </a:bodyPr>
           <a:lstStyle/>
           <a:p>
             <a:r>
               <a:rPr lang="en-US" dirty="0"/>
-              <a:t>Different parts of the graph need different consistency guarantees</a:t>
-            </a:r>
-          </a:p>
-          <a:p>
-            <a:r>
-              <a:rPr lang="en-US" dirty="0"/>
-              <a:t>The structure of the graph can never be inconsistent:</a:t>
+              <a:t>The Graph API provides the user a means to interact with the graph that elides the underlying storage backend or the representation used to store the graph</a:t>
             </a:r>
           </a:p>
           <a:p>
             <a:pPr lvl="1"/>
             <a:r>
               <a:rPr lang="en-US" dirty="0"/>
-              <a:t>Ex: the reverse edge must be atomically created for undirected graphs, an edge can only connect existing nodes</a:t>
-            </a:r>
-          </a:p>
-          <a:p>
+              <a:t>This increases portability of the application code</a:t>
+            </a:r>
+          </a:p>
+          <a:p>
+            <a:pPr lvl="1"/>
+            <a:endParaRPr lang="en-US" dirty="0"/>
+          </a:p>
+          <a:p>
+            <a:r>
+              <a:rPr lang="en-US" dirty="0"/>
+              <a:t>The Graph API must provide methods for:</a:t>
+            </a:r>
+          </a:p>
+          <a:p>
+            <a:pPr lvl="1"/>
+            <a:r>
+              <a:rPr lang="en-US" b="1" dirty="0"/>
+              <a:t>Structural</a:t>
+            </a:r>
+            <a:r>
+              <a:rPr lang="en-US" dirty="0"/>
+              <a:t> manipulation and querying (add/delete nodes and edges, get degrees, get a node’s neighborhood)</a:t>
+            </a:r>
+          </a:p>
+          <a:p>
+            <a:pPr lvl="1"/>
+            <a:r>
+              <a:rPr lang="en-US" b="1" dirty="0">
+                <a:highlight>
+                  <a:srgbClr val="C0C0C0"/>
+                </a:highlight>
+              </a:rPr>
+              <a:t>Property and Label </a:t>
+            </a:r>
             <a:r>
               <a:rPr lang="en-US" dirty="0">
                 <a:highlight>
                   <a:srgbClr val="C0C0C0"/>
                 </a:highlight>
               </a:rPr>
-              <a:t>The properties/Labels of an element must also always be consistent</a:t>
+              <a:t>manipulation and querying (add/query/remove property)</a:t>
             </a:r>
           </a:p>
           <a:p>
             <a:pPr lvl="1"/>
             <a:r>
-              <a:rPr lang="en-US" dirty="0">
-                <a:highlight>
-                  <a:srgbClr val="C0C0C0"/>
-                </a:highlight>
-              </a:rPr>
-              <a:t>Ex: A node cannot exist unlabeled in a property graph</a:t>
-            </a:r>
-          </a:p>
-          <a:p>
-            <a:r>
-              <a:rPr lang="en-US" dirty="0"/>
-              <a:t>The Metadata does not have as strict a consistency requirement</a:t>
-            </a:r>
-          </a:p>
-          <a:p>
-            <a:pPr lvl="1"/>
-            <a:endParaRPr lang="en-US" dirty="0"/>
-          </a:p>
-          <a:p>
-            <a:r>
-              <a:rPr lang="en-US" dirty="0"/>
-              <a:t>Regardless of the needs of each operation, the API must have clearly defined semantics so that an application developer can reason about the code</a:t>
+              <a:rPr lang="en-US" dirty="0"/>
+              <a:t>Adding and retrieving </a:t>
+            </a:r>
+            <a:r>
+              <a:rPr lang="en-US" b="1" dirty="0"/>
+              <a:t>Metadata</a:t>
+            </a:r>
+            <a:r>
+              <a:rPr lang="en-US" dirty="0"/>
+              <a:t> (querying the num nodes/edges, etc.)</a:t>
             </a:r>
           </a:p>
         </p:txBody>
@@ -8231,7 +10786,7 @@
     </p:spTree>
     <p:extLst>
       <p:ext uri="{BB962C8B-B14F-4D97-AF65-F5344CB8AC3E}">
-        <p14:creationId xmlns:p14="http://schemas.microsoft.com/office/powerpoint/2010/main" val="1143028896"/>
+        <p14:creationId xmlns:p14="http://schemas.microsoft.com/office/powerpoint/2010/main" val="3999592440"/>
       </p:ext>
     </p:extLst>
   </p:cSld>
@@ -8263,7 +10818,7 @@
           <p:cNvPr id="2" name="Title 1">
             <a:extLst>
               <a:ext uri="{FF2B5EF4-FFF2-40B4-BE49-F238E27FC236}">
-                <a16:creationId xmlns:a16="http://schemas.microsoft.com/office/drawing/2014/main" id="{4383D214-EBA0-7E92-D642-AEE4C82F77DA}"/>
+                <a16:creationId xmlns:a16="http://schemas.microsoft.com/office/drawing/2014/main" id="{C6ED8DB8-BCA5-F81A-05FD-7072CBCEC692}"/>
               </a:ext>
             </a:extLst>
           </p:cNvPr>
@@ -8281,17 +10836,17 @@
           <a:p>
             <a:r>
               <a:rPr lang="en-US" dirty="0"/>
-              <a:t>Graph API</a:t>
-            </a:r>
-          </a:p>
-        </p:txBody>
-      </p:sp>
-      <p:sp>
-        <p:nvSpPr>
-          <p:cNvPr id="3" name="Content Placeholder 2">
-            <a:extLst>
-              <a:ext uri="{FF2B5EF4-FFF2-40B4-BE49-F238E27FC236}">
-                <a16:creationId xmlns:a16="http://schemas.microsoft.com/office/drawing/2014/main" id="{9DB9C8E9-614B-2810-D188-FC846FB20396}"/>
+              <a:t>4.3.1 Graph API</a:t>
+            </a:r>
+          </a:p>
+        </p:txBody>
+      </p:sp>
+      <p:sp>
+        <p:nvSpPr>
+          <p:cNvPr id="6" name="Content Placeholder 5">
+            <a:extLst>
+              <a:ext uri="{FF2B5EF4-FFF2-40B4-BE49-F238E27FC236}">
+                <a16:creationId xmlns:a16="http://schemas.microsoft.com/office/drawing/2014/main" id="{62395C89-C082-A2EB-62D5-CAEA641F6BF8}"/>
               </a:ext>
             </a:extLst>
           </p:cNvPr>
@@ -8304,35 +10859,74 @@
         </p:nvSpPr>
         <p:spPr/>
         <p:txBody>
-          <a:bodyPr/>
-          <a:lstStyle/>
-          <a:p>
-            <a:r>
-              <a:rPr lang="en-US" dirty="0"/>
-              <a:t>The API must not make assumptions about application semantics</a:t>
+          <a:bodyPr>
+            <a:normAutofit fontScale="92500" lnSpcReduction="10000"/>
+          </a:bodyPr>
+          <a:lstStyle/>
+          <a:p>
+            <a:r>
+              <a:rPr lang="en-US" dirty="0"/>
+              <a:t>Different parts of the graph need different consistency guarantees</a:t>
+            </a:r>
+          </a:p>
+          <a:p>
+            <a:r>
+              <a:rPr lang="en-US" dirty="0"/>
+              <a:t>The structure of the graph can never be inconsistent:</a:t>
             </a:r>
           </a:p>
           <a:p>
             <a:pPr lvl="1"/>
             <a:r>
               <a:rPr lang="en-US" dirty="0"/>
-              <a:t>Return appropriate error codes back to the application and let the application handle failures</a:t>
-            </a:r>
-          </a:p>
-          <a:p>
-            <a:pPr marL="0" indent="0">
-              <a:buNone/>
-            </a:pPr>
+              <a:t>Ex: the reverse edge must be atomically created for undirected graphs, an edge can only connect existing nodes</a:t>
+            </a:r>
+          </a:p>
+          <a:p>
+            <a:r>
+              <a:rPr lang="en-US" dirty="0">
+                <a:highlight>
+                  <a:srgbClr val="C0C0C0"/>
+                </a:highlight>
+              </a:rPr>
+              <a:t>The properties/Labels of an element must also always be consistent</a:t>
+            </a:r>
+          </a:p>
+          <a:p>
+            <a:pPr lvl="1"/>
+            <a:r>
+              <a:rPr lang="en-US" dirty="0">
+                <a:highlight>
+                  <a:srgbClr val="C0C0C0"/>
+                </a:highlight>
+              </a:rPr>
+              <a:t>Ex: A node cannot exist unlabeled in a property graph</a:t>
+            </a:r>
+          </a:p>
+          <a:p>
+            <a:r>
+              <a:rPr lang="en-US" dirty="0"/>
+              <a:t>The Metadata does not have as strict a consistency requirement</a:t>
+            </a:r>
+          </a:p>
+          <a:p>
+            <a:pPr lvl="1"/>
             <a:endParaRPr lang="en-US" dirty="0"/>
           </a:p>
-        </p:txBody>
-      </p:sp>
-      <p:sp>
-        <p:nvSpPr>
-          <p:cNvPr id="4" name="Slide Number Placeholder 3">
-            <a:extLst>
-              <a:ext uri="{FF2B5EF4-FFF2-40B4-BE49-F238E27FC236}">
-                <a16:creationId xmlns:a16="http://schemas.microsoft.com/office/drawing/2014/main" id="{7EC3AF5C-E7CF-985A-92FD-484379419176}"/>
+          <a:p>
+            <a:r>
+              <a:rPr lang="en-US" dirty="0"/>
+              <a:t>Regardless of the needs of each operation, the API must have clearly defined semantics so that an application developer can reason about the code</a:t>
+            </a:r>
+          </a:p>
+        </p:txBody>
+      </p:sp>
+      <p:sp>
+        <p:nvSpPr>
+          <p:cNvPr id="5" name="Slide Number Placeholder 4">
+            <a:extLst>
+              <a:ext uri="{FF2B5EF4-FFF2-40B4-BE49-F238E27FC236}">
+                <a16:creationId xmlns:a16="http://schemas.microsoft.com/office/drawing/2014/main" id="{32207CA5-2ED0-1A0B-BDDA-D9F6E1372CF1}"/>
               </a:ext>
             </a:extLst>
           </p:cNvPr>
@@ -8359,7 +10953,7 @@
     </p:spTree>
     <p:extLst>
       <p:ext uri="{BB962C8B-B14F-4D97-AF65-F5344CB8AC3E}">
-        <p14:creationId xmlns:p14="http://schemas.microsoft.com/office/powerpoint/2010/main" val="3784326058"/>
+        <p14:creationId xmlns:p14="http://schemas.microsoft.com/office/powerpoint/2010/main" val="1143028896"/>
       </p:ext>
     </p:extLst>
   </p:cSld>
@@ -8391,7 +10985,7 @@
           <p:cNvPr id="2" name="Title 1">
             <a:extLst>
               <a:ext uri="{FF2B5EF4-FFF2-40B4-BE49-F238E27FC236}">
-                <a16:creationId xmlns:a16="http://schemas.microsoft.com/office/drawing/2014/main" id="{E7F151B1-BB47-A448-7385-ED464ABE0357}"/>
+                <a16:creationId xmlns:a16="http://schemas.microsoft.com/office/drawing/2014/main" id="{4383D214-EBA0-7E92-D642-AEE4C82F77DA}"/>
               </a:ext>
             </a:extLst>
           </p:cNvPr>
@@ -8409,17 +11003,17 @@
           <a:p>
             <a:r>
               <a:rPr lang="en-US" dirty="0"/>
-              <a:t>4.3.2 Framework for higher level primitives</a:t>
-            </a:r>
-          </a:p>
-        </p:txBody>
-      </p:sp>
-      <p:sp>
-        <p:nvSpPr>
-          <p:cNvPr id="6" name="Content Placeholder 5">
-            <a:extLst>
-              <a:ext uri="{FF2B5EF4-FFF2-40B4-BE49-F238E27FC236}">
-                <a16:creationId xmlns:a16="http://schemas.microsoft.com/office/drawing/2014/main" id="{3FB7E246-1F7B-FDF0-4784-33A90120FD4F}"/>
+              <a:t>Graph API</a:t>
+            </a:r>
+          </a:p>
+        </p:txBody>
+      </p:sp>
+      <p:sp>
+        <p:nvSpPr>
+          <p:cNvPr id="3" name="Content Placeholder 2">
+            <a:extLst>
+              <a:ext uri="{FF2B5EF4-FFF2-40B4-BE49-F238E27FC236}">
+                <a16:creationId xmlns:a16="http://schemas.microsoft.com/office/drawing/2014/main" id="{9DB9C8E9-614B-2810-D188-FC846FB20396}"/>
               </a:ext>
             </a:extLst>
           </p:cNvPr>
@@ -8432,53 +11026,35 @@
         </p:nvSpPr>
         <p:spPr/>
         <p:txBody>
-          <a:bodyPr>
-            <a:normAutofit lnSpcReduction="10000"/>
-          </a:bodyPr>
-          <a:lstStyle/>
-          <a:p>
-            <a:r>
-              <a:rPr lang="en-US" dirty="0"/>
-              <a:t>We saw in Section 3.X and 4.2 that analytics tasks require efficient access to neighborhoods of the graph</a:t>
-            </a:r>
-          </a:p>
-          <a:p>
-            <a:r>
-              <a:rPr lang="en-US" dirty="0"/>
-              <a:t>While the Graph API can find a vertex’s neighborhood, making repeated calls to the API for all nodes is tedious and inefficient</a:t>
-            </a:r>
-          </a:p>
-          <a:p>
-            <a:r>
-              <a:rPr lang="en-US" dirty="0"/>
-              <a:t>Moreover, the user might wish to access the graph in some specific fashion that is inefficiently expressed with the Graph API</a:t>
+          <a:bodyPr/>
+          <a:lstStyle/>
+          <a:p>
+            <a:r>
+              <a:rPr lang="en-US" dirty="0"/>
+              <a:t>The API must not make assumptions about application semantics</a:t>
             </a:r>
           </a:p>
           <a:p>
             <a:pPr lvl="1"/>
             <a:r>
               <a:rPr lang="en-US" dirty="0"/>
-              <a:t>Ex: the user might want to traverse the edges in a Hilbert Order, or she might want to iterate over some motifs in the graph</a:t>
-            </a:r>
-          </a:p>
-          <a:p>
-            <a:pPr lvl="1"/>
+              <a:t>Return appropriate error codes back to the application and let the application handle failures</a:t>
+            </a:r>
+          </a:p>
+          <a:p>
+            <a:pPr marL="0" indent="0">
+              <a:buNone/>
+            </a:pPr>
             <a:endParaRPr lang="en-US" dirty="0"/>
           </a:p>
-          <a:p>
-            <a:r>
-              <a:rPr lang="en-US" dirty="0"/>
-              <a:t>The system must provide a framework to express higher-level traversal primitives for use in graph analytics</a:t>
-            </a:r>
-          </a:p>
-        </p:txBody>
-      </p:sp>
-      <p:sp>
-        <p:nvSpPr>
-          <p:cNvPr id="5" name="Slide Number Placeholder 4">
-            <a:extLst>
-              <a:ext uri="{FF2B5EF4-FFF2-40B4-BE49-F238E27FC236}">
-                <a16:creationId xmlns:a16="http://schemas.microsoft.com/office/drawing/2014/main" id="{4CEE806C-811D-D5DD-A5D1-20B0A843D3C7}"/>
+        </p:txBody>
+      </p:sp>
+      <p:sp>
+        <p:nvSpPr>
+          <p:cNvPr id="4" name="Slide Number Placeholder 3">
+            <a:extLst>
+              <a:ext uri="{FF2B5EF4-FFF2-40B4-BE49-F238E27FC236}">
+                <a16:creationId xmlns:a16="http://schemas.microsoft.com/office/drawing/2014/main" id="{7EC3AF5C-E7CF-985A-92FD-484379419176}"/>
               </a:ext>
             </a:extLst>
           </p:cNvPr>
@@ -8505,7 +11081,7 @@
     </p:spTree>
     <p:extLst>
       <p:ext uri="{BB962C8B-B14F-4D97-AF65-F5344CB8AC3E}">
-        <p14:creationId xmlns:p14="http://schemas.microsoft.com/office/powerpoint/2010/main" val="1379928643"/>
+        <p14:creationId xmlns:p14="http://schemas.microsoft.com/office/powerpoint/2010/main" val="3784326058"/>
       </p:ext>
     </p:extLst>
   </p:cSld>
@@ -8534,10 +11110,10 @@
       </p:grpSpPr>
       <p:sp>
         <p:nvSpPr>
-          <p:cNvPr id="3" name="Content Placeholder 2">
-            <a:extLst>
-              <a:ext uri="{FF2B5EF4-FFF2-40B4-BE49-F238E27FC236}">
-                <a16:creationId xmlns:a16="http://schemas.microsoft.com/office/drawing/2014/main" id="{41F9E2FE-EC4F-68CB-40AC-E8E873D44ED9}"/>
+          <p:cNvPr id="2" name="Title 1">
+            <a:extLst>
+              <a:ext uri="{FF2B5EF4-FFF2-40B4-BE49-F238E27FC236}">
+                <a16:creationId xmlns:a16="http://schemas.microsoft.com/office/drawing/2014/main" id="{E7F151B1-BB47-A448-7385-ED464ABE0357}"/>
               </a:ext>
             </a:extLst>
           </p:cNvPr>
@@ -8545,38 +11121,66 @@
             <a:spLocks noGrp="1"/>
           </p:cNvSpPr>
           <p:nvPr>
+            <p:ph type="title"/>
+          </p:nvPr>
+        </p:nvSpPr>
+        <p:spPr/>
+        <p:txBody>
+          <a:bodyPr/>
+          <a:lstStyle/>
+          <a:p>
+            <a:r>
+              <a:rPr lang="en-US" dirty="0"/>
+              <a:t>4.3.2 Framework for higher level primitives</a:t>
+            </a:r>
+          </a:p>
+        </p:txBody>
+      </p:sp>
+      <p:sp>
+        <p:nvSpPr>
+          <p:cNvPr id="6" name="Content Placeholder 5">
+            <a:extLst>
+              <a:ext uri="{FF2B5EF4-FFF2-40B4-BE49-F238E27FC236}">
+                <a16:creationId xmlns:a16="http://schemas.microsoft.com/office/drawing/2014/main" id="{3FB7E246-1F7B-FDF0-4784-33A90120FD4F}"/>
+              </a:ext>
+            </a:extLst>
+          </p:cNvPr>
+          <p:cNvSpPr>
+            <a:spLocks noGrp="1"/>
+          </p:cNvSpPr>
+          <p:nvPr>
             <p:ph idx="1"/>
           </p:nvPr>
         </p:nvSpPr>
         <p:spPr/>
         <p:txBody>
-          <a:bodyPr/>
-          <a:lstStyle/>
-          <a:p>
-            <a:r>
-              <a:rPr lang="en-US" dirty="0"/>
-              <a:t>Such a framework should at the least provide:</a:t>
+          <a:bodyPr>
+            <a:normAutofit lnSpcReduction="10000"/>
+          </a:bodyPr>
+          <a:lstStyle/>
+          <a:p>
+            <a:r>
+              <a:rPr lang="en-US" dirty="0"/>
+              <a:t>We saw in Section 3.X and 4.2 that analytics tasks require efficient access to neighborhoods of the graph</a:t>
+            </a:r>
+          </a:p>
+          <a:p>
+            <a:r>
+              <a:rPr lang="en-US" dirty="0"/>
+              <a:t>While the Graph API can find a vertex’s neighborhood, making repeated calls to the API for all nodes is tedious and inefficient</a:t>
+            </a:r>
+          </a:p>
+          <a:p>
+            <a:r>
+              <a:rPr lang="en-US" dirty="0"/>
+              <a:t>Moreover, the user might wish to access the graph in some specific fashion that is inefficiently expressed with the Graph API</a:t>
             </a:r>
           </a:p>
           <a:p>
             <a:pPr lvl="1"/>
             <a:r>
               <a:rPr lang="en-US" dirty="0"/>
-              <a:t>Node iterators: to traverse over all nodes in the graph</a:t>
-            </a:r>
-          </a:p>
-          <a:p>
-            <a:pPr lvl="1"/>
-            <a:r>
-              <a:rPr lang="en-US" dirty="0"/>
-              <a:t>Edge iterators: to traverse over all edges in the graph</a:t>
-            </a:r>
-          </a:p>
-          <a:p>
-            <a:pPr lvl="1"/>
-            <a:r>
-              <a:rPr lang="en-US" dirty="0"/>
-              <a:t>Neighborhood Iterators to traverse over the in-and out- neighborhoods of all vertices in the graph</a:t>
+              <a:t>Ex: the user might want to traverse the edges in a Hilbert Order, or she might want to iterate over some motifs in the graph</a:t>
             </a:r>
           </a:p>
           <a:p>
@@ -8585,37 +11189,18 @@
           </a:p>
           <a:p>
             <a:r>
-              <a:rPr lang="en-US" dirty="0">
-                <a:solidFill>
-                  <a:srgbClr val="FF0000"/>
-                </a:solidFill>
-              </a:rPr>
-              <a:t>Additionally, the framework could provide ways to construct more complicated traversal schemes that progress in a certain order or access motifs.</a:t>
-            </a:r>
-          </a:p>
-          <a:p>
-            <a:pPr lvl="1"/>
-            <a:r>
-              <a:rPr lang="en-US" dirty="0">
-                <a:solidFill>
-                  <a:srgbClr val="FF0000"/>
-                </a:solidFill>
-              </a:rPr>
-              <a:t>(Future work)</a:t>
-            </a:r>
-          </a:p>
-          <a:p>
-            <a:pPr lvl="1"/>
-            <a:endParaRPr lang="en-US" dirty="0"/>
-          </a:p>
-        </p:txBody>
-      </p:sp>
-      <p:sp>
-        <p:nvSpPr>
-          <p:cNvPr id="4" name="Slide Number Placeholder 3">
-            <a:extLst>
-              <a:ext uri="{FF2B5EF4-FFF2-40B4-BE49-F238E27FC236}">
-                <a16:creationId xmlns:a16="http://schemas.microsoft.com/office/drawing/2014/main" id="{7AEF4BA3-68D5-73EE-300F-D305DA559399}"/>
+              <a:rPr lang="en-US" dirty="0"/>
+              <a:t>The system must provide a framework to express higher-level traversal primitives for use in graph analytics</a:t>
+            </a:r>
+          </a:p>
+        </p:txBody>
+      </p:sp>
+      <p:sp>
+        <p:nvSpPr>
+          <p:cNvPr id="5" name="Slide Number Placeholder 4">
+            <a:extLst>
+              <a:ext uri="{FF2B5EF4-FFF2-40B4-BE49-F238E27FC236}">
+                <a16:creationId xmlns:a16="http://schemas.microsoft.com/office/drawing/2014/main" id="{4CEE806C-811D-D5DD-A5D1-20B0A843D3C7}"/>
               </a:ext>
             </a:extLst>
           </p:cNvPr>
@@ -8639,38 +11224,10 @@
           </a:p>
         </p:txBody>
       </p:sp>
-      <p:sp>
-        <p:nvSpPr>
-          <p:cNvPr id="5" name="Title 1">
-            <a:extLst>
-              <a:ext uri="{FF2B5EF4-FFF2-40B4-BE49-F238E27FC236}">
-                <a16:creationId xmlns:a16="http://schemas.microsoft.com/office/drawing/2014/main" id="{A8725330-1FFA-FF45-B585-0CD172C925C2}"/>
-              </a:ext>
-            </a:extLst>
-          </p:cNvPr>
-          <p:cNvSpPr>
-            <a:spLocks noGrp="1"/>
-          </p:cNvSpPr>
-          <p:nvPr>
-            <p:ph type="title"/>
-          </p:nvPr>
-        </p:nvSpPr>
-        <p:spPr/>
-        <p:txBody>
-          <a:bodyPr/>
-          <a:lstStyle/>
-          <a:p>
-            <a:r>
-              <a:rPr lang="en-US" dirty="0"/>
-              <a:t>4.3.2 Framework for higher level primitives</a:t>
-            </a:r>
-          </a:p>
-        </p:txBody>
-      </p:sp>
     </p:spTree>
     <p:extLst>
       <p:ext uri="{BB962C8B-B14F-4D97-AF65-F5344CB8AC3E}">
-        <p14:creationId xmlns:p14="http://schemas.microsoft.com/office/powerpoint/2010/main" val="1624814013"/>
+        <p14:creationId xmlns:p14="http://schemas.microsoft.com/office/powerpoint/2010/main" val="1379928643"/>
       </p:ext>
     </p:extLst>
   </p:cSld>
@@ -8699,10 +11256,10 @@
       </p:grpSpPr>
       <p:sp>
         <p:nvSpPr>
-          <p:cNvPr id="2" name="Title 1">
-            <a:extLst>
-              <a:ext uri="{FF2B5EF4-FFF2-40B4-BE49-F238E27FC236}">
-                <a16:creationId xmlns:a16="http://schemas.microsoft.com/office/drawing/2014/main" id="{FE3157BE-9E69-0F72-9F69-831A1E9FB4EF}"/>
+          <p:cNvPr id="3" name="Content Placeholder 2">
+            <a:extLst>
+              <a:ext uri="{FF2B5EF4-FFF2-40B4-BE49-F238E27FC236}">
+                <a16:creationId xmlns:a16="http://schemas.microsoft.com/office/drawing/2014/main" id="{41F9E2FE-EC4F-68CB-40AC-E8E873D44ED9}"/>
               </a:ext>
             </a:extLst>
           </p:cNvPr>
@@ -8710,7 +11267,7 @@
             <a:spLocks noGrp="1"/>
           </p:cNvSpPr>
           <p:nvPr>
-            <p:ph type="title"/>
+            <p:ph idx="1"/>
           </p:nvPr>
         </p:nvSpPr>
         <p:spPr/>
@@ -8720,42 +11277,28 @@
           <a:p>
             <a:r>
               <a:rPr lang="en-US" dirty="0"/>
-              <a:t>4.3.3 Graph Representations</a:t>
-            </a:r>
-          </a:p>
-        </p:txBody>
-      </p:sp>
-      <p:sp>
-        <p:nvSpPr>
-          <p:cNvPr id="6" name="Content Placeholder 5">
-            <a:extLst>
-              <a:ext uri="{FF2B5EF4-FFF2-40B4-BE49-F238E27FC236}">
-                <a16:creationId xmlns:a16="http://schemas.microsoft.com/office/drawing/2014/main" id="{B3C4CE31-8B6E-9DDB-D19D-117F0CD31AE3}"/>
-              </a:ext>
-            </a:extLst>
-          </p:cNvPr>
-          <p:cNvSpPr>
-            <a:spLocks noGrp="1"/>
-          </p:cNvSpPr>
-          <p:nvPr>
-            <p:ph idx="1"/>
-          </p:nvPr>
-        </p:nvSpPr>
-        <p:spPr/>
-        <p:txBody>
-          <a:bodyPr/>
-          <a:lstStyle/>
-          <a:p>
-            <a:r>
-              <a:rPr lang="en-US" dirty="0"/>
-              <a:t>We graph workloads in Sections 2.2,  and the graph representations that suit them in Section 2.3</a:t>
+              <a:t>Such a framework should at the least provide:</a:t>
             </a:r>
           </a:p>
           <a:p>
             <a:pPr lvl="1"/>
             <a:r>
               <a:rPr lang="en-US" dirty="0"/>
-              <a:t>And how most structural graph processing systems use CSR-like or Adjacency List-like representations to store data</a:t>
+              <a:t>Node iterators: to traverse over all nodes in the graph</a:t>
+            </a:r>
+          </a:p>
+          <a:p>
+            <a:pPr lvl="1"/>
+            <a:r>
+              <a:rPr lang="en-US" dirty="0"/>
+              <a:t>Edge iterators: to traverse over all edges in the graph</a:t>
+            </a:r>
+          </a:p>
+          <a:p>
+            <a:pPr lvl="1"/>
+            <a:r>
+              <a:rPr lang="en-US" dirty="0"/>
+              <a:t>Neighborhood Iterators to traverse over the in-and out- neighborhoods of all vertices in the graph</a:t>
             </a:r>
           </a:p>
           <a:p>
@@ -8764,32 +11307,37 @@
           </a:p>
           <a:p>
             <a:r>
-              <a:rPr lang="en-US" dirty="0"/>
-              <a:t>A graph database should be able to persist these data structures in ways that allows for efficient reconstruction and access</a:t>
+              <a:rPr lang="en-US" dirty="0">
+                <a:solidFill>
+                  <a:srgbClr val="FF0000"/>
+                </a:solidFill>
+              </a:rPr>
+              <a:t>Additionally, the framework could provide ways to construct more complicated traversal schemes that progress in a certain order or access motifs.</a:t>
             </a:r>
           </a:p>
           <a:p>
             <a:pPr lvl="1"/>
             <a:r>
-              <a:rPr lang="en-US" dirty="0"/>
-              <a:t>The database designer must figure out how to store them in the underlying storage engine</a:t>
+              <a:rPr lang="en-US" dirty="0">
+                <a:solidFill>
+                  <a:srgbClr val="FF0000"/>
+                </a:solidFill>
+              </a:rPr>
+              <a:t>(Future work)</a:t>
             </a:r>
           </a:p>
           <a:p>
             <a:pPr lvl="1"/>
-            <a:r>
-              <a:rPr lang="en-US" dirty="0"/>
-              <a:t>Should be done in ways that preserves access locality to vertices and neighborhoods</a:t>
-            </a:r>
-          </a:p>
-        </p:txBody>
-      </p:sp>
-      <p:sp>
-        <p:nvSpPr>
-          <p:cNvPr id="5" name="Slide Number Placeholder 4">
-            <a:extLst>
-              <a:ext uri="{FF2B5EF4-FFF2-40B4-BE49-F238E27FC236}">
-                <a16:creationId xmlns:a16="http://schemas.microsoft.com/office/drawing/2014/main" id="{5E0BE154-4BF7-AB40-7DC6-1A93F5FFD885}"/>
+            <a:endParaRPr lang="en-US" dirty="0"/>
+          </a:p>
+        </p:txBody>
+      </p:sp>
+      <p:sp>
+        <p:nvSpPr>
+          <p:cNvPr id="4" name="Slide Number Placeholder 3">
+            <a:extLst>
+              <a:ext uri="{FF2B5EF4-FFF2-40B4-BE49-F238E27FC236}">
+                <a16:creationId xmlns:a16="http://schemas.microsoft.com/office/drawing/2014/main" id="{7AEF4BA3-68D5-73EE-300F-D305DA559399}"/>
               </a:ext>
             </a:extLst>
           </p:cNvPr>
@@ -8813,10 +11361,38 @@
           </a:p>
         </p:txBody>
       </p:sp>
+      <p:sp>
+        <p:nvSpPr>
+          <p:cNvPr id="5" name="Title 1">
+            <a:extLst>
+              <a:ext uri="{FF2B5EF4-FFF2-40B4-BE49-F238E27FC236}">
+                <a16:creationId xmlns:a16="http://schemas.microsoft.com/office/drawing/2014/main" id="{A8725330-1FFA-FF45-B585-0CD172C925C2}"/>
+              </a:ext>
+            </a:extLst>
+          </p:cNvPr>
+          <p:cNvSpPr>
+            <a:spLocks noGrp="1"/>
+          </p:cNvSpPr>
+          <p:nvPr>
+            <p:ph type="title"/>
+          </p:nvPr>
+        </p:nvSpPr>
+        <p:spPr/>
+        <p:txBody>
+          <a:bodyPr/>
+          <a:lstStyle/>
+          <a:p>
+            <a:r>
+              <a:rPr lang="en-US" dirty="0"/>
+              <a:t>4.3.2 Framework for higher level primitives</a:t>
+            </a:r>
+          </a:p>
+        </p:txBody>
+      </p:sp>
     </p:spTree>
     <p:extLst>
       <p:ext uri="{BB962C8B-B14F-4D97-AF65-F5344CB8AC3E}">
-        <p14:creationId xmlns:p14="http://schemas.microsoft.com/office/powerpoint/2010/main" val="1904940507"/>
+        <p14:creationId xmlns:p14="http://schemas.microsoft.com/office/powerpoint/2010/main" val="1624814013"/>
       </p:ext>
     </p:extLst>
   </p:cSld>
@@ -8848,7 +11424,7 @@
           <p:cNvPr id="2" name="Title 1">
             <a:extLst>
               <a:ext uri="{FF2B5EF4-FFF2-40B4-BE49-F238E27FC236}">
-                <a16:creationId xmlns:a16="http://schemas.microsoft.com/office/drawing/2014/main" id="{4CCD228A-BEBE-EDA2-F062-F8582E30FF63}"/>
+                <a16:creationId xmlns:a16="http://schemas.microsoft.com/office/drawing/2014/main" id="{FE3157BE-9E69-0F72-9F69-831A1E9FB4EF}"/>
               </a:ext>
             </a:extLst>
           </p:cNvPr>
@@ -8873,10 +11449,10 @@
       </p:sp>
       <p:sp>
         <p:nvSpPr>
-          <p:cNvPr id="3" name="Content Placeholder 2">
-            <a:extLst>
-              <a:ext uri="{FF2B5EF4-FFF2-40B4-BE49-F238E27FC236}">
-                <a16:creationId xmlns:a16="http://schemas.microsoft.com/office/drawing/2014/main" id="{241F2348-02FC-AE80-98B2-DD85954D6CD3}"/>
+          <p:cNvPr id="6" name="Content Placeholder 5">
+            <a:extLst>
+              <a:ext uri="{FF2B5EF4-FFF2-40B4-BE49-F238E27FC236}">
+                <a16:creationId xmlns:a16="http://schemas.microsoft.com/office/drawing/2014/main" id="{B3C4CE31-8B6E-9DDB-D19D-117F0CD31AE3}"/>
               </a:ext>
             </a:extLst>
           </p:cNvPr>
@@ -8894,21 +11470,14 @@
           <a:p>
             <a:r>
               <a:rPr lang="en-US" dirty="0"/>
-              <a:t>CSR: </a:t>
+              <a:t>We graph workloads in Sections 2.2,  and the graph representations that suit them in Section 2.3</a:t>
             </a:r>
           </a:p>
           <a:p>
             <a:pPr lvl="1"/>
             <a:r>
               <a:rPr lang="en-US" dirty="0"/>
-              <a:t>store the vertex and all the incoming/outgoing edges to/from that vertex sequentially or in the same “chunk”</a:t>
-            </a:r>
-          </a:p>
-          <a:p>
-            <a:pPr lvl="1"/>
-            <a:r>
-              <a:rPr lang="en-US" dirty="0"/>
-              <a:t>Provide an index/search to find where a node begins</a:t>
+              <a:t>And how most structural graph processing systems use CSR-like or Adjacency List-like representations to store data</a:t>
             </a:r>
           </a:p>
           <a:p>
@@ -8918,31 +11487,31 @@
           <a:p>
             <a:r>
               <a:rPr lang="en-US" dirty="0"/>
-              <a:t>Adjacency List:</a:t>
+              <a:t>A graph database should be able to persist these data structures in ways that allows for efficient reconstruction and access</a:t>
             </a:r>
           </a:p>
           <a:p>
             <a:pPr lvl="1"/>
             <a:r>
               <a:rPr lang="en-US" dirty="0"/>
-              <a:t>The neighborhood of each node is materialized and stored inline with the node</a:t>
+              <a:t>The database designer must figure out how to store them in the underlying storage engine</a:t>
             </a:r>
           </a:p>
           <a:p>
             <a:pPr lvl="1"/>
             <a:r>
               <a:rPr lang="en-US" dirty="0"/>
-              <a:t>The nodes can be sequentially laid out in some ordering of their ID</a:t>
-            </a:r>
-          </a:p>
-        </p:txBody>
-      </p:sp>
-      <p:sp>
-        <p:nvSpPr>
-          <p:cNvPr id="4" name="Slide Number Placeholder 3">
-            <a:extLst>
-              <a:ext uri="{FF2B5EF4-FFF2-40B4-BE49-F238E27FC236}">
-                <a16:creationId xmlns:a16="http://schemas.microsoft.com/office/drawing/2014/main" id="{95DEF688-331E-7F80-229C-3AA07A7A44F3}"/>
+              <a:t>Should be done in ways that preserves access locality to vertices and neighborhoods</a:t>
+            </a:r>
+          </a:p>
+        </p:txBody>
+      </p:sp>
+      <p:sp>
+        <p:nvSpPr>
+          <p:cNvPr id="5" name="Slide Number Placeholder 4">
+            <a:extLst>
+              <a:ext uri="{FF2B5EF4-FFF2-40B4-BE49-F238E27FC236}">
+                <a16:creationId xmlns:a16="http://schemas.microsoft.com/office/drawing/2014/main" id="{5E0BE154-4BF7-AB40-7DC6-1A93F5FFD885}"/>
               </a:ext>
             </a:extLst>
           </p:cNvPr>
@@ -8969,7 +11538,7 @@
     </p:spTree>
     <p:extLst>
       <p:ext uri="{BB962C8B-B14F-4D97-AF65-F5344CB8AC3E}">
-        <p14:creationId xmlns:p14="http://schemas.microsoft.com/office/powerpoint/2010/main" val="1259638096"/>
+        <p14:creationId xmlns:p14="http://schemas.microsoft.com/office/powerpoint/2010/main" val="1904940507"/>
       </p:ext>
     </p:extLst>
   </p:cSld>
@@ -9001,7 +11570,7 @@
           <p:cNvPr id="2" name="Title 1">
             <a:extLst>
               <a:ext uri="{FF2B5EF4-FFF2-40B4-BE49-F238E27FC236}">
-                <a16:creationId xmlns:a16="http://schemas.microsoft.com/office/drawing/2014/main" id="{4D64D74A-891A-9455-1853-ABCF9EF9AC25}"/>
+                <a16:creationId xmlns:a16="http://schemas.microsoft.com/office/drawing/2014/main" id="{4CCD228A-BEBE-EDA2-F062-F8582E30FF63}"/>
               </a:ext>
             </a:extLst>
           </p:cNvPr>
@@ -9019,7 +11588,7 @@
           <a:p>
             <a:r>
               <a:rPr lang="en-US" dirty="0"/>
-              <a:t>4.4 Implementation</a:t>
+              <a:t>4.3.3 Graph Representations</a:t>
             </a:r>
           </a:p>
         </p:txBody>
@@ -9029,7 +11598,7 @@
           <p:cNvPr id="3" name="Content Placeholder 2">
             <a:extLst>
               <a:ext uri="{FF2B5EF4-FFF2-40B4-BE49-F238E27FC236}">
-                <a16:creationId xmlns:a16="http://schemas.microsoft.com/office/drawing/2014/main" id="{28543FDC-7DA9-4FC8-CCBD-5598A73D42AB}"/>
+                <a16:creationId xmlns:a16="http://schemas.microsoft.com/office/drawing/2014/main" id="{241F2348-02FC-AE80-98B2-DD85954D6CD3}"/>
               </a:ext>
             </a:extLst>
           </p:cNvPr>
@@ -9047,108 +11616,45 @@
           <a:p>
             <a:r>
               <a:rPr lang="en-US" dirty="0"/>
-              <a:t>Flexograph is a concrete realization of the architecture discussed in section 4.3</a:t>
-            </a:r>
-          </a:p>
-          <a:p>
-            <a:r>
-              <a:rPr lang="en-US" dirty="0"/>
-              <a:t>Our implementation discusses the following aspects:</a:t>
+              <a:t>CSR: </a:t>
             </a:r>
           </a:p>
           <a:p>
             <a:pPr lvl="1"/>
             <a:r>
               <a:rPr lang="en-US" dirty="0"/>
-              <a:t>Our choice of </a:t>
-            </a:r>
-            <a:r>
-              <a:rPr lang="en-US" b="1" dirty="0"/>
-              <a:t>storage engine </a:t>
-            </a:r>
-            <a:r>
-              <a:rPr lang="en-US" dirty="0"/>
-              <a:t>and how its design influences ours</a:t>
+              <a:t>store the vertex and all the incoming/outgoing edges to/from that vertex sequentially or in the same “chunk”</a:t>
             </a:r>
           </a:p>
           <a:p>
             <a:pPr lvl="1"/>
             <a:r>
               <a:rPr lang="en-US" dirty="0"/>
-              <a:t>An example of an application written using our </a:t>
-            </a:r>
-            <a:r>
-              <a:rPr lang="en-US" b="1" dirty="0" err="1"/>
-              <a:t>GraphAPI</a:t>
-            </a:r>
-            <a:endParaRPr lang="en-US" b="1" dirty="0"/>
+              <a:t>Provide an index/search to find where a node begins</a:t>
+            </a:r>
           </a:p>
           <a:p>
             <a:pPr lvl="1"/>
-            <a:r>
-              <a:rPr lang="en-US" dirty="0"/>
-              <a:t>How we store the </a:t>
-            </a:r>
-            <a:r>
-              <a:rPr lang="en-US" b="1" dirty="0"/>
-              <a:t>graph representations </a:t>
-            </a:r>
-            <a:r>
-              <a:rPr lang="en-US" dirty="0"/>
-              <a:t>in our storage engine and how the API facilitates interaction with the data</a:t>
+            <a:endParaRPr lang="en-US" dirty="0"/>
+          </a:p>
+          <a:p>
+            <a:r>
+              <a:rPr lang="en-US" dirty="0"/>
+              <a:t>Adjacency List:</a:t>
             </a:r>
           </a:p>
           <a:p>
             <a:pPr lvl="1"/>
             <a:r>
               <a:rPr lang="en-US" dirty="0"/>
-              <a:t>The higher-level </a:t>
-            </a:r>
-            <a:r>
-              <a:rPr lang="en-US" b="1" dirty="0"/>
-              <a:t>traversal primitives </a:t>
-            </a:r>
-            <a:r>
-              <a:rPr lang="en-US" dirty="0"/>
-              <a:t>that Flexograph supports</a:t>
+              <a:t>The neighborhood of each node is materialized and stored inline with the node</a:t>
             </a:r>
           </a:p>
           <a:p>
             <a:pPr lvl="1"/>
             <a:r>
               <a:rPr lang="en-US" dirty="0"/>
-              <a:t>How we </a:t>
-            </a:r>
-            <a:r>
-              <a:rPr lang="en-US" b="1" dirty="0"/>
-              <a:t>manage</a:t>
-            </a:r>
-            <a:r>
-              <a:rPr lang="en-US" dirty="0"/>
-              <a:t> </a:t>
-            </a:r>
-            <a:r>
-              <a:rPr lang="en-US" b="1" dirty="0"/>
-              <a:t>transient attributes</a:t>
-            </a:r>
-            <a:r>
-              <a:rPr lang="en-US" dirty="0"/>
-              <a:t> generated during an application run</a:t>
-            </a:r>
-          </a:p>
-          <a:p>
-            <a:pPr lvl="1"/>
-            <a:r>
-              <a:rPr lang="en-US" dirty="0"/>
-              <a:t>The design of an efficient </a:t>
-            </a:r>
-            <a:r>
-              <a:rPr lang="en-US" b="1" dirty="0" err="1"/>
-              <a:t>Bulkloader</a:t>
-            </a:r>
-            <a:r>
-              <a:rPr lang="en-US" dirty="0"/>
-              <a:t> to fast-track data ingestion</a:t>
+              <a:t>The nodes can be sequentially laid out in some ordering of their ID</a:t>
             </a:r>
           </a:p>
         </p:txBody>
@@ -9158,7 +11664,7 @@
           <p:cNvPr id="4" name="Slide Number Placeholder 3">
             <a:extLst>
               <a:ext uri="{FF2B5EF4-FFF2-40B4-BE49-F238E27FC236}">
-                <a16:creationId xmlns:a16="http://schemas.microsoft.com/office/drawing/2014/main" id="{30FCA7E3-D5C3-0194-62F7-4C5700696CEC}"/>
+                <a16:creationId xmlns:a16="http://schemas.microsoft.com/office/drawing/2014/main" id="{95DEF688-331E-7F80-229C-3AA07A7A44F3}"/>
               </a:ext>
             </a:extLst>
           </p:cNvPr>
@@ -9185,7 +11691,7 @@
     </p:spTree>
     <p:extLst>
       <p:ext uri="{BB962C8B-B14F-4D97-AF65-F5344CB8AC3E}">
-        <p14:creationId xmlns:p14="http://schemas.microsoft.com/office/powerpoint/2010/main" val="1697816514"/>
+        <p14:creationId xmlns:p14="http://schemas.microsoft.com/office/powerpoint/2010/main" val="1259638096"/>
       </p:ext>
     </p:extLst>
   </p:cSld>
@@ -9217,6 +11723,222 @@
           <p:cNvPr id="2" name="Title 1">
             <a:extLst>
               <a:ext uri="{FF2B5EF4-FFF2-40B4-BE49-F238E27FC236}">
+                <a16:creationId xmlns:a16="http://schemas.microsoft.com/office/drawing/2014/main" id="{4D64D74A-891A-9455-1853-ABCF9EF9AC25}"/>
+              </a:ext>
+            </a:extLst>
+          </p:cNvPr>
+          <p:cNvSpPr>
+            <a:spLocks noGrp="1"/>
+          </p:cNvSpPr>
+          <p:nvPr>
+            <p:ph type="title"/>
+          </p:nvPr>
+        </p:nvSpPr>
+        <p:spPr/>
+        <p:txBody>
+          <a:bodyPr/>
+          <a:lstStyle/>
+          <a:p>
+            <a:r>
+              <a:rPr lang="en-US" dirty="0"/>
+              <a:t>4.4 Implementation</a:t>
+            </a:r>
+          </a:p>
+        </p:txBody>
+      </p:sp>
+      <p:sp>
+        <p:nvSpPr>
+          <p:cNvPr id="3" name="Content Placeholder 2">
+            <a:extLst>
+              <a:ext uri="{FF2B5EF4-FFF2-40B4-BE49-F238E27FC236}">
+                <a16:creationId xmlns:a16="http://schemas.microsoft.com/office/drawing/2014/main" id="{28543FDC-7DA9-4FC8-CCBD-5598A73D42AB}"/>
+              </a:ext>
+            </a:extLst>
+          </p:cNvPr>
+          <p:cNvSpPr>
+            <a:spLocks noGrp="1"/>
+          </p:cNvSpPr>
+          <p:nvPr>
+            <p:ph idx="1"/>
+          </p:nvPr>
+        </p:nvSpPr>
+        <p:spPr/>
+        <p:txBody>
+          <a:bodyPr/>
+          <a:lstStyle/>
+          <a:p>
+            <a:r>
+              <a:rPr lang="en-US" dirty="0"/>
+              <a:t>Flexograph is a concrete realization of the architecture discussed in section 4.3</a:t>
+            </a:r>
+          </a:p>
+          <a:p>
+            <a:r>
+              <a:rPr lang="en-US" dirty="0"/>
+              <a:t>Our implementation discusses the following aspects:</a:t>
+            </a:r>
+          </a:p>
+          <a:p>
+            <a:pPr lvl="1"/>
+            <a:r>
+              <a:rPr lang="en-US" dirty="0"/>
+              <a:t>Our choice of </a:t>
+            </a:r>
+            <a:r>
+              <a:rPr lang="en-US" b="1" dirty="0"/>
+              <a:t>storage engine </a:t>
+            </a:r>
+            <a:r>
+              <a:rPr lang="en-US" dirty="0"/>
+              <a:t>and how its design influences ours</a:t>
+            </a:r>
+          </a:p>
+          <a:p>
+            <a:pPr lvl="1"/>
+            <a:r>
+              <a:rPr lang="en-US" dirty="0"/>
+              <a:t>An example of an application written using our </a:t>
+            </a:r>
+            <a:r>
+              <a:rPr lang="en-US" b="1" dirty="0" err="1"/>
+              <a:t>GraphAPI</a:t>
+            </a:r>
+            <a:endParaRPr lang="en-US" b="1" dirty="0"/>
+          </a:p>
+          <a:p>
+            <a:pPr lvl="1"/>
+            <a:r>
+              <a:rPr lang="en-US" dirty="0"/>
+              <a:t>How we store the </a:t>
+            </a:r>
+            <a:r>
+              <a:rPr lang="en-US" b="1" dirty="0"/>
+              <a:t>graph representations </a:t>
+            </a:r>
+            <a:r>
+              <a:rPr lang="en-US" dirty="0"/>
+              <a:t>in our storage engine and how the API facilitates interaction with the data</a:t>
+            </a:r>
+          </a:p>
+          <a:p>
+            <a:pPr lvl="1"/>
+            <a:r>
+              <a:rPr lang="en-US" dirty="0"/>
+              <a:t>The higher-level </a:t>
+            </a:r>
+            <a:r>
+              <a:rPr lang="en-US" b="1" dirty="0"/>
+              <a:t>traversal primitives </a:t>
+            </a:r>
+            <a:r>
+              <a:rPr lang="en-US" dirty="0"/>
+              <a:t>that Flexograph supports</a:t>
+            </a:r>
+          </a:p>
+          <a:p>
+            <a:pPr lvl="1"/>
+            <a:r>
+              <a:rPr lang="en-US" dirty="0"/>
+              <a:t>How we </a:t>
+            </a:r>
+            <a:r>
+              <a:rPr lang="en-US" b="1" dirty="0"/>
+              <a:t>manage</a:t>
+            </a:r>
+            <a:r>
+              <a:rPr lang="en-US" dirty="0"/>
+              <a:t> </a:t>
+            </a:r>
+            <a:r>
+              <a:rPr lang="en-US" b="1" dirty="0"/>
+              <a:t>transient attributes</a:t>
+            </a:r>
+            <a:r>
+              <a:rPr lang="en-US" dirty="0"/>
+              <a:t> generated during an application run</a:t>
+            </a:r>
+          </a:p>
+          <a:p>
+            <a:pPr lvl="1"/>
+            <a:r>
+              <a:rPr lang="en-US" dirty="0"/>
+              <a:t>The design of an efficient </a:t>
+            </a:r>
+            <a:r>
+              <a:rPr lang="en-US" b="1" dirty="0" err="1"/>
+              <a:t>Bulkloader</a:t>
+            </a:r>
+            <a:r>
+              <a:rPr lang="en-US" dirty="0"/>
+              <a:t> to fast-track data ingestion</a:t>
+            </a:r>
+          </a:p>
+        </p:txBody>
+      </p:sp>
+      <p:sp>
+        <p:nvSpPr>
+          <p:cNvPr id="4" name="Slide Number Placeholder 3">
+            <a:extLst>
+              <a:ext uri="{FF2B5EF4-FFF2-40B4-BE49-F238E27FC236}">
+                <a16:creationId xmlns:a16="http://schemas.microsoft.com/office/drawing/2014/main" id="{30FCA7E3-D5C3-0194-62F7-4C5700696CEC}"/>
+              </a:ext>
+            </a:extLst>
+          </p:cNvPr>
+          <p:cNvSpPr>
+            <a:spLocks noGrp="1"/>
+          </p:cNvSpPr>
+          <p:nvPr>
+            <p:ph type="sldNum" sz="quarter" idx="12"/>
+          </p:nvPr>
+        </p:nvSpPr>
+        <p:spPr/>
+        <p:txBody>
+          <a:bodyPr/>
+          <a:lstStyle/>
+          <a:p>
+            <a:fld id="{EEBEF218-D4C5-B946-BB13-027BCA6FFA2A}" type="slidenum">
+              <a:rPr lang="en-US" smtClean="0"/>
+              <a:t>18</a:t>
+            </a:fld>
+            <a:endParaRPr lang="en-US"/>
+          </a:p>
+        </p:txBody>
+      </p:sp>
+    </p:spTree>
+    <p:extLst>
+      <p:ext uri="{BB962C8B-B14F-4D97-AF65-F5344CB8AC3E}">
+        <p14:creationId xmlns:p14="http://schemas.microsoft.com/office/powerpoint/2010/main" val="1697816514"/>
+      </p:ext>
+    </p:extLst>
+  </p:cSld>
+  <p:clrMapOvr>
+    <a:masterClrMapping/>
+  </p:clrMapOvr>
+</p:sld>
+</file>
+
+<file path=ppt/slides/slide19.xml><?xml version="1.0" encoding="utf-8"?>
+<p:sld xmlns:a="http://schemas.openxmlformats.org/drawingml/2006/main" xmlns:r="http://schemas.openxmlformats.org/officeDocument/2006/relationships" xmlns:p="http://schemas.openxmlformats.org/presentationml/2006/main">
+  <p:cSld>
+    <p:spTree>
+      <p:nvGrpSpPr>
+        <p:cNvPr id="1" name=""/>
+        <p:cNvGrpSpPr/>
+        <p:nvPr/>
+      </p:nvGrpSpPr>
+      <p:grpSpPr>
+        <a:xfrm>
+          <a:off x="0" y="0"/>
+          <a:ext cx="0" cy="0"/>
+          <a:chOff x="0" y="0"/>
+          <a:chExt cx="0" cy="0"/>
+        </a:xfrm>
+      </p:grpSpPr>
+      <p:sp>
+        <p:nvSpPr>
+          <p:cNvPr id="2" name="Title 1">
+            <a:extLst>
+              <a:ext uri="{FF2B5EF4-FFF2-40B4-BE49-F238E27FC236}">
                 <a16:creationId xmlns:a16="http://schemas.microsoft.com/office/drawing/2014/main" id="{399A7746-1533-FA53-E77B-69058BE65A3D}"/>
               </a:ext>
             </a:extLst>
@@ -9294,7 +12016,7 @@
           <a:p>
             <a:fld id="{EEBEF218-D4C5-B946-BB13-027BCA6FFA2A}" type="slidenum">
               <a:rPr lang="en-US" smtClean="0"/>
-              <a:t>18</a:t>
+              <a:t>19</a:t>
             </a:fld>
             <a:endParaRPr lang="en-US"/>
           </a:p>
@@ -9783,189 +12505,6 @@
 </p:sld>
 </file>
 
-<file path=ppt/slides/slide19.xml><?xml version="1.0" encoding="utf-8"?>
-<p:sld xmlns:a="http://schemas.openxmlformats.org/drawingml/2006/main" xmlns:r="http://schemas.openxmlformats.org/officeDocument/2006/relationships" xmlns:p="http://schemas.openxmlformats.org/presentationml/2006/main">
-  <p:cSld>
-    <p:spTree>
-      <p:nvGrpSpPr>
-        <p:cNvPr id="1" name=""/>
-        <p:cNvGrpSpPr/>
-        <p:nvPr/>
-      </p:nvGrpSpPr>
-      <p:grpSpPr>
-        <a:xfrm>
-          <a:off x="0" y="0"/>
-          <a:ext cx="0" cy="0"/>
-          <a:chOff x="0" y="0"/>
-          <a:chExt cx="0" cy="0"/>
-        </a:xfrm>
-      </p:grpSpPr>
-      <p:sp>
-        <p:nvSpPr>
-          <p:cNvPr id="2" name="Title 1">
-            <a:extLst>
-              <a:ext uri="{FF2B5EF4-FFF2-40B4-BE49-F238E27FC236}">
-                <a16:creationId xmlns:a16="http://schemas.microsoft.com/office/drawing/2014/main" id="{8B084EFF-34C7-F280-4ED4-962E0F9A597E}"/>
-              </a:ext>
-            </a:extLst>
-          </p:cNvPr>
-          <p:cNvSpPr>
-            <a:spLocks noGrp="1"/>
-          </p:cNvSpPr>
-          <p:nvPr>
-            <p:ph type="title"/>
-          </p:nvPr>
-        </p:nvSpPr>
-        <p:spPr/>
-        <p:txBody>
-          <a:bodyPr/>
-          <a:lstStyle/>
-          <a:p>
-            <a:r>
-              <a:rPr lang="en-US" dirty="0"/>
-              <a:t>4.4.1 </a:t>
-            </a:r>
-            <a:r>
-              <a:rPr lang="en-US" b="1" dirty="0"/>
-              <a:t>WiredTiger</a:t>
-            </a:r>
-            <a:r>
-              <a:rPr lang="en-US" dirty="0"/>
-              <a:t> makes the World go Round</a:t>
-            </a:r>
-          </a:p>
-        </p:txBody>
-      </p:sp>
-      <p:sp>
-        <p:nvSpPr>
-          <p:cNvPr id="3" name="Content Placeholder 2">
-            <a:extLst>
-              <a:ext uri="{FF2B5EF4-FFF2-40B4-BE49-F238E27FC236}">
-                <a16:creationId xmlns:a16="http://schemas.microsoft.com/office/drawing/2014/main" id="{076E21FB-80DF-E69F-B579-7936BF9A4E30}"/>
-              </a:ext>
-            </a:extLst>
-          </p:cNvPr>
-          <p:cNvSpPr>
-            <a:spLocks noGrp="1"/>
-          </p:cNvSpPr>
-          <p:nvPr>
-            <p:ph idx="1"/>
-          </p:nvPr>
-        </p:nvSpPr>
-        <p:spPr/>
-        <p:txBody>
-          <a:bodyPr>
-            <a:normAutofit lnSpcReduction="10000"/>
-          </a:bodyPr>
-          <a:lstStyle/>
-          <a:p>
-            <a:r>
-              <a:rPr lang="en-US" dirty="0"/>
-              <a:t>We use WiredTiger as our graph storage engine</a:t>
-            </a:r>
-          </a:p>
-          <a:p>
-            <a:pPr lvl="1"/>
-            <a:r>
-              <a:rPr lang="en-US" dirty="0"/>
-              <a:t>Production-ready,</a:t>
-            </a:r>
-          </a:p>
-          <a:p>
-            <a:pPr lvl="1"/>
-            <a:r>
-              <a:rPr lang="en-US" dirty="0"/>
-              <a:t>Excellent multi-threaded read performance – reads are non-blocking (critical since graph workloads are ready heavy)</a:t>
-            </a:r>
-          </a:p>
-          <a:p>
-            <a:pPr lvl="1"/>
-            <a:r>
-              <a:rPr lang="en-US" dirty="0"/>
-              <a:t>ACID compliant and clear semantics for write-write conflicts to same object:</a:t>
-            </a:r>
-          </a:p>
-          <a:p>
-            <a:pPr lvl="2"/>
-            <a:r>
-              <a:rPr lang="en-US" dirty="0"/>
-              <a:t>All but one concurrent writes to the same key will fail</a:t>
-            </a:r>
-          </a:p>
-          <a:p>
-            <a:pPr lvl="2"/>
-            <a:r>
-              <a:rPr lang="en-US" dirty="0"/>
-              <a:t>Mention snapshots</a:t>
-            </a:r>
-          </a:p>
-          <a:p>
-            <a:endParaRPr lang="en-US" dirty="0"/>
-          </a:p>
-          <a:p>
-            <a:r>
-              <a:rPr lang="en-US" dirty="0"/>
-              <a:t>Using a Key-value store allows more flexibility than using a RDBMS:</a:t>
-            </a:r>
-          </a:p>
-          <a:p>
-            <a:pPr lvl="1"/>
-            <a:r>
-              <a:rPr lang="en-US" dirty="0"/>
-              <a:t>Relational Model does not allow flexibility to prototype layouts</a:t>
-            </a:r>
-          </a:p>
-          <a:p>
-            <a:pPr lvl="1"/>
-            <a:r>
-              <a:rPr lang="en-US" strike="sngStrike" dirty="0"/>
-              <a:t>Simpler to prototype things and write custom traversal operators in WT</a:t>
-            </a:r>
-          </a:p>
-        </p:txBody>
-      </p:sp>
-      <p:sp>
-        <p:nvSpPr>
-          <p:cNvPr id="4" name="Slide Number Placeholder 3">
-            <a:extLst>
-              <a:ext uri="{FF2B5EF4-FFF2-40B4-BE49-F238E27FC236}">
-                <a16:creationId xmlns:a16="http://schemas.microsoft.com/office/drawing/2014/main" id="{BBA8E668-1E79-33FC-F611-9F0C5893CB16}"/>
-              </a:ext>
-            </a:extLst>
-          </p:cNvPr>
-          <p:cNvSpPr>
-            <a:spLocks noGrp="1"/>
-          </p:cNvSpPr>
-          <p:nvPr>
-            <p:ph type="sldNum" sz="quarter" idx="12"/>
-          </p:nvPr>
-        </p:nvSpPr>
-        <p:spPr/>
-        <p:txBody>
-          <a:bodyPr/>
-          <a:lstStyle/>
-          <a:p>
-            <a:fld id="{EEBEF218-D4C5-B946-BB13-027BCA6FFA2A}" type="slidenum">
-              <a:rPr lang="en-US" smtClean="0"/>
-              <a:t>19</a:t>
-            </a:fld>
-            <a:endParaRPr lang="en-US"/>
-          </a:p>
-        </p:txBody>
-      </p:sp>
-    </p:spTree>
-    <p:extLst>
-      <p:ext uri="{BB962C8B-B14F-4D97-AF65-F5344CB8AC3E}">
-        <p14:creationId xmlns:p14="http://schemas.microsoft.com/office/powerpoint/2010/main" val="2227981662"/>
-      </p:ext>
-    </p:extLst>
-  </p:cSld>
-  <p:clrMapOvr>
-    <a:masterClrMapping/>
-  </p:clrMapOvr>
-</p:sld>
-</file>
-
 <file path=ppt/slides/slide2.xml><?xml version="1.0" encoding="utf-8"?>
 <p:sld xmlns:a="http://schemas.openxmlformats.org/drawingml/2006/main" xmlns:r="http://schemas.openxmlformats.org/officeDocument/2006/relationships" xmlns:p="http://schemas.openxmlformats.org/presentationml/2006/main">
   <p:cSld>
@@ -10139,7 +12678,7 @@
           <p:cNvPr id="2" name="Title 1">
             <a:extLst>
               <a:ext uri="{FF2B5EF4-FFF2-40B4-BE49-F238E27FC236}">
-                <a16:creationId xmlns:a16="http://schemas.microsoft.com/office/drawing/2014/main" id="{9BB8F56B-6AFB-A3B6-D596-FB8A2C152ED7}"/>
+                <a16:creationId xmlns:a16="http://schemas.microsoft.com/office/drawing/2014/main" id="{8B084EFF-34C7-F280-4ED4-962E0F9A597E}"/>
               </a:ext>
             </a:extLst>
           </p:cNvPr>
@@ -10157,7 +12696,15 @@
           <a:p>
             <a:r>
               <a:rPr lang="en-US" dirty="0"/>
-              <a:t>4.4.1 WiredTiger: Essential Properties</a:t>
+              <a:t>4.4.1 </a:t>
+            </a:r>
+            <a:r>
+              <a:rPr lang="en-US" b="1" dirty="0"/>
+              <a:t>WiredTiger</a:t>
+            </a:r>
+            <a:r>
+              <a:rPr lang="en-US" dirty="0"/>
+              <a:t> makes the World go Round</a:t>
             </a:r>
           </a:p>
         </p:txBody>
@@ -10167,7 +12714,7 @@
           <p:cNvPr id="3" name="Content Placeholder 2">
             <a:extLst>
               <a:ext uri="{FF2B5EF4-FFF2-40B4-BE49-F238E27FC236}">
-                <a16:creationId xmlns:a16="http://schemas.microsoft.com/office/drawing/2014/main" id="{5FB61422-1C2D-7809-32A1-A5B22096C7B4}"/>
+                <a16:creationId xmlns:a16="http://schemas.microsoft.com/office/drawing/2014/main" id="{076E21FB-80DF-E69F-B579-7936BF9A4E30}"/>
               </a:ext>
             </a:extLst>
           </p:cNvPr>
@@ -10181,83 +12728,71 @@
         <p:spPr/>
         <p:txBody>
           <a:bodyPr>
-            <a:normAutofit/>
+            <a:normAutofit lnSpcReduction="10000"/>
           </a:bodyPr>
           <a:lstStyle/>
           <a:p>
             <a:r>
               <a:rPr lang="en-US" dirty="0"/>
-              <a:t>WiredTiger is an </a:t>
-            </a:r>
-            <a:r>
-              <a:rPr lang="en-US" b="1" dirty="0"/>
-              <a:t>embedded</a:t>
-            </a:r>
-            <a:r>
-              <a:rPr lang="en-US" dirty="0"/>
-              <a:t> KV store:</a:t>
+              <a:t>We use WiredTiger as our graph storage engine</a:t>
             </a:r>
           </a:p>
           <a:p>
             <a:pPr lvl="1"/>
             <a:r>
               <a:rPr lang="en-US" dirty="0"/>
-              <a:t>The KV store is part of the application</a:t>
+              <a:t>Production-ready,</a:t>
             </a:r>
           </a:p>
           <a:p>
             <a:pPr lvl="1"/>
             <a:r>
               <a:rPr lang="en-US" dirty="0"/>
-              <a:t>A WT  databases work on a single-process multi-threaded model</a:t>
-            </a:r>
-          </a:p>
-          <a:p>
-            <a:pPr marL="0" indent="0">
-              <a:buNone/>
-            </a:pPr>
+              <a:t>Excellent multi-threaded read performance – reads are non-blocking (critical since graph workloads are ready heavy)</a:t>
+            </a:r>
+          </a:p>
+          <a:p>
+            <a:pPr lvl="1"/>
+            <a:r>
+              <a:rPr lang="en-US" dirty="0"/>
+              <a:t>ACID compliant and clear semantics for write-write conflicts to same object:</a:t>
+            </a:r>
+          </a:p>
+          <a:p>
+            <a:pPr lvl="2"/>
+            <a:r>
+              <a:rPr lang="en-US" dirty="0"/>
+              <a:t>All but one concurrent writes to the same key will fail</a:t>
+            </a:r>
+          </a:p>
+          <a:p>
+            <a:pPr lvl="2"/>
+            <a:r>
+              <a:rPr lang="en-US" dirty="0"/>
+              <a:t>Mention snapshots</a:t>
+            </a:r>
+          </a:p>
+          <a:p>
             <a:endParaRPr lang="en-US" dirty="0"/>
           </a:p>
           <a:p>
             <a:r>
               <a:rPr lang="en-US" dirty="0"/>
-              <a:t>The WT API requires a single connection to the database (</a:t>
-            </a:r>
-            <a:r>
-              <a:rPr lang="en-US" b="1" dirty="0"/>
-              <a:t>WT_CONNECTION </a:t>
-            </a:r>
-            <a:r>
-              <a:rPr lang="en-US" dirty="0"/>
-              <a:t>object)</a:t>
+              <a:t>Using a Key-value store allows more flexibility than using a RDBMS:</a:t>
             </a:r>
           </a:p>
           <a:p>
             <a:pPr lvl="1"/>
             <a:r>
               <a:rPr lang="en-US" dirty="0"/>
-              <a:t>Thread safe</a:t>
-            </a:r>
-          </a:p>
-          <a:p>
-            <a:r>
-              <a:rPr lang="en-US" dirty="0"/>
-              <a:t>A Session object encapsulates the transactional context of data operations (</a:t>
-            </a:r>
-            <a:r>
-              <a:rPr lang="en-US" b="1" dirty="0"/>
-              <a:t>WT_SESSION </a:t>
-            </a:r>
-            <a:r>
-              <a:rPr lang="en-US" dirty="0"/>
-              <a:t>object)</a:t>
+              <a:t>Relational Model does not allow flexibility to prototype layouts</a:t>
             </a:r>
           </a:p>
           <a:p>
             <a:pPr lvl="1"/>
             <a:r>
-              <a:rPr lang="en-US" dirty="0"/>
-              <a:t>WT_SESSION methods are not thread safe</a:t>
+              <a:rPr lang="en-US" strike="sngStrike" dirty="0"/>
+              <a:t>Simpler to prototype things and write custom traversal operators in WT</a:t>
             </a:r>
           </a:p>
         </p:txBody>
@@ -10267,7 +12802,7 @@
           <p:cNvPr id="4" name="Slide Number Placeholder 3">
             <a:extLst>
               <a:ext uri="{FF2B5EF4-FFF2-40B4-BE49-F238E27FC236}">
-                <a16:creationId xmlns:a16="http://schemas.microsoft.com/office/drawing/2014/main" id="{8E850DC0-A5AD-46BD-5FFC-CDA74DD5CA18}"/>
+                <a16:creationId xmlns:a16="http://schemas.microsoft.com/office/drawing/2014/main" id="{BBA8E668-1E79-33FC-F611-9F0C5893CB16}"/>
               </a:ext>
             </a:extLst>
           </p:cNvPr>
@@ -10294,7 +12829,7 @@
     </p:spTree>
     <p:extLst>
       <p:ext uri="{BB962C8B-B14F-4D97-AF65-F5344CB8AC3E}">
-        <p14:creationId xmlns:p14="http://schemas.microsoft.com/office/powerpoint/2010/main" val="1462960366"/>
+        <p14:creationId xmlns:p14="http://schemas.microsoft.com/office/powerpoint/2010/main" val="2227981662"/>
       </p:ext>
     </p:extLst>
   </p:cSld>
@@ -10337,6 +12872,193 @@
             <p:ph type="title"/>
           </p:nvPr>
         </p:nvSpPr>
+        <p:spPr/>
+        <p:txBody>
+          <a:bodyPr/>
+          <a:lstStyle/>
+          <a:p>
+            <a:r>
+              <a:rPr lang="en-US" dirty="0"/>
+              <a:t>4.4.1 WiredTiger: Essential Properties</a:t>
+            </a:r>
+          </a:p>
+        </p:txBody>
+      </p:sp>
+      <p:sp>
+        <p:nvSpPr>
+          <p:cNvPr id="3" name="Content Placeholder 2">
+            <a:extLst>
+              <a:ext uri="{FF2B5EF4-FFF2-40B4-BE49-F238E27FC236}">
+                <a16:creationId xmlns:a16="http://schemas.microsoft.com/office/drawing/2014/main" id="{5FB61422-1C2D-7809-32A1-A5B22096C7B4}"/>
+              </a:ext>
+            </a:extLst>
+          </p:cNvPr>
+          <p:cNvSpPr>
+            <a:spLocks noGrp="1"/>
+          </p:cNvSpPr>
+          <p:nvPr>
+            <p:ph idx="1"/>
+          </p:nvPr>
+        </p:nvSpPr>
+        <p:spPr/>
+        <p:txBody>
+          <a:bodyPr>
+            <a:normAutofit/>
+          </a:bodyPr>
+          <a:lstStyle/>
+          <a:p>
+            <a:r>
+              <a:rPr lang="en-US" dirty="0"/>
+              <a:t>WiredTiger is an </a:t>
+            </a:r>
+            <a:r>
+              <a:rPr lang="en-US" b="1" dirty="0"/>
+              <a:t>embedded</a:t>
+            </a:r>
+            <a:r>
+              <a:rPr lang="en-US" dirty="0"/>
+              <a:t> KV store:</a:t>
+            </a:r>
+          </a:p>
+          <a:p>
+            <a:pPr lvl="1"/>
+            <a:r>
+              <a:rPr lang="en-US" dirty="0"/>
+              <a:t>The KV store is part of the application</a:t>
+            </a:r>
+          </a:p>
+          <a:p>
+            <a:pPr lvl="1"/>
+            <a:r>
+              <a:rPr lang="en-US" dirty="0"/>
+              <a:t>A WT  databases work on a single-process multi-threaded model</a:t>
+            </a:r>
+          </a:p>
+          <a:p>
+            <a:pPr marL="0" indent="0">
+              <a:buNone/>
+            </a:pPr>
+            <a:endParaRPr lang="en-US" dirty="0"/>
+          </a:p>
+          <a:p>
+            <a:r>
+              <a:rPr lang="en-US" dirty="0"/>
+              <a:t>The WT API requires a single connection to the database (</a:t>
+            </a:r>
+            <a:r>
+              <a:rPr lang="en-US" b="1" dirty="0"/>
+              <a:t>WT_CONNECTION </a:t>
+            </a:r>
+            <a:r>
+              <a:rPr lang="en-US" dirty="0"/>
+              <a:t>object)</a:t>
+            </a:r>
+          </a:p>
+          <a:p>
+            <a:pPr lvl="1"/>
+            <a:r>
+              <a:rPr lang="en-US" dirty="0"/>
+              <a:t>Thread safe</a:t>
+            </a:r>
+          </a:p>
+          <a:p>
+            <a:r>
+              <a:rPr lang="en-US" dirty="0"/>
+              <a:t>A Session object encapsulates the transactional context of data operations (</a:t>
+            </a:r>
+            <a:r>
+              <a:rPr lang="en-US" b="1" dirty="0"/>
+              <a:t>WT_SESSION </a:t>
+            </a:r>
+            <a:r>
+              <a:rPr lang="en-US" dirty="0"/>
+              <a:t>object)</a:t>
+            </a:r>
+          </a:p>
+          <a:p>
+            <a:pPr lvl="1"/>
+            <a:r>
+              <a:rPr lang="en-US" dirty="0"/>
+              <a:t>WT_SESSION methods are not thread safe</a:t>
+            </a:r>
+          </a:p>
+        </p:txBody>
+      </p:sp>
+      <p:sp>
+        <p:nvSpPr>
+          <p:cNvPr id="4" name="Slide Number Placeholder 3">
+            <a:extLst>
+              <a:ext uri="{FF2B5EF4-FFF2-40B4-BE49-F238E27FC236}">
+                <a16:creationId xmlns:a16="http://schemas.microsoft.com/office/drawing/2014/main" id="{8E850DC0-A5AD-46BD-5FFC-CDA74DD5CA18}"/>
+              </a:ext>
+            </a:extLst>
+          </p:cNvPr>
+          <p:cNvSpPr>
+            <a:spLocks noGrp="1"/>
+          </p:cNvSpPr>
+          <p:nvPr>
+            <p:ph type="sldNum" sz="quarter" idx="12"/>
+          </p:nvPr>
+        </p:nvSpPr>
+        <p:spPr/>
+        <p:txBody>
+          <a:bodyPr/>
+          <a:lstStyle/>
+          <a:p>
+            <a:fld id="{EEBEF218-D4C5-B946-BB13-027BCA6FFA2A}" type="slidenum">
+              <a:rPr lang="en-US" smtClean="0"/>
+              <a:t>21</a:t>
+            </a:fld>
+            <a:endParaRPr lang="en-US"/>
+          </a:p>
+        </p:txBody>
+      </p:sp>
+    </p:spTree>
+    <p:extLst>
+      <p:ext uri="{BB962C8B-B14F-4D97-AF65-F5344CB8AC3E}">
+        <p14:creationId xmlns:p14="http://schemas.microsoft.com/office/powerpoint/2010/main" val="1462960366"/>
+      </p:ext>
+    </p:extLst>
+  </p:cSld>
+  <p:clrMapOvr>
+    <a:masterClrMapping/>
+  </p:clrMapOvr>
+</p:sld>
+</file>
+
+<file path=ppt/slides/slide22.xml><?xml version="1.0" encoding="utf-8"?>
+<p:sld xmlns:a="http://schemas.openxmlformats.org/drawingml/2006/main" xmlns:r="http://schemas.openxmlformats.org/officeDocument/2006/relationships" xmlns:p="http://schemas.openxmlformats.org/presentationml/2006/main">
+  <p:cSld>
+    <p:spTree>
+      <p:nvGrpSpPr>
+        <p:cNvPr id="1" name=""/>
+        <p:cNvGrpSpPr/>
+        <p:nvPr/>
+      </p:nvGrpSpPr>
+      <p:grpSpPr>
+        <a:xfrm>
+          <a:off x="0" y="0"/>
+          <a:ext cx="0" cy="0"/>
+          <a:chOff x="0" y="0"/>
+          <a:chExt cx="0" cy="0"/>
+        </a:xfrm>
+      </p:grpSpPr>
+      <p:sp>
+        <p:nvSpPr>
+          <p:cNvPr id="2" name="Title 1">
+            <a:extLst>
+              <a:ext uri="{FF2B5EF4-FFF2-40B4-BE49-F238E27FC236}">
+                <a16:creationId xmlns:a16="http://schemas.microsoft.com/office/drawing/2014/main" id="{9BB8F56B-6AFB-A3B6-D596-FB8A2C152ED7}"/>
+              </a:ext>
+            </a:extLst>
+          </p:cNvPr>
+          <p:cNvSpPr>
+            <a:spLocks noGrp="1"/>
+          </p:cNvSpPr>
+          <p:nvPr>
+            <p:ph type="title"/>
+          </p:nvPr>
+        </p:nvSpPr>
         <p:spPr>
           <a:xfrm>
             <a:off x="838200" y="365125"/>
@@ -10444,7 +13166,7 @@
           <a:p>
             <a:fld id="{EEBEF218-D4C5-B946-BB13-027BCA6FFA2A}" type="slidenum">
               <a:rPr lang="en-US" smtClean="0"/>
-              <a:t>21</a:t>
+              <a:t>22</a:t>
             </a:fld>
             <a:endParaRPr lang="en-US"/>
           </a:p>
@@ -11177,155 +13899,6 @@
 </p:sld>
 </file>
 
-<file path=ppt/slides/slide22.xml><?xml version="1.0" encoding="utf-8"?>
-<p:sld xmlns:a="http://schemas.openxmlformats.org/drawingml/2006/main" xmlns:r="http://schemas.openxmlformats.org/officeDocument/2006/relationships" xmlns:p="http://schemas.openxmlformats.org/presentationml/2006/main">
-  <p:cSld>
-    <p:spTree>
-      <p:nvGrpSpPr>
-        <p:cNvPr id="1" name=""/>
-        <p:cNvGrpSpPr/>
-        <p:nvPr/>
-      </p:nvGrpSpPr>
-      <p:grpSpPr>
-        <a:xfrm>
-          <a:off x="0" y="0"/>
-          <a:ext cx="0" cy="0"/>
-          <a:chOff x="0" y="0"/>
-          <a:chExt cx="0" cy="0"/>
-        </a:xfrm>
-      </p:grpSpPr>
-      <p:sp>
-        <p:nvSpPr>
-          <p:cNvPr id="2" name="Title 1">
-            <a:extLst>
-              <a:ext uri="{FF2B5EF4-FFF2-40B4-BE49-F238E27FC236}">
-                <a16:creationId xmlns:a16="http://schemas.microsoft.com/office/drawing/2014/main" id="{9BB8F56B-6AFB-A3B6-D596-FB8A2C152ED7}"/>
-              </a:ext>
-            </a:extLst>
-          </p:cNvPr>
-          <p:cNvSpPr>
-            <a:spLocks noGrp="1"/>
-          </p:cNvSpPr>
-          <p:nvPr>
-            <p:ph type="title"/>
-          </p:nvPr>
-        </p:nvSpPr>
-        <p:spPr/>
-        <p:txBody>
-          <a:bodyPr/>
-          <a:lstStyle/>
-          <a:p>
-            <a:r>
-              <a:rPr lang="en-US" dirty="0"/>
-              <a:t>4.4.1 WiredTiger: Essential Properties</a:t>
-            </a:r>
-          </a:p>
-        </p:txBody>
-      </p:sp>
-      <p:sp>
-        <p:nvSpPr>
-          <p:cNvPr id="5" name="Content Placeholder 4">
-            <a:extLst>
-              <a:ext uri="{FF2B5EF4-FFF2-40B4-BE49-F238E27FC236}">
-                <a16:creationId xmlns:a16="http://schemas.microsoft.com/office/drawing/2014/main" id="{7D110086-2E79-58D2-D1D3-596A9BEA057E}"/>
-              </a:ext>
-            </a:extLst>
-          </p:cNvPr>
-          <p:cNvSpPr>
-            <a:spLocks noGrp="1"/>
-          </p:cNvSpPr>
-          <p:nvPr>
-            <p:ph idx="1"/>
-          </p:nvPr>
-        </p:nvSpPr>
-        <p:spPr/>
-        <p:txBody>
-          <a:bodyPr/>
-          <a:lstStyle/>
-          <a:p>
-            <a:r>
-              <a:rPr lang="en-US" dirty="0"/>
-              <a:t>WiredTiger supports both row-stores and column stores</a:t>
-            </a:r>
-          </a:p>
-          <a:p>
-            <a:pPr lvl="1"/>
-            <a:r>
-              <a:rPr lang="en-US" dirty="0"/>
-              <a:t>Traditional row-based storage is inefficient when we are primarily interested only in a small subset of properties</a:t>
-            </a:r>
-          </a:p>
-          <a:p>
-            <a:pPr lvl="1"/>
-            <a:r>
-              <a:rPr lang="en-US" dirty="0"/>
-              <a:t>Column groups define groups of columns (properties) to be stored in a separate file</a:t>
-            </a:r>
-          </a:p>
-          <a:p>
-            <a:pPr lvl="1"/>
-            <a:r>
-              <a:rPr lang="en-US" dirty="0"/>
-              <a:t>The same key can be used to access the row store and column group entry</a:t>
-            </a:r>
-          </a:p>
-          <a:p>
-            <a:r>
-              <a:rPr lang="en-US" dirty="0"/>
-              <a:t>Using column groups can significantly improve cache behavior by only reading WT files containing columns needed by the query</a:t>
-            </a:r>
-          </a:p>
-          <a:p>
-            <a:pPr lvl="1"/>
-            <a:r>
-              <a:rPr lang="en-US" dirty="0"/>
-              <a:t>Especially critical in property graphs where nodes and edges can have arbitrary number of properties</a:t>
-            </a:r>
-          </a:p>
-        </p:txBody>
-      </p:sp>
-      <p:sp>
-        <p:nvSpPr>
-          <p:cNvPr id="4" name="Slide Number Placeholder 3">
-            <a:extLst>
-              <a:ext uri="{FF2B5EF4-FFF2-40B4-BE49-F238E27FC236}">
-                <a16:creationId xmlns:a16="http://schemas.microsoft.com/office/drawing/2014/main" id="{8E850DC0-A5AD-46BD-5FFC-CDA74DD5CA18}"/>
-              </a:ext>
-            </a:extLst>
-          </p:cNvPr>
-          <p:cNvSpPr>
-            <a:spLocks noGrp="1"/>
-          </p:cNvSpPr>
-          <p:nvPr>
-            <p:ph type="sldNum" sz="quarter" idx="12"/>
-          </p:nvPr>
-        </p:nvSpPr>
-        <p:spPr/>
-        <p:txBody>
-          <a:bodyPr/>
-          <a:lstStyle/>
-          <a:p>
-            <a:fld id="{EEBEF218-D4C5-B946-BB13-027BCA6FFA2A}" type="slidenum">
-              <a:rPr lang="en-US" smtClean="0"/>
-              <a:t>22</a:t>
-            </a:fld>
-            <a:endParaRPr lang="en-US"/>
-          </a:p>
-        </p:txBody>
-      </p:sp>
-    </p:spTree>
-    <p:extLst>
-      <p:ext uri="{BB962C8B-B14F-4D97-AF65-F5344CB8AC3E}">
-        <p14:creationId xmlns:p14="http://schemas.microsoft.com/office/powerpoint/2010/main" val="3327137589"/>
-      </p:ext>
-    </p:extLst>
-  </p:cSld>
-  <p:clrMapOvr>
-    <a:masterClrMapping/>
-  </p:clrMapOvr>
-</p:sld>
-</file>
-
 <file path=ppt/slides/slide23.xml><?xml version="1.0" encoding="utf-8"?>
 <p:sld xmlns:a="http://schemas.openxmlformats.org/drawingml/2006/main" xmlns:r="http://schemas.openxmlformats.org/officeDocument/2006/relationships" xmlns:p="http://schemas.openxmlformats.org/presentationml/2006/main">
   <p:cSld>
@@ -11348,6 +13921,155 @@
           <p:cNvPr id="2" name="Title 1">
             <a:extLst>
               <a:ext uri="{FF2B5EF4-FFF2-40B4-BE49-F238E27FC236}">
+                <a16:creationId xmlns:a16="http://schemas.microsoft.com/office/drawing/2014/main" id="{9BB8F56B-6AFB-A3B6-D596-FB8A2C152ED7}"/>
+              </a:ext>
+            </a:extLst>
+          </p:cNvPr>
+          <p:cNvSpPr>
+            <a:spLocks noGrp="1"/>
+          </p:cNvSpPr>
+          <p:nvPr>
+            <p:ph type="title"/>
+          </p:nvPr>
+        </p:nvSpPr>
+        <p:spPr/>
+        <p:txBody>
+          <a:bodyPr/>
+          <a:lstStyle/>
+          <a:p>
+            <a:r>
+              <a:rPr lang="en-US" dirty="0"/>
+              <a:t>4.4.1 WiredTiger: Essential Properties</a:t>
+            </a:r>
+          </a:p>
+        </p:txBody>
+      </p:sp>
+      <p:sp>
+        <p:nvSpPr>
+          <p:cNvPr id="5" name="Content Placeholder 4">
+            <a:extLst>
+              <a:ext uri="{FF2B5EF4-FFF2-40B4-BE49-F238E27FC236}">
+                <a16:creationId xmlns:a16="http://schemas.microsoft.com/office/drawing/2014/main" id="{7D110086-2E79-58D2-D1D3-596A9BEA057E}"/>
+              </a:ext>
+            </a:extLst>
+          </p:cNvPr>
+          <p:cNvSpPr>
+            <a:spLocks noGrp="1"/>
+          </p:cNvSpPr>
+          <p:nvPr>
+            <p:ph idx="1"/>
+          </p:nvPr>
+        </p:nvSpPr>
+        <p:spPr/>
+        <p:txBody>
+          <a:bodyPr/>
+          <a:lstStyle/>
+          <a:p>
+            <a:r>
+              <a:rPr lang="en-US" dirty="0"/>
+              <a:t>WiredTiger supports both row-stores and column stores</a:t>
+            </a:r>
+          </a:p>
+          <a:p>
+            <a:pPr lvl="1"/>
+            <a:r>
+              <a:rPr lang="en-US" dirty="0"/>
+              <a:t>Traditional row-based storage is inefficient when we are primarily interested only in a small subset of properties</a:t>
+            </a:r>
+          </a:p>
+          <a:p>
+            <a:pPr lvl="1"/>
+            <a:r>
+              <a:rPr lang="en-US" dirty="0"/>
+              <a:t>Column groups define groups of columns (properties) to be stored in a separate file</a:t>
+            </a:r>
+          </a:p>
+          <a:p>
+            <a:pPr lvl="1"/>
+            <a:r>
+              <a:rPr lang="en-US" dirty="0"/>
+              <a:t>The same key can be used to access the row store and column group entry</a:t>
+            </a:r>
+          </a:p>
+          <a:p>
+            <a:r>
+              <a:rPr lang="en-US" dirty="0"/>
+              <a:t>Using column groups can significantly improve cache behavior by only reading WT files containing columns needed by the query</a:t>
+            </a:r>
+          </a:p>
+          <a:p>
+            <a:pPr lvl="1"/>
+            <a:r>
+              <a:rPr lang="en-US" dirty="0"/>
+              <a:t>Especially critical in property graphs where nodes and edges can have arbitrary number of properties</a:t>
+            </a:r>
+          </a:p>
+        </p:txBody>
+      </p:sp>
+      <p:sp>
+        <p:nvSpPr>
+          <p:cNvPr id="4" name="Slide Number Placeholder 3">
+            <a:extLst>
+              <a:ext uri="{FF2B5EF4-FFF2-40B4-BE49-F238E27FC236}">
+                <a16:creationId xmlns:a16="http://schemas.microsoft.com/office/drawing/2014/main" id="{8E850DC0-A5AD-46BD-5FFC-CDA74DD5CA18}"/>
+              </a:ext>
+            </a:extLst>
+          </p:cNvPr>
+          <p:cNvSpPr>
+            <a:spLocks noGrp="1"/>
+          </p:cNvSpPr>
+          <p:nvPr>
+            <p:ph type="sldNum" sz="quarter" idx="12"/>
+          </p:nvPr>
+        </p:nvSpPr>
+        <p:spPr/>
+        <p:txBody>
+          <a:bodyPr/>
+          <a:lstStyle/>
+          <a:p>
+            <a:fld id="{EEBEF218-D4C5-B946-BB13-027BCA6FFA2A}" type="slidenum">
+              <a:rPr lang="en-US" smtClean="0"/>
+              <a:t>23</a:t>
+            </a:fld>
+            <a:endParaRPr lang="en-US"/>
+          </a:p>
+        </p:txBody>
+      </p:sp>
+    </p:spTree>
+    <p:extLst>
+      <p:ext uri="{BB962C8B-B14F-4D97-AF65-F5344CB8AC3E}">
+        <p14:creationId xmlns:p14="http://schemas.microsoft.com/office/powerpoint/2010/main" val="3327137589"/>
+      </p:ext>
+    </p:extLst>
+  </p:cSld>
+  <p:clrMapOvr>
+    <a:masterClrMapping/>
+  </p:clrMapOvr>
+</p:sld>
+</file>
+
+<file path=ppt/slides/slide24.xml><?xml version="1.0" encoding="utf-8"?>
+<p:sld xmlns:a="http://schemas.openxmlformats.org/drawingml/2006/main" xmlns:r="http://schemas.openxmlformats.org/officeDocument/2006/relationships" xmlns:p="http://schemas.openxmlformats.org/presentationml/2006/main">
+  <p:cSld>
+    <p:spTree>
+      <p:nvGrpSpPr>
+        <p:cNvPr id="1" name=""/>
+        <p:cNvGrpSpPr/>
+        <p:nvPr/>
+      </p:nvGrpSpPr>
+      <p:grpSpPr>
+        <a:xfrm>
+          <a:off x="0" y="0"/>
+          <a:ext cx="0" cy="0"/>
+          <a:chOff x="0" y="0"/>
+          <a:chExt cx="0" cy="0"/>
+        </a:xfrm>
+      </p:grpSpPr>
+      <p:sp>
+        <p:nvSpPr>
+          <p:cNvPr id="2" name="Title 1">
+            <a:extLst>
+              <a:ext uri="{FF2B5EF4-FFF2-40B4-BE49-F238E27FC236}">
                 <a16:creationId xmlns:a16="http://schemas.microsoft.com/office/drawing/2014/main" id="{2CC969B0-9A49-F9F3-2198-FC943B857CCE}"/>
               </a:ext>
             </a:extLst>
@@ -11493,7 +14215,7 @@
           <a:p>
             <a:fld id="{EEBEF218-D4C5-B946-BB13-027BCA6FFA2A}" type="slidenum">
               <a:rPr lang="en-US" smtClean="0"/>
-              <a:t>23</a:t>
+              <a:t>24</a:t>
             </a:fld>
             <a:endParaRPr lang="en-US"/>
           </a:p>
@@ -11942,7 +14664,7 @@
 </p:sld>
 </file>
 
-<file path=ppt/slides/slide24.xml><?xml version="1.0" encoding="utf-8"?>
+<file path=ppt/slides/slide25.xml><?xml version="1.0" encoding="utf-8"?>
 <p:sld xmlns:a="http://schemas.openxmlformats.org/drawingml/2006/main" xmlns:r="http://schemas.openxmlformats.org/officeDocument/2006/relationships" xmlns:p="http://schemas.openxmlformats.org/presentationml/2006/main">
   <p:cSld>
     <p:spTree>
@@ -12047,7 +14769,7 @@
           <a:p>
             <a:fld id="{EEBEF218-D4C5-B946-BB13-027BCA6FFA2A}" type="slidenum">
               <a:rPr lang="en-US" smtClean="0"/>
-              <a:t>24</a:t>
+              <a:t>25</a:t>
             </a:fld>
             <a:endParaRPr lang="en-US"/>
           </a:p>
@@ -12635,7 +15357,7 @@
 </p:sld>
 </file>
 
-<file path=ppt/slides/slide25.xml><?xml version="1.0" encoding="utf-8"?>
+<file path=ppt/slides/slide26.xml><?xml version="1.0" encoding="utf-8"?>
 <p:sld xmlns:a="http://schemas.openxmlformats.org/drawingml/2006/main" xmlns:r="http://schemas.openxmlformats.org/officeDocument/2006/relationships" xmlns:p="http://schemas.openxmlformats.org/presentationml/2006/main">
   <p:cSld>
     <p:spTree>
@@ -12708,7 +15430,7 @@
           <a:p>
             <a:fld id="{EEBEF218-D4C5-B946-BB13-027BCA6FFA2A}" type="slidenum">
               <a:rPr lang="en-US" smtClean="0"/>
-              <a:t>25</a:t>
+              <a:t>26</a:t>
             </a:fld>
             <a:endParaRPr lang="en-US"/>
           </a:p>
@@ -13410,160 +16132,6 @@
 </p:sld>
 </file>
 
-<file path=ppt/slides/slide26.xml><?xml version="1.0" encoding="utf-8"?>
-<p:sld xmlns:a="http://schemas.openxmlformats.org/drawingml/2006/main" xmlns:r="http://schemas.openxmlformats.org/officeDocument/2006/relationships" xmlns:p="http://schemas.openxmlformats.org/presentationml/2006/main">
-  <p:cSld>
-    <p:spTree>
-      <p:nvGrpSpPr>
-        <p:cNvPr id="1" name=""/>
-        <p:cNvGrpSpPr/>
-        <p:nvPr/>
-      </p:nvGrpSpPr>
-      <p:grpSpPr>
-        <a:xfrm>
-          <a:off x="0" y="0"/>
-          <a:ext cx="0" cy="0"/>
-          <a:chOff x="0" y="0"/>
-          <a:chExt cx="0" cy="0"/>
-        </a:xfrm>
-      </p:grpSpPr>
-      <p:sp>
-        <p:nvSpPr>
-          <p:cNvPr id="2" name="Title 1">
-            <a:extLst>
-              <a:ext uri="{FF2B5EF4-FFF2-40B4-BE49-F238E27FC236}">
-                <a16:creationId xmlns:a16="http://schemas.microsoft.com/office/drawing/2014/main" id="{F27A6AF7-11A6-0BD8-2500-D799F0F7D776}"/>
-              </a:ext>
-            </a:extLst>
-          </p:cNvPr>
-          <p:cNvSpPr>
-            <a:spLocks noGrp="1"/>
-          </p:cNvSpPr>
-          <p:nvPr>
-            <p:ph type="title"/>
-          </p:nvPr>
-        </p:nvSpPr>
-        <p:spPr/>
-        <p:txBody>
-          <a:bodyPr/>
-          <a:lstStyle/>
-          <a:p>
-            <a:r>
-              <a:rPr lang="en-US" dirty="0"/>
-              <a:t>4.4.3 Graph Representations</a:t>
-            </a:r>
-          </a:p>
-        </p:txBody>
-      </p:sp>
-      <p:sp>
-        <p:nvSpPr>
-          <p:cNvPr id="6" name="Content Placeholder 5">
-            <a:extLst>
-              <a:ext uri="{FF2B5EF4-FFF2-40B4-BE49-F238E27FC236}">
-                <a16:creationId xmlns:a16="http://schemas.microsoft.com/office/drawing/2014/main" id="{4DCA9DE2-1551-979F-C62F-F76E129D0B86}"/>
-              </a:ext>
-            </a:extLst>
-          </p:cNvPr>
-          <p:cNvSpPr>
-            <a:spLocks noGrp="1"/>
-          </p:cNvSpPr>
-          <p:nvPr>
-            <p:ph idx="1"/>
-          </p:nvPr>
-        </p:nvSpPr>
-        <p:spPr/>
-        <p:txBody>
-          <a:bodyPr/>
-          <a:lstStyle/>
-          <a:p>
-            <a:r>
-              <a:rPr lang="en-US" dirty="0"/>
-              <a:t>Flexograph supports two representations for graphs</a:t>
-            </a:r>
-          </a:p>
-          <a:p>
-            <a:r>
-              <a:rPr lang="en-US" dirty="0"/>
-              <a:t>Adjacency List Representation</a:t>
-            </a:r>
-          </a:p>
-          <a:p>
-            <a:r>
-              <a:rPr lang="en-US" dirty="0" err="1"/>
-              <a:t>EdgeKey</a:t>
-            </a:r>
-            <a:r>
-              <a:rPr lang="en-US" dirty="0"/>
-              <a:t> representation:</a:t>
-            </a:r>
-          </a:p>
-          <a:p>
-            <a:pPr lvl="1"/>
-            <a:r>
-              <a:rPr lang="en-US" dirty="0"/>
-              <a:t>Designed to create a CSR-like representation in the key-value store</a:t>
-            </a:r>
-          </a:p>
-          <a:p>
-            <a:endParaRPr lang="en-US" dirty="0"/>
-          </a:p>
-          <a:p>
-            <a:r>
-              <a:rPr lang="en-US" dirty="0"/>
-              <a:t>Another RDBMS-like representation was prototyped but abandoned</a:t>
-            </a:r>
-          </a:p>
-          <a:p>
-            <a:pPr lvl="1"/>
-            <a:r>
-              <a:rPr lang="en-US" dirty="0"/>
-              <a:t>Poor benchmark performance across the board</a:t>
-            </a:r>
-          </a:p>
-        </p:txBody>
-      </p:sp>
-      <p:sp>
-        <p:nvSpPr>
-          <p:cNvPr id="5" name="Slide Number Placeholder 4">
-            <a:extLst>
-              <a:ext uri="{FF2B5EF4-FFF2-40B4-BE49-F238E27FC236}">
-                <a16:creationId xmlns:a16="http://schemas.microsoft.com/office/drawing/2014/main" id="{434BD4B3-94C3-88A5-212A-915EC772F188}"/>
-              </a:ext>
-            </a:extLst>
-          </p:cNvPr>
-          <p:cNvSpPr>
-            <a:spLocks noGrp="1"/>
-          </p:cNvSpPr>
-          <p:nvPr>
-            <p:ph type="sldNum" sz="quarter" idx="12"/>
-          </p:nvPr>
-        </p:nvSpPr>
-        <p:spPr/>
-        <p:txBody>
-          <a:bodyPr/>
-          <a:lstStyle/>
-          <a:p>
-            <a:fld id="{EEBEF218-D4C5-B946-BB13-027BCA6FFA2A}" type="slidenum">
-              <a:rPr lang="en-US" smtClean="0"/>
-              <a:t>26</a:t>
-            </a:fld>
-            <a:endParaRPr lang="en-US"/>
-          </a:p>
-        </p:txBody>
-      </p:sp>
-    </p:spTree>
-    <p:extLst>
-      <p:ext uri="{BB962C8B-B14F-4D97-AF65-F5344CB8AC3E}">
-        <p14:creationId xmlns:p14="http://schemas.microsoft.com/office/powerpoint/2010/main" val="1789799997"/>
-      </p:ext>
-    </p:extLst>
-  </p:cSld>
-  <p:clrMapOvr>
-    <a:masterClrMapping/>
-  </p:clrMapOvr>
-</p:sld>
-</file>
-
 <file path=ppt/slides/slide27.xml><?xml version="1.0" encoding="utf-8"?>
 <p:sld xmlns:a="http://schemas.openxmlformats.org/drawingml/2006/main" xmlns:r="http://schemas.openxmlformats.org/officeDocument/2006/relationships" xmlns:p="http://schemas.openxmlformats.org/presentationml/2006/main">
   <p:cSld>
@@ -13604,7 +16172,7 @@
           <a:p>
             <a:r>
               <a:rPr lang="en-US" dirty="0"/>
-              <a:t>4.4.3 Adjacency List Representation</a:t>
+              <a:t>4.4.3 Graph Representations</a:t>
             </a:r>
           </a:p>
         </p:txBody>
@@ -13622,83 +16190,60 @@
             <a:spLocks noGrp="1"/>
           </p:cNvSpPr>
           <p:nvPr>
-            <p:ph sz="half" idx="1"/>
+            <p:ph idx="1"/>
           </p:nvPr>
         </p:nvSpPr>
         <p:spPr/>
         <p:txBody>
-          <a:bodyPr>
-            <a:normAutofit/>
-          </a:bodyPr>
-          <a:lstStyle/>
+          <a:bodyPr/>
+          <a:lstStyle/>
+          <a:p>
+            <a:r>
+              <a:rPr lang="en-US" dirty="0"/>
+              <a:t>Flexograph supports two representations for graphs</a:t>
+            </a:r>
+          </a:p>
+          <a:p>
+            <a:r>
+              <a:rPr lang="en-US" dirty="0"/>
+              <a:t>Adjacency List Representation</a:t>
+            </a:r>
+          </a:p>
           <a:p>
             <a:r>
               <a:rPr lang="en-US" dirty="0" err="1"/>
-              <a:t>AdjList</a:t>
-            </a:r>
-            <a:r>
-              <a:rPr lang="en-US" dirty="0"/>
-              <a:t> has two tables for structural information:</a:t>
+              <a:t>EdgeKey</a:t>
+            </a:r>
+            <a:r>
+              <a:rPr lang="en-US" dirty="0"/>
+              <a:t> representation:</a:t>
             </a:r>
           </a:p>
           <a:p>
             <a:pPr lvl="1"/>
             <a:r>
               <a:rPr lang="en-US" dirty="0"/>
-              <a:t>In/Out </a:t>
-            </a:r>
-            <a:r>
-              <a:rPr lang="en-US" dirty="0" err="1"/>
-              <a:t>AdjList</a:t>
-            </a:r>
-            <a:r>
-              <a:rPr lang="en-US" dirty="0"/>
-              <a:t> tables store the in/out neighborhoods of every vertex</a:t>
-            </a:r>
-          </a:p>
-          <a:p>
-            <a:r>
-              <a:rPr lang="en-US" dirty="0"/>
-              <a:t>Node and Edge tables are needed only if the table has labels and properties</a:t>
-            </a:r>
-          </a:p>
-          <a:p>
-            <a:r>
-              <a:rPr lang="en-US" dirty="0"/>
-              <a:t>This representation does not need any indexes</a:t>
-            </a:r>
-          </a:p>
-        </p:txBody>
-      </p:sp>
-      <p:pic>
-        <p:nvPicPr>
-          <p:cNvPr id="7" name="Content Placeholder 6" descr="A group of black and white rectangular objects&#10;&#10;Description automatically generated">
-            <a:extLst>
-              <a:ext uri="{FF2B5EF4-FFF2-40B4-BE49-F238E27FC236}">
-                <a16:creationId xmlns:a16="http://schemas.microsoft.com/office/drawing/2014/main" id="{12D0C653-1D73-413F-E87C-DA13F48B62D9}"/>
-              </a:ext>
-            </a:extLst>
-          </p:cNvPr>
-          <p:cNvPicPr>
-            <a:picLocks noGrp="1" noChangeAspect="1"/>
-          </p:cNvPicPr>
-          <p:nvPr>
-            <p:ph sz="half" idx="2"/>
-          </p:nvPr>
-        </p:nvPicPr>
-        <p:blipFill>
-          <a:blip r:embed="rId3"/>
-          <a:stretch>
-            <a:fillRect/>
-          </a:stretch>
-        </p:blipFill>
-        <p:spPr>
-          <a:xfrm>
-            <a:off x="6497886" y="2345993"/>
-            <a:ext cx="5337675" cy="2166013"/>
-          </a:xfrm>
-        </p:spPr>
-      </p:pic>
+              <a:t>Designed to create a CSR-like representation in the key-value store</a:t>
+            </a:r>
+          </a:p>
+          <a:p>
+            <a:endParaRPr lang="en-US" dirty="0"/>
+          </a:p>
+          <a:p>
+            <a:r>
+              <a:rPr lang="en-US" dirty="0"/>
+              <a:t>Another RDBMS-like representation was prototyped but abandoned</a:t>
+            </a:r>
+          </a:p>
+          <a:p>
+            <a:pPr lvl="1"/>
+            <a:r>
+              <a:rPr lang="en-US" dirty="0"/>
+              <a:t>Poor benchmark performance across the board</a:t>
+            </a:r>
+          </a:p>
+        </p:txBody>
+      </p:sp>
       <p:sp>
         <p:nvSpPr>
           <p:cNvPr id="5" name="Slide Number Placeholder 4">
@@ -13728,78 +16273,10 @@
           </a:p>
         </p:txBody>
       </p:sp>
-      <p:sp>
-        <p:nvSpPr>
-          <p:cNvPr id="8" name="TextBox 7">
-            <a:extLst>
-              <a:ext uri="{FF2B5EF4-FFF2-40B4-BE49-F238E27FC236}">
-                <a16:creationId xmlns:a16="http://schemas.microsoft.com/office/drawing/2014/main" id="{60749158-B27F-2106-F723-B34EB860AD70}"/>
-              </a:ext>
-            </a:extLst>
-          </p:cNvPr>
-          <p:cNvSpPr txBox="1"/>
-          <p:nvPr/>
-        </p:nvSpPr>
-        <p:spPr>
-          <a:xfrm>
-            <a:off x="7371955" y="4950372"/>
-            <a:ext cx="3796337" cy="923330"/>
-          </a:xfrm>
-          <a:prstGeom prst="rect">
-            <a:avLst/>
-          </a:prstGeom>
-          <a:noFill/>
-        </p:spPr>
-        <p:txBody>
-          <a:bodyPr wrap="square" rtlCol="0">
-            <a:spAutoFit/>
-          </a:bodyPr>
-          <a:lstStyle/>
-          <a:p>
-            <a:r>
-              <a:rPr lang="en-US" b="1" dirty="0">
-                <a:latin typeface="Courier New" panose="02070309020205020404" pitchFamily="49" charset="0"/>
-                <a:cs typeface="Courier New" panose="02070309020205020404" pitchFamily="49" charset="0"/>
-              </a:rPr>
-              <a:t>u</a:t>
-            </a:r>
-            <a:r>
-              <a:rPr lang="en-US" dirty="0"/>
-              <a:t> denotes a serialized byte array</a:t>
-            </a:r>
-          </a:p>
-          <a:p>
-            <a:r>
-              <a:rPr lang="en-US" b="1" dirty="0">
-                <a:latin typeface="Courier New" panose="02070309020205020404" pitchFamily="49" charset="0"/>
-                <a:cs typeface="Courier New" panose="02070309020205020404" pitchFamily="49" charset="0"/>
-              </a:rPr>
-              <a:t>I</a:t>
-            </a:r>
-            <a:r>
-              <a:rPr lang="en-US" dirty="0"/>
-              <a:t> denotes an unsigned integer</a:t>
-            </a:r>
-          </a:p>
-          <a:p>
-            <a:r>
-              <a:rPr lang="en-US" b="1" dirty="0" err="1">
-                <a:latin typeface="Courier New" panose="02070309020205020404" pitchFamily="49" charset="0"/>
-                <a:cs typeface="Courier New" panose="02070309020205020404" pitchFamily="49" charset="0"/>
-              </a:rPr>
-              <a:t>i</a:t>
-            </a:r>
-            <a:r>
-              <a:rPr lang="en-US" dirty="0"/>
-              <a:t> denotes a signed integer </a:t>
-            </a:r>
-          </a:p>
-        </p:txBody>
-      </p:sp>
     </p:spTree>
     <p:extLst>
       <p:ext uri="{BB962C8B-B14F-4D97-AF65-F5344CB8AC3E}">
-        <p14:creationId xmlns:p14="http://schemas.microsoft.com/office/powerpoint/2010/main" val="1810148625"/>
+        <p14:creationId xmlns:p14="http://schemas.microsoft.com/office/powerpoint/2010/main" val="1789799997"/>
       </p:ext>
     </p:extLst>
   </p:cSld>
@@ -13849,6 +16326,251 @@
           <a:p>
             <a:r>
               <a:rPr lang="en-US" dirty="0"/>
+              <a:t>4.4.3 Adjacency List Representation</a:t>
+            </a:r>
+          </a:p>
+        </p:txBody>
+      </p:sp>
+      <p:sp>
+        <p:nvSpPr>
+          <p:cNvPr id="6" name="Content Placeholder 5">
+            <a:extLst>
+              <a:ext uri="{FF2B5EF4-FFF2-40B4-BE49-F238E27FC236}">
+                <a16:creationId xmlns:a16="http://schemas.microsoft.com/office/drawing/2014/main" id="{4DCA9DE2-1551-979F-C62F-F76E129D0B86}"/>
+              </a:ext>
+            </a:extLst>
+          </p:cNvPr>
+          <p:cNvSpPr>
+            <a:spLocks noGrp="1"/>
+          </p:cNvSpPr>
+          <p:nvPr>
+            <p:ph sz="half" idx="1"/>
+          </p:nvPr>
+        </p:nvSpPr>
+        <p:spPr/>
+        <p:txBody>
+          <a:bodyPr>
+            <a:normAutofit/>
+          </a:bodyPr>
+          <a:lstStyle/>
+          <a:p>
+            <a:r>
+              <a:rPr lang="en-US" dirty="0" err="1"/>
+              <a:t>AdjList</a:t>
+            </a:r>
+            <a:r>
+              <a:rPr lang="en-US" dirty="0"/>
+              <a:t> has two tables for structural information:</a:t>
+            </a:r>
+          </a:p>
+          <a:p>
+            <a:pPr lvl="1"/>
+            <a:r>
+              <a:rPr lang="en-US" dirty="0"/>
+              <a:t>In/Out </a:t>
+            </a:r>
+            <a:r>
+              <a:rPr lang="en-US" dirty="0" err="1"/>
+              <a:t>AdjList</a:t>
+            </a:r>
+            <a:r>
+              <a:rPr lang="en-US" dirty="0"/>
+              <a:t> tables store the in/out neighborhoods of every vertex</a:t>
+            </a:r>
+          </a:p>
+          <a:p>
+            <a:r>
+              <a:rPr lang="en-US" dirty="0"/>
+              <a:t>Node and Edge tables are needed only if the table has labels and properties</a:t>
+            </a:r>
+          </a:p>
+          <a:p>
+            <a:r>
+              <a:rPr lang="en-US" dirty="0"/>
+              <a:t>This representation does not need any indexes</a:t>
+            </a:r>
+          </a:p>
+        </p:txBody>
+      </p:sp>
+      <p:pic>
+        <p:nvPicPr>
+          <p:cNvPr id="7" name="Content Placeholder 6" descr="A group of black and white rectangular objects&#10;&#10;Description automatically generated">
+            <a:extLst>
+              <a:ext uri="{FF2B5EF4-FFF2-40B4-BE49-F238E27FC236}">
+                <a16:creationId xmlns:a16="http://schemas.microsoft.com/office/drawing/2014/main" id="{12D0C653-1D73-413F-E87C-DA13F48B62D9}"/>
+              </a:ext>
+            </a:extLst>
+          </p:cNvPr>
+          <p:cNvPicPr>
+            <a:picLocks noGrp="1" noChangeAspect="1"/>
+          </p:cNvPicPr>
+          <p:nvPr>
+            <p:ph sz="half" idx="2"/>
+          </p:nvPr>
+        </p:nvPicPr>
+        <p:blipFill>
+          <a:blip r:embed="rId3"/>
+          <a:stretch>
+            <a:fillRect/>
+          </a:stretch>
+        </p:blipFill>
+        <p:spPr>
+          <a:xfrm>
+            <a:off x="6497886" y="2345993"/>
+            <a:ext cx="5337675" cy="2166013"/>
+          </a:xfrm>
+        </p:spPr>
+      </p:pic>
+      <p:sp>
+        <p:nvSpPr>
+          <p:cNvPr id="5" name="Slide Number Placeholder 4">
+            <a:extLst>
+              <a:ext uri="{FF2B5EF4-FFF2-40B4-BE49-F238E27FC236}">
+                <a16:creationId xmlns:a16="http://schemas.microsoft.com/office/drawing/2014/main" id="{434BD4B3-94C3-88A5-212A-915EC772F188}"/>
+              </a:ext>
+            </a:extLst>
+          </p:cNvPr>
+          <p:cNvSpPr>
+            <a:spLocks noGrp="1"/>
+          </p:cNvSpPr>
+          <p:nvPr>
+            <p:ph type="sldNum" sz="quarter" idx="12"/>
+          </p:nvPr>
+        </p:nvSpPr>
+        <p:spPr/>
+        <p:txBody>
+          <a:bodyPr/>
+          <a:lstStyle/>
+          <a:p>
+            <a:fld id="{EEBEF218-D4C5-B946-BB13-027BCA6FFA2A}" type="slidenum">
+              <a:rPr lang="en-US" smtClean="0"/>
+              <a:t>28</a:t>
+            </a:fld>
+            <a:endParaRPr lang="en-US"/>
+          </a:p>
+        </p:txBody>
+      </p:sp>
+      <p:sp>
+        <p:nvSpPr>
+          <p:cNvPr id="8" name="TextBox 7">
+            <a:extLst>
+              <a:ext uri="{FF2B5EF4-FFF2-40B4-BE49-F238E27FC236}">
+                <a16:creationId xmlns:a16="http://schemas.microsoft.com/office/drawing/2014/main" id="{60749158-B27F-2106-F723-B34EB860AD70}"/>
+              </a:ext>
+            </a:extLst>
+          </p:cNvPr>
+          <p:cNvSpPr txBox="1"/>
+          <p:nvPr/>
+        </p:nvSpPr>
+        <p:spPr>
+          <a:xfrm>
+            <a:off x="7371955" y="4950372"/>
+            <a:ext cx="3796337" cy="923330"/>
+          </a:xfrm>
+          <a:prstGeom prst="rect">
+            <a:avLst/>
+          </a:prstGeom>
+          <a:noFill/>
+        </p:spPr>
+        <p:txBody>
+          <a:bodyPr wrap="square" rtlCol="0">
+            <a:spAutoFit/>
+          </a:bodyPr>
+          <a:lstStyle/>
+          <a:p>
+            <a:r>
+              <a:rPr lang="en-US" b="1" dirty="0">
+                <a:latin typeface="Courier New" panose="02070309020205020404" pitchFamily="49" charset="0"/>
+                <a:cs typeface="Courier New" panose="02070309020205020404" pitchFamily="49" charset="0"/>
+              </a:rPr>
+              <a:t>u</a:t>
+            </a:r>
+            <a:r>
+              <a:rPr lang="en-US" dirty="0"/>
+              <a:t> denotes a serialized byte array</a:t>
+            </a:r>
+          </a:p>
+          <a:p>
+            <a:r>
+              <a:rPr lang="en-US" b="1" dirty="0">
+                <a:latin typeface="Courier New" panose="02070309020205020404" pitchFamily="49" charset="0"/>
+                <a:cs typeface="Courier New" panose="02070309020205020404" pitchFamily="49" charset="0"/>
+              </a:rPr>
+              <a:t>I</a:t>
+            </a:r>
+            <a:r>
+              <a:rPr lang="en-US" dirty="0"/>
+              <a:t> denotes an unsigned integer</a:t>
+            </a:r>
+          </a:p>
+          <a:p>
+            <a:r>
+              <a:rPr lang="en-US" b="1" dirty="0" err="1">
+                <a:latin typeface="Courier New" panose="02070309020205020404" pitchFamily="49" charset="0"/>
+                <a:cs typeface="Courier New" panose="02070309020205020404" pitchFamily="49" charset="0"/>
+              </a:rPr>
+              <a:t>i</a:t>
+            </a:r>
+            <a:r>
+              <a:rPr lang="en-US" dirty="0"/>
+              <a:t> denotes a signed integer </a:t>
+            </a:r>
+          </a:p>
+        </p:txBody>
+      </p:sp>
+    </p:spTree>
+    <p:extLst>
+      <p:ext uri="{BB962C8B-B14F-4D97-AF65-F5344CB8AC3E}">
+        <p14:creationId xmlns:p14="http://schemas.microsoft.com/office/powerpoint/2010/main" val="1810148625"/>
+      </p:ext>
+    </p:extLst>
+  </p:cSld>
+  <p:clrMapOvr>
+    <a:masterClrMapping/>
+  </p:clrMapOvr>
+</p:sld>
+</file>
+
+<file path=ppt/slides/slide29.xml><?xml version="1.0" encoding="utf-8"?>
+<p:sld xmlns:a="http://schemas.openxmlformats.org/drawingml/2006/main" xmlns:r="http://schemas.openxmlformats.org/officeDocument/2006/relationships" xmlns:p="http://schemas.openxmlformats.org/presentationml/2006/main">
+  <p:cSld>
+    <p:spTree>
+      <p:nvGrpSpPr>
+        <p:cNvPr id="1" name=""/>
+        <p:cNvGrpSpPr/>
+        <p:nvPr/>
+      </p:nvGrpSpPr>
+      <p:grpSpPr>
+        <a:xfrm>
+          <a:off x="0" y="0"/>
+          <a:ext cx="0" cy="0"/>
+          <a:chOff x="0" y="0"/>
+          <a:chExt cx="0" cy="0"/>
+        </a:xfrm>
+      </p:grpSpPr>
+      <p:sp>
+        <p:nvSpPr>
+          <p:cNvPr id="2" name="Title 1">
+            <a:extLst>
+              <a:ext uri="{FF2B5EF4-FFF2-40B4-BE49-F238E27FC236}">
+                <a16:creationId xmlns:a16="http://schemas.microsoft.com/office/drawing/2014/main" id="{F27A6AF7-11A6-0BD8-2500-D799F0F7D776}"/>
+              </a:ext>
+            </a:extLst>
+          </p:cNvPr>
+          <p:cNvSpPr>
+            <a:spLocks noGrp="1"/>
+          </p:cNvSpPr>
+          <p:nvPr>
+            <p:ph type="title"/>
+          </p:nvPr>
+        </p:nvSpPr>
+        <p:spPr/>
+        <p:txBody>
+          <a:bodyPr/>
+          <a:lstStyle/>
+          <a:p>
+            <a:r>
+              <a:rPr lang="en-US" dirty="0"/>
               <a:t>4.4.3 </a:t>
             </a:r>
             <a:r>
@@ -14142,7 +16864,7 @@
           <a:p>
             <a:fld id="{EEBEF218-D4C5-B946-BB13-027BCA6FFA2A}" type="slidenum">
               <a:rPr lang="en-US" smtClean="0"/>
-              <a:t>28</a:t>
+              <a:t>29</a:t>
             </a:fld>
             <a:endParaRPr lang="en-US" dirty="0"/>
           </a:p>
@@ -14377,269 +17099,6 @@
 </p:sld>
 </file>
 
-<file path=ppt/slides/slide29.xml><?xml version="1.0" encoding="utf-8"?>
-<p:sld xmlns:a="http://schemas.openxmlformats.org/drawingml/2006/main" xmlns:r="http://schemas.openxmlformats.org/officeDocument/2006/relationships" xmlns:p="http://schemas.openxmlformats.org/presentationml/2006/main">
-  <p:cSld>
-    <p:spTree>
-      <p:nvGrpSpPr>
-        <p:cNvPr id="1" name=""/>
-        <p:cNvGrpSpPr/>
-        <p:nvPr/>
-      </p:nvGrpSpPr>
-      <p:grpSpPr>
-        <a:xfrm>
-          <a:off x="0" y="0"/>
-          <a:ext cx="0" cy="0"/>
-          <a:chOff x="0" y="0"/>
-          <a:chExt cx="0" cy="0"/>
-        </a:xfrm>
-      </p:grpSpPr>
-      <p:sp>
-        <p:nvSpPr>
-          <p:cNvPr id="2" name="Title 1">
-            <a:extLst>
-              <a:ext uri="{FF2B5EF4-FFF2-40B4-BE49-F238E27FC236}">
-                <a16:creationId xmlns:a16="http://schemas.microsoft.com/office/drawing/2014/main" id="{F27A6AF7-11A6-0BD8-2500-D799F0F7D776}"/>
-              </a:ext>
-            </a:extLst>
-          </p:cNvPr>
-          <p:cNvSpPr>
-            <a:spLocks noGrp="1"/>
-          </p:cNvSpPr>
-          <p:nvPr>
-            <p:ph type="title"/>
-          </p:nvPr>
-        </p:nvSpPr>
-        <p:spPr/>
-        <p:txBody>
-          <a:bodyPr/>
-          <a:lstStyle/>
-          <a:p>
-            <a:r>
-              <a:rPr lang="en-US" dirty="0"/>
-              <a:t>4.4.3 </a:t>
-            </a:r>
-            <a:r>
-              <a:rPr lang="en-US" dirty="0" err="1"/>
-              <a:t>EdgeKey</a:t>
-            </a:r>
-            <a:r>
-              <a:rPr lang="en-US" dirty="0"/>
-              <a:t> Representation – Split Design</a:t>
-            </a:r>
-          </a:p>
-        </p:txBody>
-      </p:sp>
-      <p:sp>
-        <p:nvSpPr>
-          <p:cNvPr id="5" name="Slide Number Placeholder 4">
-            <a:extLst>
-              <a:ext uri="{FF2B5EF4-FFF2-40B4-BE49-F238E27FC236}">
-                <a16:creationId xmlns:a16="http://schemas.microsoft.com/office/drawing/2014/main" id="{434BD4B3-94C3-88A5-212A-915EC772F188}"/>
-              </a:ext>
-            </a:extLst>
-          </p:cNvPr>
-          <p:cNvSpPr>
-            <a:spLocks noGrp="1"/>
-          </p:cNvSpPr>
-          <p:nvPr>
-            <p:ph type="sldNum" sz="quarter" idx="12"/>
-          </p:nvPr>
-        </p:nvSpPr>
-        <p:spPr/>
-        <p:txBody>
-          <a:bodyPr/>
-          <a:lstStyle/>
-          <a:p>
-            <a:fld id="{EEBEF218-D4C5-B946-BB13-027BCA6FFA2A}" type="slidenum">
-              <a:rPr lang="en-US" smtClean="0"/>
-              <a:t>29</a:t>
-            </a:fld>
-            <a:endParaRPr lang="en-US"/>
-          </a:p>
-        </p:txBody>
-      </p:sp>
-      <p:sp>
-        <p:nvSpPr>
-          <p:cNvPr id="8" name="TextBox 7">
-            <a:extLst>
-              <a:ext uri="{FF2B5EF4-FFF2-40B4-BE49-F238E27FC236}">
-                <a16:creationId xmlns:a16="http://schemas.microsoft.com/office/drawing/2014/main" id="{60749158-B27F-2106-F723-B34EB860AD70}"/>
-              </a:ext>
-            </a:extLst>
-          </p:cNvPr>
-          <p:cNvSpPr txBox="1"/>
-          <p:nvPr/>
-        </p:nvSpPr>
-        <p:spPr>
-          <a:xfrm>
-            <a:off x="7371955" y="4950372"/>
-            <a:ext cx="3796337" cy="646331"/>
-          </a:xfrm>
-          <a:prstGeom prst="rect">
-            <a:avLst/>
-          </a:prstGeom>
-          <a:noFill/>
-        </p:spPr>
-        <p:txBody>
-          <a:bodyPr wrap="square" rtlCol="0">
-            <a:spAutoFit/>
-          </a:bodyPr>
-          <a:lstStyle/>
-          <a:p>
-            <a:r>
-              <a:rPr lang="en-US" b="1" dirty="0">
-                <a:latin typeface="Courier New" panose="02070309020205020404" pitchFamily="49" charset="0"/>
-                <a:cs typeface="Courier New" panose="02070309020205020404" pitchFamily="49" charset="0"/>
-              </a:rPr>
-              <a:t>u</a:t>
-            </a:r>
-            <a:r>
-              <a:rPr lang="en-US" dirty="0"/>
-              <a:t> denotes a serialized byte array</a:t>
-            </a:r>
-          </a:p>
-          <a:p>
-            <a:r>
-              <a:rPr lang="en-US" b="1" dirty="0">
-                <a:latin typeface="Courier New" panose="02070309020205020404" pitchFamily="49" charset="0"/>
-                <a:cs typeface="Courier New" panose="02070309020205020404" pitchFamily="49" charset="0"/>
-              </a:rPr>
-              <a:t>I</a:t>
-            </a:r>
-            <a:r>
-              <a:rPr lang="en-US" dirty="0"/>
-              <a:t> denotes an unsigned 32-bit integer</a:t>
-            </a:r>
-          </a:p>
-        </p:txBody>
-      </p:sp>
-      <p:pic>
-        <p:nvPicPr>
-          <p:cNvPr id="10" name="Content Placeholder 9" descr="A close-up of a couple of squares&#10;&#10;Description automatically generated">
-            <a:extLst>
-              <a:ext uri="{FF2B5EF4-FFF2-40B4-BE49-F238E27FC236}">
-                <a16:creationId xmlns:a16="http://schemas.microsoft.com/office/drawing/2014/main" id="{D308CBBE-0CAF-B3B2-5243-D6A5ECA3E3EB}"/>
-              </a:ext>
-            </a:extLst>
-          </p:cNvPr>
-          <p:cNvPicPr>
-            <a:picLocks noGrp="1" noChangeAspect="1"/>
-          </p:cNvPicPr>
-          <p:nvPr>
-            <p:ph sz="half" idx="2"/>
-          </p:nvPr>
-        </p:nvPicPr>
-        <p:blipFill>
-          <a:blip r:embed="rId2"/>
-          <a:stretch>
-            <a:fillRect/>
-          </a:stretch>
-        </p:blipFill>
-        <p:spPr>
-          <a:xfrm>
-            <a:off x="5921889" y="3052204"/>
-            <a:ext cx="6270111" cy="1090454"/>
-          </a:xfrm>
-        </p:spPr>
-      </p:pic>
-      <p:sp>
-        <p:nvSpPr>
-          <p:cNvPr id="7" name="Content Placeholder 6">
-            <a:extLst>
-              <a:ext uri="{FF2B5EF4-FFF2-40B4-BE49-F238E27FC236}">
-                <a16:creationId xmlns:a16="http://schemas.microsoft.com/office/drawing/2014/main" id="{68567CDA-5063-05FA-B3DA-C305062125EE}"/>
-              </a:ext>
-            </a:extLst>
-          </p:cNvPr>
-          <p:cNvSpPr>
-            <a:spLocks noGrp="1"/>
-          </p:cNvSpPr>
-          <p:nvPr>
-            <p:ph sz="half" idx="1"/>
-          </p:nvPr>
-        </p:nvSpPr>
-        <p:spPr>
-          <a:xfrm>
-            <a:off x="381965" y="1825625"/>
-            <a:ext cx="5637835" cy="4351338"/>
-          </a:xfrm>
-        </p:spPr>
-        <p:txBody>
-          <a:bodyPr/>
-          <a:lstStyle/>
-          <a:p>
-            <a:r>
-              <a:rPr lang="en-US" dirty="0"/>
-              <a:t>The split design removes the </a:t>
-            </a:r>
-            <a:r>
-              <a:rPr lang="en-US" dirty="0" err="1"/>
-              <a:t>neeed</a:t>
-            </a:r>
-            <a:r>
-              <a:rPr lang="en-US" dirty="0"/>
-              <a:t> to use a secondary cursor for finding in-neighborhoods</a:t>
-            </a:r>
-          </a:p>
-          <a:p>
-            <a:r>
-              <a:rPr lang="en-US" dirty="0"/>
-              <a:t>This representation materializes the reverse edges</a:t>
-            </a:r>
-          </a:p>
-          <a:p>
-            <a:pPr lvl="1"/>
-            <a:r>
-              <a:rPr lang="en-US" dirty="0"/>
-              <a:t>Out Neighborhood queries use the </a:t>
-            </a:r>
-            <a:r>
-              <a:rPr lang="en-US" dirty="0" err="1"/>
-              <a:t>OutEdges</a:t>
-            </a:r>
-            <a:r>
-              <a:rPr lang="en-US" dirty="0"/>
-              <a:t> table</a:t>
-            </a:r>
-          </a:p>
-          <a:p>
-            <a:pPr lvl="1"/>
-            <a:r>
-              <a:rPr lang="en-US" dirty="0"/>
-              <a:t>In Neighborhood queries use the </a:t>
-            </a:r>
-            <a:r>
-              <a:rPr lang="en-US" dirty="0" err="1"/>
-              <a:t>InEdges</a:t>
-            </a:r>
-            <a:r>
-              <a:rPr lang="en-US" dirty="0"/>
-              <a:t> table</a:t>
-            </a:r>
-          </a:p>
-          <a:p>
-            <a:pPr lvl="1"/>
-            <a:r>
-              <a:rPr lang="en-US" dirty="0"/>
-              <a:t>Everything else remains the same as the initial design</a:t>
-            </a:r>
-          </a:p>
-        </p:txBody>
-      </p:sp>
-    </p:spTree>
-    <p:extLst>
-      <p:ext uri="{BB962C8B-B14F-4D97-AF65-F5344CB8AC3E}">
-        <p14:creationId xmlns:p14="http://schemas.microsoft.com/office/powerpoint/2010/main" val="55971074"/>
-      </p:ext>
-    </p:extLst>
-  </p:cSld>
-  <p:clrMapOvr>
-    <a:masterClrMapping/>
-  </p:clrMapOvr>
-</p:sld>
-</file>
-
 <file path=ppt/slides/slide3.xml><?xml version="1.0" encoding="utf-8"?>
 <p:sld xmlns:a="http://schemas.openxmlformats.org/drawingml/2006/main" xmlns:r="http://schemas.openxmlformats.org/officeDocument/2006/relationships" xmlns:p="http://schemas.openxmlformats.org/presentationml/2006/main">
   <p:cSld>
@@ -14828,7 +17287,7 @@
           <p:cNvPr id="2" name="Title 1">
             <a:extLst>
               <a:ext uri="{FF2B5EF4-FFF2-40B4-BE49-F238E27FC236}">
-                <a16:creationId xmlns:a16="http://schemas.microsoft.com/office/drawing/2014/main" id="{936E7246-6B7E-61B7-F3D2-A2EF951367DC}"/>
+                <a16:creationId xmlns:a16="http://schemas.microsoft.com/office/drawing/2014/main" id="{F27A6AF7-11A6-0BD8-2500-D799F0F7D776}"/>
               </a:ext>
             </a:extLst>
           </p:cNvPr>
@@ -14846,89 +17305,15 @@
           <a:p>
             <a:r>
               <a:rPr lang="en-US" dirty="0"/>
-              <a:t>4.4.4 Iterators</a:t>
-            </a:r>
-          </a:p>
-        </p:txBody>
-      </p:sp>
-      <p:sp>
-        <p:nvSpPr>
-          <p:cNvPr id="3" name="Content Placeholder 2">
-            <a:extLst>
-              <a:ext uri="{FF2B5EF4-FFF2-40B4-BE49-F238E27FC236}">
-                <a16:creationId xmlns:a16="http://schemas.microsoft.com/office/drawing/2014/main" id="{9338C04E-CAB0-F4FE-1B79-D018A2E472AE}"/>
-              </a:ext>
-            </a:extLst>
-          </p:cNvPr>
-          <p:cNvSpPr>
-            <a:spLocks noGrp="1"/>
-          </p:cNvSpPr>
-          <p:nvPr>
-            <p:ph idx="1"/>
-          </p:nvPr>
-        </p:nvSpPr>
-        <p:spPr/>
-        <p:txBody>
-          <a:bodyPr>
-            <a:normAutofit lnSpcReduction="10000"/>
-          </a:bodyPr>
-          <a:lstStyle/>
-          <a:p>
-            <a:r>
-              <a:rPr lang="en-US" dirty="0"/>
-              <a:t>WiredTiger API provides methods to position a cursor on any table and iterate from a valid position till the end of the table is reached</a:t>
-            </a:r>
-          </a:p>
-          <a:p>
-            <a:pPr lvl="1"/>
-            <a:r>
-              <a:rPr lang="en-US" dirty="0"/>
-              <a:t>We don’t want to allow the user to use these raw methods</a:t>
-            </a:r>
-          </a:p>
-          <a:p>
+              <a:t>4.4.3 </a:t>
+            </a:r>
             <a:r>
               <a:rPr lang="en-US" dirty="0" err="1"/>
-              <a:t>GraphAPI</a:t>
-            </a:r>
-            <a:r>
-              <a:rPr lang="en-US" dirty="0"/>
-              <a:t> has methods to get a nodes entire neighborhoods, but these methods do not allow finding neighborhoods of multiple/range of nodes</a:t>
-            </a:r>
-          </a:p>
-          <a:p>
-            <a:pPr lvl="1"/>
-            <a:r>
-              <a:rPr lang="en-US" dirty="0"/>
-              <a:t>Doing so in the API would require a search for each node: HIGHLY INEFFICIENT</a:t>
-            </a:r>
-          </a:p>
-          <a:p>
-            <a:pPr lvl="1"/>
-            <a:r>
-              <a:rPr lang="en-US" dirty="0"/>
-              <a:t>Also, tedious, repetitive, and needs knowledge of the graph representation</a:t>
-            </a:r>
-          </a:p>
-          <a:p>
-            <a:pPr lvl="1"/>
-            <a:endParaRPr lang="en-US" dirty="0"/>
-          </a:p>
-          <a:p>
-            <a:r>
-              <a:rPr lang="en-US" dirty="0"/>
-              <a:t>Iterators allow the user to define a start key and an end key and call the </a:t>
-            </a:r>
-            <a:r>
-              <a:rPr lang="en-US" dirty="0">
-                <a:latin typeface="Courier New" panose="02070309020205020404" pitchFamily="49" charset="0"/>
-                <a:cs typeface="Courier New" panose="02070309020205020404" pitchFamily="49" charset="0"/>
-              </a:rPr>
-              <a:t>next() </a:t>
-            </a:r>
-            <a:r>
-              <a:rPr lang="en-US" dirty="0"/>
-              <a:t>function to move to the next position</a:t>
+              <a:t>EdgeKey</a:t>
+            </a:r>
+            <a:r>
+              <a:rPr lang="en-US" dirty="0"/>
+              <a:t> Representation – Split Design</a:t>
             </a:r>
           </a:p>
         </p:txBody>
@@ -14938,7 +17323,7 @@
           <p:cNvPr id="5" name="Slide Number Placeholder 4">
             <a:extLst>
               <a:ext uri="{FF2B5EF4-FFF2-40B4-BE49-F238E27FC236}">
-                <a16:creationId xmlns:a16="http://schemas.microsoft.com/office/drawing/2014/main" id="{2415E8F0-3257-2368-AC44-E7B86F78F485}"/>
+                <a16:creationId xmlns:a16="http://schemas.microsoft.com/office/drawing/2014/main" id="{434BD4B3-94C3-88A5-212A-915EC772F188}"/>
               </a:ext>
             </a:extLst>
           </p:cNvPr>
@@ -14962,10 +17347,178 @@
           </a:p>
         </p:txBody>
       </p:sp>
+      <p:sp>
+        <p:nvSpPr>
+          <p:cNvPr id="8" name="TextBox 7">
+            <a:extLst>
+              <a:ext uri="{FF2B5EF4-FFF2-40B4-BE49-F238E27FC236}">
+                <a16:creationId xmlns:a16="http://schemas.microsoft.com/office/drawing/2014/main" id="{60749158-B27F-2106-F723-B34EB860AD70}"/>
+              </a:ext>
+            </a:extLst>
+          </p:cNvPr>
+          <p:cNvSpPr txBox="1"/>
+          <p:nvPr/>
+        </p:nvSpPr>
+        <p:spPr>
+          <a:xfrm>
+            <a:off x="7371955" y="4950372"/>
+            <a:ext cx="3796337" cy="646331"/>
+          </a:xfrm>
+          <a:prstGeom prst="rect">
+            <a:avLst/>
+          </a:prstGeom>
+          <a:noFill/>
+        </p:spPr>
+        <p:txBody>
+          <a:bodyPr wrap="square" rtlCol="0">
+            <a:spAutoFit/>
+          </a:bodyPr>
+          <a:lstStyle/>
+          <a:p>
+            <a:r>
+              <a:rPr lang="en-US" b="1" dirty="0">
+                <a:latin typeface="Courier New" panose="02070309020205020404" pitchFamily="49" charset="0"/>
+                <a:cs typeface="Courier New" panose="02070309020205020404" pitchFamily="49" charset="0"/>
+              </a:rPr>
+              <a:t>u</a:t>
+            </a:r>
+            <a:r>
+              <a:rPr lang="en-US" dirty="0"/>
+              <a:t> denotes a serialized byte array</a:t>
+            </a:r>
+          </a:p>
+          <a:p>
+            <a:r>
+              <a:rPr lang="en-US" b="1" dirty="0">
+                <a:latin typeface="Courier New" panose="02070309020205020404" pitchFamily="49" charset="0"/>
+                <a:cs typeface="Courier New" panose="02070309020205020404" pitchFamily="49" charset="0"/>
+              </a:rPr>
+              <a:t>I</a:t>
+            </a:r>
+            <a:r>
+              <a:rPr lang="en-US" dirty="0"/>
+              <a:t> denotes an unsigned 32-bit integer</a:t>
+            </a:r>
+          </a:p>
+        </p:txBody>
+      </p:sp>
+      <p:pic>
+        <p:nvPicPr>
+          <p:cNvPr id="10" name="Content Placeholder 9" descr="A close-up of a couple of squares&#10;&#10;Description automatically generated">
+            <a:extLst>
+              <a:ext uri="{FF2B5EF4-FFF2-40B4-BE49-F238E27FC236}">
+                <a16:creationId xmlns:a16="http://schemas.microsoft.com/office/drawing/2014/main" id="{D308CBBE-0CAF-B3B2-5243-D6A5ECA3E3EB}"/>
+              </a:ext>
+            </a:extLst>
+          </p:cNvPr>
+          <p:cNvPicPr>
+            <a:picLocks noGrp="1" noChangeAspect="1"/>
+          </p:cNvPicPr>
+          <p:nvPr>
+            <p:ph sz="half" idx="2"/>
+          </p:nvPr>
+        </p:nvPicPr>
+        <p:blipFill>
+          <a:blip r:embed="rId2"/>
+          <a:stretch>
+            <a:fillRect/>
+          </a:stretch>
+        </p:blipFill>
+        <p:spPr>
+          <a:xfrm>
+            <a:off x="5921889" y="3052204"/>
+            <a:ext cx="6270111" cy="1090454"/>
+          </a:xfrm>
+        </p:spPr>
+      </p:pic>
+      <p:sp>
+        <p:nvSpPr>
+          <p:cNvPr id="7" name="Content Placeholder 6">
+            <a:extLst>
+              <a:ext uri="{FF2B5EF4-FFF2-40B4-BE49-F238E27FC236}">
+                <a16:creationId xmlns:a16="http://schemas.microsoft.com/office/drawing/2014/main" id="{68567CDA-5063-05FA-B3DA-C305062125EE}"/>
+              </a:ext>
+            </a:extLst>
+          </p:cNvPr>
+          <p:cNvSpPr>
+            <a:spLocks noGrp="1"/>
+          </p:cNvSpPr>
+          <p:nvPr>
+            <p:ph sz="half" idx="1"/>
+          </p:nvPr>
+        </p:nvSpPr>
+        <p:spPr>
+          <a:xfrm>
+            <a:off x="381965" y="1825625"/>
+            <a:ext cx="5637835" cy="4351338"/>
+          </a:xfrm>
+        </p:spPr>
+        <p:txBody>
+          <a:bodyPr/>
+          <a:lstStyle/>
+          <a:p>
+            <a:r>
+              <a:rPr lang="en-US" dirty="0"/>
+              <a:t>The split design removes the </a:t>
+            </a:r>
+            <a:r>
+              <a:rPr lang="en-US" dirty="0" err="1"/>
+              <a:t>neeed</a:t>
+            </a:r>
+            <a:r>
+              <a:rPr lang="en-US" dirty="0"/>
+              <a:t> to use a secondary cursor for finding in-neighborhoods</a:t>
+            </a:r>
+          </a:p>
+          <a:p>
+            <a:r>
+              <a:rPr lang="en-US" dirty="0"/>
+              <a:t>This representation materializes the reverse edges</a:t>
+            </a:r>
+          </a:p>
+          <a:p>
+            <a:pPr lvl="1"/>
+            <a:r>
+              <a:rPr lang="en-US" dirty="0"/>
+              <a:t>Out Neighborhood queries use the </a:t>
+            </a:r>
+            <a:r>
+              <a:rPr lang="en-US" dirty="0" err="1"/>
+              <a:t>OutEdges</a:t>
+            </a:r>
+            <a:r>
+              <a:rPr lang="en-US" dirty="0"/>
+              <a:t> table</a:t>
+            </a:r>
+          </a:p>
+          <a:p>
+            <a:pPr lvl="1"/>
+            <a:r>
+              <a:rPr lang="en-US" dirty="0"/>
+              <a:t>In Neighborhood queries use the </a:t>
+            </a:r>
+            <a:r>
+              <a:rPr lang="en-US" dirty="0" err="1"/>
+              <a:t>InEdges</a:t>
+            </a:r>
+            <a:r>
+              <a:rPr lang="en-US" dirty="0"/>
+              <a:t> table</a:t>
+            </a:r>
+          </a:p>
+          <a:p>
+            <a:pPr lvl="1"/>
+            <a:r>
+              <a:rPr lang="en-US" dirty="0"/>
+              <a:t>Everything else remains the same as the initial design</a:t>
+            </a:r>
+          </a:p>
+        </p:txBody>
+      </p:sp>
     </p:spTree>
     <p:extLst>
       <p:ext uri="{BB962C8B-B14F-4D97-AF65-F5344CB8AC3E}">
-        <p14:creationId xmlns:p14="http://schemas.microsoft.com/office/powerpoint/2010/main" val="1630116439"/>
+        <p14:creationId xmlns:p14="http://schemas.microsoft.com/office/powerpoint/2010/main" val="55971074"/>
       </p:ext>
     </p:extLst>
   </p:cSld>
@@ -15022,10 +17575,10 @@
       </p:sp>
       <p:sp>
         <p:nvSpPr>
-          <p:cNvPr id="4" name="Content Placeholder 3">
-            <a:extLst>
-              <a:ext uri="{FF2B5EF4-FFF2-40B4-BE49-F238E27FC236}">
-                <a16:creationId xmlns:a16="http://schemas.microsoft.com/office/drawing/2014/main" id="{A13956C0-39B4-2D8A-2251-28D533D0D7DB}"/>
+          <p:cNvPr id="3" name="Content Placeholder 2">
+            <a:extLst>
+              <a:ext uri="{FF2B5EF4-FFF2-40B4-BE49-F238E27FC236}">
+                <a16:creationId xmlns:a16="http://schemas.microsoft.com/office/drawing/2014/main" id="{9338C04E-CAB0-F4FE-1B79-D018A2E472AE}"/>
               </a:ext>
             </a:extLst>
           </p:cNvPr>
@@ -15033,197 +17586,75 @@
             <a:spLocks noGrp="1"/>
           </p:cNvSpPr>
           <p:nvPr>
-            <p:ph sz="half" idx="1"/>
-          </p:nvPr>
-        </p:nvSpPr>
-        <p:spPr>
-          <a:xfrm>
-            <a:off x="423949" y="1825625"/>
-            <a:ext cx="6143105" cy="4351338"/>
-          </a:xfrm>
-        </p:spPr>
-        <p:txBody>
-          <a:bodyPr/>
-          <a:lstStyle/>
-          <a:p>
-            <a:r>
-              <a:rPr lang="en-US" dirty="0"/>
-              <a:t>Each representation has 4 associated iterator classes: </a:t>
-            </a:r>
-            <a:r>
-              <a:rPr lang="en-US" sz="2400" dirty="0" err="1">
+            <p:ph idx="1"/>
+          </p:nvPr>
+        </p:nvSpPr>
+        <p:spPr/>
+        <p:txBody>
+          <a:bodyPr>
+            <a:normAutofit lnSpcReduction="10000"/>
+          </a:bodyPr>
+          <a:lstStyle/>
+          <a:p>
+            <a:r>
+              <a:rPr lang="en-US" dirty="0"/>
+              <a:t>WiredTiger API provides methods to position a cursor on any table and iterate from a valid position till the end of the table is reached</a:t>
+            </a:r>
+          </a:p>
+          <a:p>
+            <a:pPr lvl="1"/>
+            <a:r>
+              <a:rPr lang="en-US" dirty="0"/>
+              <a:t>We don’t want to allow the user to use these raw methods</a:t>
+            </a:r>
+          </a:p>
+          <a:p>
+            <a:r>
+              <a:rPr lang="en-US" dirty="0" err="1"/>
+              <a:t>GraphAPI</a:t>
+            </a:r>
+            <a:r>
+              <a:rPr lang="en-US" dirty="0"/>
+              <a:t> has methods to get a nodes entire neighborhoods, but these methods do not allow finding neighborhoods of multiple/range of nodes</a:t>
+            </a:r>
+          </a:p>
+          <a:p>
+            <a:pPr lvl="1"/>
+            <a:r>
+              <a:rPr lang="en-US" dirty="0"/>
+              <a:t>Doing so in the API would require a search for each node: HIGHLY INEFFICIENT</a:t>
+            </a:r>
+          </a:p>
+          <a:p>
+            <a:pPr lvl="1"/>
+            <a:r>
+              <a:rPr lang="en-US" dirty="0"/>
+              <a:t>Also, tedious, repetitive, and needs knowledge of the graph representation</a:t>
+            </a:r>
+          </a:p>
+          <a:p>
+            <a:pPr lvl="1"/>
+            <a:endParaRPr lang="en-US" dirty="0"/>
+          </a:p>
+          <a:p>
+            <a:r>
+              <a:rPr lang="en-US" dirty="0"/>
+              <a:t>Iterators allow the user to define a start key and an end key and call the </a:t>
+            </a:r>
+            <a:r>
+              <a:rPr lang="en-US" dirty="0">
                 <a:latin typeface="Courier New" panose="02070309020205020404" pitchFamily="49" charset="0"/>
                 <a:cs typeface="Courier New" panose="02070309020205020404" pitchFamily="49" charset="0"/>
               </a:rPr>
-              <a:t>EdgeCursor</a:t>
-            </a:r>
-            <a:r>
-              <a:rPr lang="en-US" sz="2400" dirty="0"/>
-              <a:t>, </a:t>
-            </a:r>
-            <a:r>
-              <a:rPr lang="en-US" sz="2400" dirty="0" err="1">
-                <a:latin typeface="Courier New" panose="02070309020205020404" pitchFamily="49" charset="0"/>
-                <a:cs typeface="Courier New" panose="02070309020205020404" pitchFamily="49" charset="0"/>
-              </a:rPr>
-              <a:t>InCursor</a:t>
-            </a:r>
-            <a:r>
-              <a:rPr lang="en-US" sz="2400" dirty="0"/>
-              <a:t>, </a:t>
-            </a:r>
-            <a:r>
-              <a:rPr lang="en-US" sz="2400" dirty="0" err="1">
-                <a:latin typeface="Courier New" panose="02070309020205020404" pitchFamily="49" charset="0"/>
-                <a:cs typeface="Courier New" panose="02070309020205020404" pitchFamily="49" charset="0"/>
-              </a:rPr>
-              <a:t>OutCursor</a:t>
-            </a:r>
-            <a:r>
-              <a:rPr lang="en-US" sz="2400" dirty="0"/>
-              <a:t>, and </a:t>
-            </a:r>
-            <a:r>
-              <a:rPr lang="en-US" sz="2400" dirty="0" err="1">
-                <a:latin typeface="Courier New" panose="02070309020205020404" pitchFamily="49" charset="0"/>
-                <a:cs typeface="Courier New" panose="02070309020205020404" pitchFamily="49" charset="0"/>
-              </a:rPr>
-              <a:t>NodeCursor</a:t>
-            </a:r>
-            <a:r>
-              <a:rPr lang="en-US" sz="2400" dirty="0"/>
-              <a:t> </a:t>
-            </a:r>
-          </a:p>
-          <a:p>
-            <a:r>
-              <a:rPr lang="en-US" sz="2400" dirty="0"/>
-              <a:t>All of these classes provide the same interface: </a:t>
-            </a:r>
-            <a:r>
-              <a:rPr lang="en-US" sz="2400" dirty="0" err="1">
-                <a:latin typeface="Courier New" panose="02070309020205020404" pitchFamily="49" charset="0"/>
-                <a:cs typeface="Courier New" panose="02070309020205020404" pitchFamily="49" charset="0"/>
-              </a:rPr>
-              <a:t>set_key_range</a:t>
-            </a:r>
-            <a:r>
-              <a:rPr lang="en-US" sz="2400" dirty="0">
-                <a:latin typeface="Courier New" panose="02070309020205020404" pitchFamily="49" charset="0"/>
-                <a:cs typeface="Courier New" panose="02070309020205020404" pitchFamily="49" charset="0"/>
-              </a:rPr>
-              <a:t>()</a:t>
-            </a:r>
-            <a:r>
-              <a:rPr lang="en-US" sz="2400" dirty="0"/>
-              <a:t>, </a:t>
-            </a:r>
-            <a:r>
-              <a:rPr lang="en-US" sz="2400" dirty="0">
-                <a:latin typeface="Courier New" panose="02070309020205020404" pitchFamily="49" charset="0"/>
-                <a:cs typeface="Courier New" panose="02070309020205020404" pitchFamily="49" charset="0"/>
-              </a:rPr>
-              <a:t>next()</a:t>
-            </a:r>
-            <a:r>
-              <a:rPr lang="en-US" sz="2400" dirty="0"/>
-              <a:t>, </a:t>
-            </a:r>
-            <a:r>
-              <a:rPr lang="en-US" sz="2400" dirty="0">
-                <a:latin typeface="Courier New" panose="02070309020205020404" pitchFamily="49" charset="0"/>
-                <a:cs typeface="Courier New" panose="02070309020205020404" pitchFamily="49" charset="0"/>
-              </a:rPr>
-              <a:t>reset()</a:t>
-            </a:r>
-            <a:r>
-              <a:rPr lang="en-US" sz="2400" dirty="0"/>
-              <a:t>, and </a:t>
-            </a:r>
-            <a:r>
-              <a:rPr lang="en-US" sz="2400" dirty="0">
-                <a:latin typeface="Courier New" panose="02070309020205020404" pitchFamily="49" charset="0"/>
-                <a:cs typeface="Courier New" panose="02070309020205020404" pitchFamily="49" charset="0"/>
-              </a:rPr>
-              <a:t>close()</a:t>
-            </a:r>
-          </a:p>
-          <a:p>
-            <a:pPr lvl="1"/>
-            <a:r>
-              <a:rPr lang="en-US" sz="2000" dirty="0">
-                <a:cs typeface="Courier New" panose="02070309020205020404" pitchFamily="49" charset="0"/>
-              </a:rPr>
-              <a:t>These methods abstract the internal representation being used </a:t>
-            </a:r>
-          </a:p>
-          <a:p>
-            <a:pPr lvl="1"/>
-            <a:r>
-              <a:rPr lang="en-US" sz="2000" dirty="0">
-                <a:latin typeface="Courier New" panose="02070309020205020404" pitchFamily="49" charset="0"/>
-                <a:cs typeface="Courier New" panose="02070309020205020404" pitchFamily="49" charset="0"/>
-              </a:rPr>
-              <a:t>next()</a:t>
-            </a:r>
-            <a:r>
-              <a:rPr lang="en-US" sz="2000" dirty="0">
-                <a:cs typeface="Courier New" panose="02070309020205020404" pitchFamily="49" charset="0"/>
-              </a:rPr>
-              <a:t>returns an </a:t>
-            </a:r>
-            <a:r>
-              <a:rPr lang="en-US" sz="2000" dirty="0" err="1">
-                <a:latin typeface="Courier New" panose="02070309020205020404" pitchFamily="49" charset="0"/>
-                <a:cs typeface="Courier New" panose="02070309020205020404" pitchFamily="49" charset="0"/>
-              </a:rPr>
-              <a:t>Out_Of_Band</a:t>
-            </a:r>
-            <a:r>
-              <a:rPr lang="en-US" sz="2000" dirty="0">
-                <a:latin typeface="Courier New" panose="02070309020205020404" pitchFamily="49" charset="0"/>
-                <a:cs typeface="Courier New" panose="02070309020205020404" pitchFamily="49" charset="0"/>
-              </a:rPr>
-              <a:t> </a:t>
-            </a:r>
-            <a:r>
-              <a:rPr lang="en-US" sz="2000" dirty="0">
-                <a:cs typeface="Courier New" panose="02070309020205020404" pitchFamily="49" charset="0"/>
-              </a:rPr>
-              <a:t>value when the range has been exhausted</a:t>
-            </a:r>
-          </a:p>
-        </p:txBody>
-      </p:sp>
-      <p:pic>
-        <p:nvPicPr>
-          <p:cNvPr id="8" name="Content Placeholder 7">
-            <a:extLst>
-              <a:ext uri="{FF2B5EF4-FFF2-40B4-BE49-F238E27FC236}">
-                <a16:creationId xmlns:a16="http://schemas.microsoft.com/office/drawing/2014/main" id="{47C51F84-AFD5-276E-F541-DC4117B40A9C}"/>
-              </a:ext>
-            </a:extLst>
-          </p:cNvPr>
-          <p:cNvPicPr>
-            <a:picLocks noGrp="1" noChangeAspect="1"/>
-          </p:cNvPicPr>
-          <p:nvPr>
-            <p:ph sz="half" idx="2"/>
-          </p:nvPr>
-        </p:nvPicPr>
-        <p:blipFill>
-          <a:blip r:embed="rId2"/>
-          <a:stretch>
-            <a:fillRect/>
-          </a:stretch>
-        </p:blipFill>
-        <p:spPr>
-          <a:xfrm>
-            <a:off x="6343609" y="1825625"/>
-            <a:ext cx="4838782" cy="4351338"/>
-          </a:xfrm>
-        </p:spPr>
-      </p:pic>
+              <a:t>next() </a:t>
+            </a:r>
+            <a:r>
+              <a:rPr lang="en-US" dirty="0"/>
+              <a:t>function to move to the next position</a:t>
+            </a:r>
+          </a:p>
+        </p:txBody>
+      </p:sp>
       <p:sp>
         <p:nvSpPr>
           <p:cNvPr id="5" name="Slide Number Placeholder 4">
@@ -15256,7 +17687,7 @@
     </p:spTree>
     <p:extLst>
       <p:ext uri="{BB962C8B-B14F-4D97-AF65-F5344CB8AC3E}">
-        <p14:creationId xmlns:p14="http://schemas.microsoft.com/office/powerpoint/2010/main" val="2878621549"/>
+        <p14:creationId xmlns:p14="http://schemas.microsoft.com/office/powerpoint/2010/main" val="1630116439"/>
       </p:ext>
     </p:extLst>
   </p:cSld>
@@ -15288,7 +17719,7 @@
           <p:cNvPr id="2" name="Title 1">
             <a:extLst>
               <a:ext uri="{FF2B5EF4-FFF2-40B4-BE49-F238E27FC236}">
-                <a16:creationId xmlns:a16="http://schemas.microsoft.com/office/drawing/2014/main" id="{83797069-7AFC-715E-BF5A-839CD6F8EACB}"/>
+                <a16:creationId xmlns:a16="http://schemas.microsoft.com/office/drawing/2014/main" id="{936E7246-6B7E-61B7-F3D2-A2EF951367DC}"/>
               </a:ext>
             </a:extLst>
           </p:cNvPr>
@@ -15306,17 +17737,17 @@
           <a:p>
             <a:r>
               <a:rPr lang="en-US" dirty="0"/>
-              <a:t>4.5 Managing Transient Attributes</a:t>
-            </a:r>
-          </a:p>
-        </p:txBody>
-      </p:sp>
-      <p:sp>
-        <p:nvSpPr>
-          <p:cNvPr id="3" name="Content Placeholder 2">
-            <a:extLst>
-              <a:ext uri="{FF2B5EF4-FFF2-40B4-BE49-F238E27FC236}">
-                <a16:creationId xmlns:a16="http://schemas.microsoft.com/office/drawing/2014/main" id="{6687423A-6E64-A749-3F64-5F02BBD22B21}"/>
+              <a:t>4.4.4 Iterators</a:t>
+            </a:r>
+          </a:p>
+        </p:txBody>
+      </p:sp>
+      <p:sp>
+        <p:nvSpPr>
+          <p:cNvPr id="4" name="Content Placeholder 3">
+            <a:extLst>
+              <a:ext uri="{FF2B5EF4-FFF2-40B4-BE49-F238E27FC236}">
+                <a16:creationId xmlns:a16="http://schemas.microsoft.com/office/drawing/2014/main" id="{A13956C0-39B4-2D8A-2251-28D533D0D7DB}"/>
               </a:ext>
             </a:extLst>
           </p:cNvPr>
@@ -15324,85 +17755,203 @@
             <a:spLocks noGrp="1"/>
           </p:cNvSpPr>
           <p:nvPr>
-            <p:ph idx="1"/>
+            <p:ph sz="half" idx="1"/>
           </p:nvPr>
         </p:nvSpPr>
         <p:spPr>
           <a:xfrm>
-            <a:off x="838200" y="1825624"/>
-            <a:ext cx="10515600" cy="4530725"/>
+            <a:off x="423949" y="1825625"/>
+            <a:ext cx="6143105" cy="4351338"/>
           </a:xfrm>
         </p:spPr>
         <p:txBody>
-          <a:bodyPr>
-            <a:normAutofit lnSpcReduction="10000"/>
-          </a:bodyPr>
-          <a:lstStyle/>
-          <a:p>
-            <a:r>
-              <a:rPr lang="en-US" dirty="0"/>
-              <a:t>An application can generate some temporary attributes while it runs</a:t>
+          <a:bodyPr/>
+          <a:lstStyle/>
+          <a:p>
+            <a:r>
+              <a:rPr lang="en-US" dirty="0"/>
+              <a:t>Each representation has 4 associated iterator classes: </a:t>
+            </a:r>
+            <a:r>
+              <a:rPr lang="en-US" sz="2400" dirty="0" err="1">
+                <a:latin typeface="Courier New" panose="02070309020205020404" pitchFamily="49" charset="0"/>
+                <a:cs typeface="Courier New" panose="02070309020205020404" pitchFamily="49" charset="0"/>
+              </a:rPr>
+              <a:t>EdgeCursor</a:t>
+            </a:r>
+            <a:r>
+              <a:rPr lang="en-US" sz="2400" dirty="0"/>
+              <a:t>, </a:t>
+            </a:r>
+            <a:r>
+              <a:rPr lang="en-US" sz="2400" dirty="0" err="1">
+                <a:latin typeface="Courier New" panose="02070309020205020404" pitchFamily="49" charset="0"/>
+                <a:cs typeface="Courier New" panose="02070309020205020404" pitchFamily="49" charset="0"/>
+              </a:rPr>
+              <a:t>InCursor</a:t>
+            </a:r>
+            <a:r>
+              <a:rPr lang="en-US" sz="2400" dirty="0"/>
+              <a:t>, </a:t>
+            </a:r>
+            <a:r>
+              <a:rPr lang="en-US" sz="2400" dirty="0" err="1">
+                <a:latin typeface="Courier New" panose="02070309020205020404" pitchFamily="49" charset="0"/>
+                <a:cs typeface="Courier New" panose="02070309020205020404" pitchFamily="49" charset="0"/>
+              </a:rPr>
+              <a:t>OutCursor</a:t>
+            </a:r>
+            <a:r>
+              <a:rPr lang="en-US" sz="2400" dirty="0"/>
+              <a:t>, and </a:t>
+            </a:r>
+            <a:r>
+              <a:rPr lang="en-US" sz="2400" dirty="0" err="1">
+                <a:latin typeface="Courier New" panose="02070309020205020404" pitchFamily="49" charset="0"/>
+                <a:cs typeface="Courier New" panose="02070309020205020404" pitchFamily="49" charset="0"/>
+              </a:rPr>
+              <a:t>NodeCursor</a:t>
+            </a:r>
+            <a:r>
+              <a:rPr lang="en-US" sz="2400" dirty="0"/>
+              <a:t> </a:t>
+            </a:r>
+          </a:p>
+          <a:p>
+            <a:r>
+              <a:rPr lang="en-US" sz="2400" dirty="0"/>
+              <a:t>All of these classes provide the same interface: </a:t>
+            </a:r>
+            <a:r>
+              <a:rPr lang="en-US" sz="2400" dirty="0" err="1">
+                <a:latin typeface="Courier New" panose="02070309020205020404" pitchFamily="49" charset="0"/>
+                <a:cs typeface="Courier New" panose="02070309020205020404" pitchFamily="49" charset="0"/>
+              </a:rPr>
+              <a:t>set_key_range</a:t>
+            </a:r>
+            <a:r>
+              <a:rPr lang="en-US" sz="2400" dirty="0">
+                <a:latin typeface="Courier New" panose="02070309020205020404" pitchFamily="49" charset="0"/>
+                <a:cs typeface="Courier New" panose="02070309020205020404" pitchFamily="49" charset="0"/>
+              </a:rPr>
+              <a:t>()</a:t>
+            </a:r>
+            <a:r>
+              <a:rPr lang="en-US" sz="2400" dirty="0"/>
+              <a:t>, </a:t>
+            </a:r>
+            <a:r>
+              <a:rPr lang="en-US" sz="2400" dirty="0">
+                <a:latin typeface="Courier New" panose="02070309020205020404" pitchFamily="49" charset="0"/>
+                <a:cs typeface="Courier New" panose="02070309020205020404" pitchFamily="49" charset="0"/>
+              </a:rPr>
+              <a:t>next()</a:t>
+            </a:r>
+            <a:r>
+              <a:rPr lang="en-US" sz="2400" dirty="0"/>
+              <a:t>, </a:t>
+            </a:r>
+            <a:r>
+              <a:rPr lang="en-US" sz="2400" dirty="0">
+                <a:latin typeface="Courier New" panose="02070309020205020404" pitchFamily="49" charset="0"/>
+                <a:cs typeface="Courier New" panose="02070309020205020404" pitchFamily="49" charset="0"/>
+              </a:rPr>
+              <a:t>reset()</a:t>
+            </a:r>
+            <a:r>
+              <a:rPr lang="en-US" sz="2400" dirty="0"/>
+              <a:t>, and </a:t>
+            </a:r>
+            <a:r>
+              <a:rPr lang="en-US" sz="2400" dirty="0">
+                <a:latin typeface="Courier New" panose="02070309020205020404" pitchFamily="49" charset="0"/>
+                <a:cs typeface="Courier New" panose="02070309020205020404" pitchFamily="49" charset="0"/>
+              </a:rPr>
+              <a:t>close()</a:t>
             </a:r>
           </a:p>
           <a:p>
             <a:pPr lvl="1"/>
             <a:r>
-              <a:rPr lang="en-US" dirty="0"/>
-              <a:t>For example: PR values while the algorithm hasn’t converged</a:t>
-            </a:r>
-          </a:p>
-          <a:p>
-            <a:r>
-              <a:rPr lang="en-US" dirty="0"/>
-              <a:t>These </a:t>
-            </a:r>
-            <a:r>
-              <a:rPr lang="en-US" i="1" dirty="0"/>
-              <a:t>might </a:t>
-            </a:r>
-            <a:r>
-              <a:rPr lang="en-US" dirty="0"/>
-              <a:t>become a permanent attribute depending on the user/app</a:t>
+              <a:rPr lang="en-US" sz="2000" dirty="0">
+                <a:cs typeface="Courier New" panose="02070309020205020404" pitchFamily="49" charset="0"/>
+              </a:rPr>
+              <a:t>These methods abstract the internal representation being used </a:t>
             </a:r>
           </a:p>
           <a:p>
             <a:pPr lvl="1"/>
             <a:r>
-              <a:rPr lang="en-US" dirty="0"/>
-              <a:t>But while it is still a temporary value, it should not be stored with formal attributes of a graph element</a:t>
-            </a:r>
-          </a:p>
-          <a:p>
-            <a:r>
-              <a:rPr lang="en-US" dirty="0"/>
-              <a:t>We call these </a:t>
-            </a:r>
-            <a:r>
-              <a:rPr lang="en-US" i="1" dirty="0"/>
-              <a:t>Transient Attributes</a:t>
-            </a:r>
-          </a:p>
-          <a:p>
-            <a:r>
-              <a:rPr lang="en-US" dirty="0"/>
-              <a:t>Typically, these are in-memory and lost when the application terminates</a:t>
-            </a:r>
-          </a:p>
-          <a:p>
-            <a:pPr lvl="1"/>
-            <a:r>
-              <a:rPr lang="en-US" dirty="0"/>
-              <a:t>We provide a mechanism to persist them and reuse them for the next round of computation</a:t>
-            </a:r>
-          </a:p>
-        </p:txBody>
-      </p:sp>
-      <p:sp>
-        <p:nvSpPr>
-          <p:cNvPr id="4" name="Slide Number Placeholder 3">
-            <a:extLst>
-              <a:ext uri="{FF2B5EF4-FFF2-40B4-BE49-F238E27FC236}">
-                <a16:creationId xmlns:a16="http://schemas.microsoft.com/office/drawing/2014/main" id="{AECF9358-0750-8AEF-3AB4-B755849C1E77}"/>
+              <a:rPr lang="en-US" sz="2000" dirty="0">
+                <a:latin typeface="Courier New" panose="02070309020205020404" pitchFamily="49" charset="0"/>
+                <a:cs typeface="Courier New" panose="02070309020205020404" pitchFamily="49" charset="0"/>
+              </a:rPr>
+              <a:t>next()</a:t>
+            </a:r>
+            <a:r>
+              <a:rPr lang="en-US" sz="2000" dirty="0">
+                <a:cs typeface="Courier New" panose="02070309020205020404" pitchFamily="49" charset="0"/>
+              </a:rPr>
+              <a:t>returns an </a:t>
+            </a:r>
+            <a:r>
+              <a:rPr lang="en-US" sz="2000" dirty="0" err="1">
+                <a:latin typeface="Courier New" panose="02070309020205020404" pitchFamily="49" charset="0"/>
+                <a:cs typeface="Courier New" panose="02070309020205020404" pitchFamily="49" charset="0"/>
+              </a:rPr>
+              <a:t>Out_Of_Band</a:t>
+            </a:r>
+            <a:r>
+              <a:rPr lang="en-US" sz="2000" dirty="0">
+                <a:latin typeface="Courier New" panose="02070309020205020404" pitchFamily="49" charset="0"/>
+                <a:cs typeface="Courier New" panose="02070309020205020404" pitchFamily="49" charset="0"/>
+              </a:rPr>
+              <a:t> </a:t>
+            </a:r>
+            <a:r>
+              <a:rPr lang="en-US" sz="2000" dirty="0">
+                <a:cs typeface="Courier New" panose="02070309020205020404" pitchFamily="49" charset="0"/>
+              </a:rPr>
+              <a:t>value when the range has been exhausted</a:t>
+            </a:r>
+          </a:p>
+        </p:txBody>
+      </p:sp>
+      <p:pic>
+        <p:nvPicPr>
+          <p:cNvPr id="8" name="Content Placeholder 7">
+            <a:extLst>
+              <a:ext uri="{FF2B5EF4-FFF2-40B4-BE49-F238E27FC236}">
+                <a16:creationId xmlns:a16="http://schemas.microsoft.com/office/drawing/2014/main" id="{47C51F84-AFD5-276E-F541-DC4117B40A9C}"/>
+              </a:ext>
+            </a:extLst>
+          </p:cNvPr>
+          <p:cNvPicPr>
+            <a:picLocks noGrp="1" noChangeAspect="1"/>
+          </p:cNvPicPr>
+          <p:nvPr>
+            <p:ph sz="half" idx="2"/>
+          </p:nvPr>
+        </p:nvPicPr>
+        <p:blipFill>
+          <a:blip r:embed="rId2"/>
+          <a:stretch>
+            <a:fillRect/>
+          </a:stretch>
+        </p:blipFill>
+        <p:spPr>
+          <a:xfrm>
+            <a:off x="6343609" y="1825625"/>
+            <a:ext cx="4838782" cy="4351338"/>
+          </a:xfrm>
+        </p:spPr>
+      </p:pic>
+      <p:sp>
+        <p:nvSpPr>
+          <p:cNvPr id="5" name="Slide Number Placeholder 4">
+            <a:extLst>
+              <a:ext uri="{FF2B5EF4-FFF2-40B4-BE49-F238E27FC236}">
+                <a16:creationId xmlns:a16="http://schemas.microsoft.com/office/drawing/2014/main" id="{2415E8F0-3257-2368-AC44-E7B86F78F485}"/>
               </a:ext>
             </a:extLst>
           </p:cNvPr>
@@ -15429,7 +17978,7 @@
     </p:spTree>
     <p:extLst>
       <p:ext uri="{BB962C8B-B14F-4D97-AF65-F5344CB8AC3E}">
-        <p14:creationId xmlns:p14="http://schemas.microsoft.com/office/powerpoint/2010/main" val="936944515"/>
+        <p14:creationId xmlns:p14="http://schemas.microsoft.com/office/powerpoint/2010/main" val="2878621549"/>
       </p:ext>
     </p:extLst>
   </p:cSld>
@@ -15486,6 +18035,92 @@
       </p:sp>
       <p:sp>
         <p:nvSpPr>
+          <p:cNvPr id="3" name="Content Placeholder 2">
+            <a:extLst>
+              <a:ext uri="{FF2B5EF4-FFF2-40B4-BE49-F238E27FC236}">
+                <a16:creationId xmlns:a16="http://schemas.microsoft.com/office/drawing/2014/main" id="{6687423A-6E64-A749-3F64-5F02BBD22B21}"/>
+              </a:ext>
+            </a:extLst>
+          </p:cNvPr>
+          <p:cNvSpPr>
+            <a:spLocks noGrp="1"/>
+          </p:cNvSpPr>
+          <p:nvPr>
+            <p:ph idx="1"/>
+          </p:nvPr>
+        </p:nvSpPr>
+        <p:spPr>
+          <a:xfrm>
+            <a:off x="838200" y="1825624"/>
+            <a:ext cx="10515600" cy="4530725"/>
+          </a:xfrm>
+        </p:spPr>
+        <p:txBody>
+          <a:bodyPr>
+            <a:normAutofit lnSpcReduction="10000"/>
+          </a:bodyPr>
+          <a:lstStyle/>
+          <a:p>
+            <a:r>
+              <a:rPr lang="en-US" dirty="0"/>
+              <a:t>An application can generate some temporary attributes while it runs</a:t>
+            </a:r>
+          </a:p>
+          <a:p>
+            <a:pPr lvl="1"/>
+            <a:r>
+              <a:rPr lang="en-US" dirty="0"/>
+              <a:t>For example: PR values while the algorithm hasn’t converged</a:t>
+            </a:r>
+          </a:p>
+          <a:p>
+            <a:r>
+              <a:rPr lang="en-US" dirty="0"/>
+              <a:t>These </a:t>
+            </a:r>
+            <a:r>
+              <a:rPr lang="en-US" i="1" dirty="0"/>
+              <a:t>might </a:t>
+            </a:r>
+            <a:r>
+              <a:rPr lang="en-US" dirty="0"/>
+              <a:t>become a permanent attribute depending on the user/app</a:t>
+            </a:r>
+          </a:p>
+          <a:p>
+            <a:pPr lvl="1"/>
+            <a:r>
+              <a:rPr lang="en-US" dirty="0"/>
+              <a:t>But while it is still a temporary value, it should not be stored with formal attributes of a graph element</a:t>
+            </a:r>
+          </a:p>
+          <a:p>
+            <a:r>
+              <a:rPr lang="en-US" dirty="0"/>
+              <a:t>We call these </a:t>
+            </a:r>
+            <a:r>
+              <a:rPr lang="en-US" i="1" dirty="0"/>
+              <a:t>Transient Attributes</a:t>
+            </a:r>
+          </a:p>
+          <a:p>
+            <a:r>
+              <a:rPr lang="en-US" dirty="0"/>
+              <a:t>Typically, these are in-memory and lost when the application terminates</a:t>
+            </a:r>
+          </a:p>
+          <a:p>
+            <a:pPr lvl="1"/>
+            <a:r>
+              <a:rPr lang="en-US" dirty="0"/>
+              <a:t>We provide a mechanism to persist them and reuse them for the next round of computation</a:t>
+            </a:r>
+          </a:p>
+        </p:txBody>
+      </p:sp>
+      <p:sp>
+        <p:nvSpPr>
           <p:cNvPr id="4" name="Slide Number Placeholder 3">
             <a:extLst>
               <a:ext uri="{FF2B5EF4-FFF2-40B4-BE49-F238E27FC236}">
@@ -15513,99 +18148,10 @@
           </a:p>
         </p:txBody>
       </p:sp>
-      <p:sp>
-        <p:nvSpPr>
-          <p:cNvPr id="6" name="Content Placeholder 5">
-            <a:extLst>
-              <a:ext uri="{FF2B5EF4-FFF2-40B4-BE49-F238E27FC236}">
-                <a16:creationId xmlns:a16="http://schemas.microsoft.com/office/drawing/2014/main" id="{0ABF42C9-A5E5-6948-1C95-C5E1CBFF3112}"/>
-              </a:ext>
-            </a:extLst>
-          </p:cNvPr>
-          <p:cNvSpPr>
-            <a:spLocks noGrp="1"/>
-          </p:cNvSpPr>
-          <p:nvPr>
-            <p:ph idx="1"/>
-          </p:nvPr>
-        </p:nvSpPr>
-        <p:spPr/>
-        <p:txBody>
-          <a:bodyPr>
-            <a:normAutofit lnSpcReduction="10000"/>
-          </a:bodyPr>
-          <a:lstStyle/>
-          <a:p>
-            <a:r>
-              <a:rPr lang="en-US" dirty="0"/>
-              <a:t>Flexograph stores Transient attributes in a file-backed </a:t>
-            </a:r>
-            <a:r>
-              <a:rPr lang="en-US" dirty="0" err="1">
-                <a:latin typeface="Courier New" panose="02070309020205020404" pitchFamily="49" charset="0"/>
-                <a:cs typeface="Courier New" panose="02070309020205020404" pitchFamily="49" charset="0"/>
-              </a:rPr>
-              <a:t>mmap</a:t>
-            </a:r>
-            <a:r>
-              <a:rPr lang="en-US" dirty="0"/>
-              <a:t> region</a:t>
-            </a:r>
-          </a:p>
-          <a:p>
-            <a:r>
-              <a:rPr lang="en-US" dirty="0"/>
-              <a:t>The </a:t>
-            </a:r>
-            <a:r>
-              <a:rPr lang="en-US" dirty="0" err="1"/>
-              <a:t>GraphAPI</a:t>
-            </a:r>
-            <a:r>
-              <a:rPr lang="en-US" dirty="0"/>
-              <a:t> handles the initialization of this region and also the syncing and </a:t>
-            </a:r>
-            <a:r>
-              <a:rPr lang="en-US" dirty="0" err="1"/>
-              <a:t>unmapping</a:t>
-            </a:r>
-            <a:r>
-              <a:rPr lang="en-US" dirty="0"/>
-              <a:t> when the application terminates</a:t>
-            </a:r>
-          </a:p>
-          <a:p>
-            <a:endParaRPr lang="en-US" dirty="0"/>
-          </a:p>
-          <a:p>
-            <a:r>
-              <a:rPr lang="en-US" dirty="0"/>
-              <a:t>If an application wishes to reuse an old transient attribute file for bootstrapping the next round of computation, it must </a:t>
-            </a:r>
-            <a:r>
-              <a:rPr lang="en-US" b="1" dirty="0"/>
-              <a:t>reconcile the old region and the changes in the graph </a:t>
-            </a:r>
-            <a:r>
-              <a:rPr lang="en-US" dirty="0"/>
-              <a:t>that have happened</a:t>
-            </a:r>
-          </a:p>
-          <a:p>
-            <a:endParaRPr lang="en-US" dirty="0"/>
-          </a:p>
-          <a:p>
-            <a:r>
-              <a:rPr lang="en-US" dirty="0"/>
-              <a:t>Can be automatically handled as long as a few rule are met: no vertex ID reuse, and the schema of the transient attributes does not change</a:t>
-            </a:r>
-          </a:p>
-        </p:txBody>
-      </p:sp>
     </p:spTree>
     <p:extLst>
       <p:ext uri="{BB962C8B-B14F-4D97-AF65-F5344CB8AC3E}">
-        <p14:creationId xmlns:p14="http://schemas.microsoft.com/office/powerpoint/2010/main" val="2194443322"/>
+        <p14:creationId xmlns:p14="http://schemas.microsoft.com/office/powerpoint/2010/main" val="936944515"/>
       </p:ext>
     </p:extLst>
   </p:cSld>
@@ -15637,7 +18183,7 @@
           <p:cNvPr id="2" name="Title 1">
             <a:extLst>
               <a:ext uri="{FF2B5EF4-FFF2-40B4-BE49-F238E27FC236}">
-                <a16:creationId xmlns:a16="http://schemas.microsoft.com/office/drawing/2014/main" id="{D6991EC3-ABB1-71BD-AE14-1847CDB9F468}"/>
+                <a16:creationId xmlns:a16="http://schemas.microsoft.com/office/drawing/2014/main" id="{83797069-7AFC-715E-BF5A-839CD6F8EACB}"/>
               </a:ext>
             </a:extLst>
           </p:cNvPr>
@@ -15655,33 +18201,8 @@
           <a:p>
             <a:r>
               <a:rPr lang="en-US" dirty="0"/>
-              <a:t>4.6 Bulk Loading Graphs</a:t>
-            </a:r>
-          </a:p>
-        </p:txBody>
-      </p:sp>
-      <p:sp>
-        <p:nvSpPr>
-          <p:cNvPr id="3" name="Content Placeholder 2">
-            <a:extLst>
-              <a:ext uri="{FF2B5EF4-FFF2-40B4-BE49-F238E27FC236}">
-                <a16:creationId xmlns:a16="http://schemas.microsoft.com/office/drawing/2014/main" id="{8EE26C49-04BE-0939-3EE9-4E2CFEA2DFBA}"/>
-              </a:ext>
-            </a:extLst>
-          </p:cNvPr>
-          <p:cNvSpPr>
-            <a:spLocks noGrp="1"/>
-          </p:cNvSpPr>
-          <p:nvPr>
-            <p:ph idx="1"/>
-          </p:nvPr>
-        </p:nvSpPr>
-        <p:spPr/>
-        <p:txBody>
-          <a:bodyPr/>
-          <a:lstStyle/>
-          <a:p>
-            <a:endParaRPr lang="en-US"/>
+              <a:t>4.5 Managing Transient Attributes</a:t>
+            </a:r>
           </a:p>
         </p:txBody>
       </p:sp>
@@ -15690,7 +18211,7 @@
           <p:cNvPr id="4" name="Slide Number Placeholder 3">
             <a:extLst>
               <a:ext uri="{FF2B5EF4-FFF2-40B4-BE49-F238E27FC236}">
-                <a16:creationId xmlns:a16="http://schemas.microsoft.com/office/drawing/2014/main" id="{F3D7032B-5F1A-7029-E804-6C72216D06EC}"/>
+                <a16:creationId xmlns:a16="http://schemas.microsoft.com/office/drawing/2014/main" id="{AECF9358-0750-8AEF-3AB4-B755849C1E77}"/>
               </a:ext>
             </a:extLst>
           </p:cNvPr>
@@ -15709,6 +18230,207 @@
             <a:fld id="{EEBEF218-D4C5-B946-BB13-027BCA6FFA2A}" type="slidenum">
               <a:rPr lang="en-US" smtClean="0"/>
               <a:t>34</a:t>
+            </a:fld>
+            <a:endParaRPr lang="en-US"/>
+          </a:p>
+        </p:txBody>
+      </p:sp>
+      <p:sp>
+        <p:nvSpPr>
+          <p:cNvPr id="6" name="Content Placeholder 5">
+            <a:extLst>
+              <a:ext uri="{FF2B5EF4-FFF2-40B4-BE49-F238E27FC236}">
+                <a16:creationId xmlns:a16="http://schemas.microsoft.com/office/drawing/2014/main" id="{0ABF42C9-A5E5-6948-1C95-C5E1CBFF3112}"/>
+              </a:ext>
+            </a:extLst>
+          </p:cNvPr>
+          <p:cNvSpPr>
+            <a:spLocks noGrp="1"/>
+          </p:cNvSpPr>
+          <p:nvPr>
+            <p:ph idx="1"/>
+          </p:nvPr>
+        </p:nvSpPr>
+        <p:spPr/>
+        <p:txBody>
+          <a:bodyPr>
+            <a:normAutofit lnSpcReduction="10000"/>
+          </a:bodyPr>
+          <a:lstStyle/>
+          <a:p>
+            <a:r>
+              <a:rPr lang="en-US" dirty="0"/>
+              <a:t>Flexograph stores Transient attributes in a file-backed </a:t>
+            </a:r>
+            <a:r>
+              <a:rPr lang="en-US" dirty="0" err="1">
+                <a:latin typeface="Courier New" panose="02070309020205020404" pitchFamily="49" charset="0"/>
+                <a:cs typeface="Courier New" panose="02070309020205020404" pitchFamily="49" charset="0"/>
+              </a:rPr>
+              <a:t>mmap</a:t>
+            </a:r>
+            <a:r>
+              <a:rPr lang="en-US" dirty="0"/>
+              <a:t> region</a:t>
+            </a:r>
+          </a:p>
+          <a:p>
+            <a:r>
+              <a:rPr lang="en-US" dirty="0"/>
+              <a:t>The </a:t>
+            </a:r>
+            <a:r>
+              <a:rPr lang="en-US" dirty="0" err="1"/>
+              <a:t>GraphAPI</a:t>
+            </a:r>
+            <a:r>
+              <a:rPr lang="en-US" dirty="0"/>
+              <a:t> handles the initialization of this region and also the syncing and </a:t>
+            </a:r>
+            <a:r>
+              <a:rPr lang="en-US" dirty="0" err="1"/>
+              <a:t>unmapping</a:t>
+            </a:r>
+            <a:r>
+              <a:rPr lang="en-US" dirty="0"/>
+              <a:t> when the application terminates</a:t>
+            </a:r>
+          </a:p>
+          <a:p>
+            <a:endParaRPr lang="en-US" dirty="0"/>
+          </a:p>
+          <a:p>
+            <a:r>
+              <a:rPr lang="en-US" dirty="0"/>
+              <a:t>If an application wishes to reuse an old transient attribute file for bootstrapping the next round of computation, it must </a:t>
+            </a:r>
+            <a:r>
+              <a:rPr lang="en-US" b="1" dirty="0"/>
+              <a:t>reconcile the old region and the changes in the graph </a:t>
+            </a:r>
+            <a:r>
+              <a:rPr lang="en-US" dirty="0"/>
+              <a:t>that have happened</a:t>
+            </a:r>
+          </a:p>
+          <a:p>
+            <a:endParaRPr lang="en-US" dirty="0"/>
+          </a:p>
+          <a:p>
+            <a:r>
+              <a:rPr lang="en-US" dirty="0"/>
+              <a:t>Can be automatically handled as long as a few rule are met: no vertex ID reuse, and the schema of the transient attributes does not change</a:t>
+            </a:r>
+          </a:p>
+        </p:txBody>
+      </p:sp>
+    </p:spTree>
+    <p:extLst>
+      <p:ext uri="{BB962C8B-B14F-4D97-AF65-F5344CB8AC3E}">
+        <p14:creationId xmlns:p14="http://schemas.microsoft.com/office/powerpoint/2010/main" val="2194443322"/>
+      </p:ext>
+    </p:extLst>
+  </p:cSld>
+  <p:clrMapOvr>
+    <a:masterClrMapping/>
+  </p:clrMapOvr>
+</p:sld>
+</file>
+
+<file path=ppt/slides/slide35.xml><?xml version="1.0" encoding="utf-8"?>
+<p:sld xmlns:a="http://schemas.openxmlformats.org/drawingml/2006/main" xmlns:r="http://schemas.openxmlformats.org/officeDocument/2006/relationships" xmlns:p="http://schemas.openxmlformats.org/presentationml/2006/main">
+  <p:cSld>
+    <p:spTree>
+      <p:nvGrpSpPr>
+        <p:cNvPr id="1" name=""/>
+        <p:cNvGrpSpPr/>
+        <p:nvPr/>
+      </p:nvGrpSpPr>
+      <p:grpSpPr>
+        <a:xfrm>
+          <a:off x="0" y="0"/>
+          <a:ext cx="0" cy="0"/>
+          <a:chOff x="0" y="0"/>
+          <a:chExt cx="0" cy="0"/>
+        </a:xfrm>
+      </p:grpSpPr>
+      <p:sp>
+        <p:nvSpPr>
+          <p:cNvPr id="2" name="Title 1">
+            <a:extLst>
+              <a:ext uri="{FF2B5EF4-FFF2-40B4-BE49-F238E27FC236}">
+                <a16:creationId xmlns:a16="http://schemas.microsoft.com/office/drawing/2014/main" id="{D6991EC3-ABB1-71BD-AE14-1847CDB9F468}"/>
+              </a:ext>
+            </a:extLst>
+          </p:cNvPr>
+          <p:cNvSpPr>
+            <a:spLocks noGrp="1"/>
+          </p:cNvSpPr>
+          <p:nvPr>
+            <p:ph type="title"/>
+          </p:nvPr>
+        </p:nvSpPr>
+        <p:spPr/>
+        <p:txBody>
+          <a:bodyPr/>
+          <a:lstStyle/>
+          <a:p>
+            <a:r>
+              <a:rPr lang="en-US" dirty="0"/>
+              <a:t>4.6 Bulk Loading Graphs</a:t>
+            </a:r>
+          </a:p>
+        </p:txBody>
+      </p:sp>
+      <p:sp>
+        <p:nvSpPr>
+          <p:cNvPr id="3" name="Content Placeholder 2">
+            <a:extLst>
+              <a:ext uri="{FF2B5EF4-FFF2-40B4-BE49-F238E27FC236}">
+                <a16:creationId xmlns:a16="http://schemas.microsoft.com/office/drawing/2014/main" id="{8EE26C49-04BE-0939-3EE9-4E2CFEA2DFBA}"/>
+              </a:ext>
+            </a:extLst>
+          </p:cNvPr>
+          <p:cNvSpPr>
+            <a:spLocks noGrp="1"/>
+          </p:cNvSpPr>
+          <p:nvPr>
+            <p:ph idx="1"/>
+          </p:nvPr>
+        </p:nvSpPr>
+        <p:spPr/>
+        <p:txBody>
+          <a:bodyPr/>
+          <a:lstStyle/>
+          <a:p>
+            <a:endParaRPr lang="en-US"/>
+          </a:p>
+        </p:txBody>
+      </p:sp>
+      <p:sp>
+        <p:nvSpPr>
+          <p:cNvPr id="4" name="Slide Number Placeholder 3">
+            <a:extLst>
+              <a:ext uri="{FF2B5EF4-FFF2-40B4-BE49-F238E27FC236}">
+                <a16:creationId xmlns:a16="http://schemas.microsoft.com/office/drawing/2014/main" id="{F3D7032B-5F1A-7029-E804-6C72216D06EC}"/>
+              </a:ext>
+            </a:extLst>
+          </p:cNvPr>
+          <p:cNvSpPr>
+            <a:spLocks noGrp="1"/>
+          </p:cNvSpPr>
+          <p:nvPr>
+            <p:ph type="sldNum" sz="quarter" idx="12"/>
+          </p:nvPr>
+        </p:nvSpPr>
+        <p:spPr/>
+        <p:txBody>
+          <a:bodyPr/>
+          <a:lstStyle/>
+          <a:p>
+            <a:fld id="{EEBEF218-D4C5-B946-BB13-027BCA6FFA2A}" type="slidenum">
+              <a:rPr lang="en-US" smtClean="0"/>
+              <a:t>35</a:t>
             </a:fld>
             <a:endParaRPr lang="en-US"/>
           </a:p>
@@ -15930,6 +18652,121 @@
           <p:cNvPr id="2" name="Title 1">
             <a:extLst>
               <a:ext uri="{FF2B5EF4-FFF2-40B4-BE49-F238E27FC236}">
+                <a16:creationId xmlns:a16="http://schemas.microsoft.com/office/drawing/2014/main" id="{EFFFF062-06DE-7FC4-08A5-B476277B05C9}"/>
+              </a:ext>
+            </a:extLst>
+          </p:cNvPr>
+          <p:cNvSpPr>
+            <a:spLocks noGrp="1"/>
+          </p:cNvSpPr>
+          <p:nvPr>
+            <p:ph type="title"/>
+          </p:nvPr>
+        </p:nvSpPr>
+        <p:spPr/>
+        <p:txBody>
+          <a:bodyPr/>
+          <a:lstStyle/>
+          <a:p>
+            <a:endParaRPr lang="en-US" dirty="0"/>
+          </a:p>
+        </p:txBody>
+      </p:sp>
+      <p:graphicFrame>
+        <p:nvGraphicFramePr>
+          <p:cNvPr id="5" name="Content Placeholder 4">
+            <a:extLst>
+              <a:ext uri="{FF2B5EF4-FFF2-40B4-BE49-F238E27FC236}">
+                <a16:creationId xmlns:a16="http://schemas.microsoft.com/office/drawing/2014/main" id="{29041D96-F7C1-41D9-A9D2-CBEAE3ED36C2}"/>
+              </a:ext>
+            </a:extLst>
+          </p:cNvPr>
+          <p:cNvGraphicFramePr>
+            <a:graphicFrameLocks noGrp="1"/>
+          </p:cNvGraphicFramePr>
+          <p:nvPr>
+            <p:ph idx="1"/>
+            <p:extLst>
+              <p:ext uri="{D42A27DB-BD31-4B8C-83A1-F6EECF244321}">
+                <p14:modId xmlns:p14="http://schemas.microsoft.com/office/powerpoint/2010/main" val="3841958357"/>
+              </p:ext>
+            </p:extLst>
+          </p:nvPr>
+        </p:nvGraphicFramePr>
+        <p:xfrm>
+          <a:off x="838200" y="1776248"/>
+          <a:ext cx="7519988" cy="5081752"/>
+        </p:xfrm>
+        <a:graphic>
+          <a:graphicData uri="http://schemas.openxmlformats.org/drawingml/2006/diagram">
+            <dgm:relIds xmlns:dgm="http://schemas.openxmlformats.org/drawingml/2006/diagram" xmlns:r="http://schemas.openxmlformats.org/officeDocument/2006/relationships" r:dm="rId2" r:lo="rId3" r:qs="rId4" r:cs="rId5"/>
+          </a:graphicData>
+        </a:graphic>
+      </p:graphicFrame>
+      <p:sp>
+        <p:nvSpPr>
+          <p:cNvPr id="4" name="Slide Number Placeholder 3">
+            <a:extLst>
+              <a:ext uri="{FF2B5EF4-FFF2-40B4-BE49-F238E27FC236}">
+                <a16:creationId xmlns:a16="http://schemas.microsoft.com/office/drawing/2014/main" id="{8904322B-5B18-43A6-F7DE-0B4AB678AE62}"/>
+              </a:ext>
+            </a:extLst>
+          </p:cNvPr>
+          <p:cNvSpPr>
+            <a:spLocks noGrp="1"/>
+          </p:cNvSpPr>
+          <p:nvPr>
+            <p:ph type="sldNum" sz="quarter" idx="12"/>
+          </p:nvPr>
+        </p:nvSpPr>
+        <p:spPr/>
+        <p:txBody>
+          <a:bodyPr/>
+          <a:lstStyle/>
+          <a:p>
+            <a:fld id="{EEBEF218-D4C5-B946-BB13-027BCA6FFA2A}" type="slidenum">
+              <a:rPr lang="en-US" smtClean="0"/>
+              <a:t>5</a:t>
+            </a:fld>
+            <a:endParaRPr lang="en-US"/>
+          </a:p>
+        </p:txBody>
+      </p:sp>
+    </p:spTree>
+    <p:extLst>
+      <p:ext uri="{BB962C8B-B14F-4D97-AF65-F5344CB8AC3E}">
+        <p14:creationId xmlns:p14="http://schemas.microsoft.com/office/powerpoint/2010/main" val="3075488350"/>
+      </p:ext>
+    </p:extLst>
+  </p:cSld>
+  <p:clrMapOvr>
+    <a:masterClrMapping/>
+  </p:clrMapOvr>
+</p:sld>
+</file>
+
+<file path=ppt/slides/slide6.xml><?xml version="1.0" encoding="utf-8"?>
+<p:sld xmlns:a="http://schemas.openxmlformats.org/drawingml/2006/main" xmlns:r="http://schemas.openxmlformats.org/officeDocument/2006/relationships" xmlns:p="http://schemas.openxmlformats.org/presentationml/2006/main">
+  <p:cSld>
+    <p:spTree>
+      <p:nvGrpSpPr>
+        <p:cNvPr id="1" name=""/>
+        <p:cNvGrpSpPr/>
+        <p:nvPr/>
+      </p:nvGrpSpPr>
+      <p:grpSpPr>
+        <a:xfrm>
+          <a:off x="0" y="0"/>
+          <a:ext cx="0" cy="0"/>
+          <a:chOff x="0" y="0"/>
+          <a:chExt cx="0" cy="0"/>
+        </a:xfrm>
+      </p:grpSpPr>
+      <p:sp>
+        <p:nvSpPr>
+          <p:cNvPr id="2" name="Title 1">
+            <a:extLst>
+              <a:ext uri="{FF2B5EF4-FFF2-40B4-BE49-F238E27FC236}">
                 <a16:creationId xmlns:a16="http://schemas.microsoft.com/office/drawing/2014/main" id="{67B16E0B-52F7-C3E0-B916-8CBEBC615F31}"/>
               </a:ext>
             </a:extLst>
@@ -16022,7 +18859,7 @@
           <a:p>
             <a:fld id="{EEBEF218-D4C5-B946-BB13-027BCA6FFA2A}" type="slidenum">
               <a:rPr lang="en-US" smtClean="0"/>
-              <a:t>5</a:t>
+              <a:t>6</a:t>
             </a:fld>
             <a:endParaRPr lang="en-US"/>
           </a:p>
@@ -16534,7 +19371,7 @@
 </p:sld>
 </file>
 
-<file path=ppt/slides/slide6.xml><?xml version="1.0" encoding="utf-8"?>
+<file path=ppt/slides/slide7.xml><?xml version="1.0" encoding="utf-8"?>
 <p:sld xmlns:a="http://schemas.openxmlformats.org/drawingml/2006/main" xmlns:r="http://schemas.openxmlformats.org/officeDocument/2006/relationships" xmlns:p="http://schemas.openxmlformats.org/presentationml/2006/main">
   <p:cSld>
     <p:spTree>
@@ -16696,7 +19533,7 @@
           <a:p>
             <a:fld id="{EEBEF218-D4C5-B946-BB13-027BCA6FFA2A}" type="slidenum">
               <a:rPr lang="en-US" smtClean="0"/>
-              <a:t>6</a:t>
+              <a:t>7</a:t>
             </a:fld>
             <a:endParaRPr lang="en-US"/>
           </a:p>
@@ -16745,7 +19582,7 @@
 </p:sld>
 </file>
 
-<file path=ppt/slides/slide7.xml><?xml version="1.0" encoding="utf-8"?>
+<file path=ppt/slides/slide8.xml><?xml version="1.0" encoding="utf-8"?>
 <p:sld xmlns:a="http://schemas.openxmlformats.org/drawingml/2006/main" xmlns:r="http://schemas.openxmlformats.org/officeDocument/2006/relationships" xmlns:p="http://schemas.openxmlformats.org/presentationml/2006/main" show="0">
   <p:cSld>
     <p:bg>
@@ -17180,7 +20017,7 @@
                   <a:spcPts val="600"/>
                 </a:spcAft>
               </a:pPr>
-              <a:t>7</a:t>
+              <a:t>8</a:t>
             </a:fld>
             <a:endParaRPr lang="en-US">
               <a:solidFill>
@@ -17343,7 +20180,7 @@
 </p:sld>
 </file>
 
-<file path=ppt/slides/slide8.xml><?xml version="1.0" encoding="utf-8"?>
+<file path=ppt/slides/slide9.xml><?xml version="1.0" encoding="utf-8"?>
 <p:sld xmlns:a="http://schemas.openxmlformats.org/drawingml/2006/main" xmlns:r="http://schemas.openxmlformats.org/officeDocument/2006/relationships" xmlns:p="http://schemas.openxmlformats.org/presentationml/2006/main" show="0">
   <p:cSld>
     <p:bg>
@@ -17523,7 +20360,7 @@
                   <a:spcPts val="600"/>
                 </a:spcAft>
               </a:pPr>
-              <a:t>8</a:t>
+              <a:t>9</a:t>
             </a:fld>
             <a:endParaRPr lang="en-US">
               <a:solidFill>
@@ -17625,239 +20462,6 @@
     <p:extLst>
       <p:ext uri="{BB962C8B-B14F-4D97-AF65-F5344CB8AC3E}">
         <p14:creationId xmlns:p14="http://schemas.microsoft.com/office/powerpoint/2010/main" val="2374684051"/>
-      </p:ext>
-    </p:extLst>
-  </p:cSld>
-  <p:clrMapOvr>
-    <a:masterClrMapping/>
-  </p:clrMapOvr>
-</p:sld>
-</file>
-
-<file path=ppt/slides/slide9.xml><?xml version="1.0" encoding="utf-8"?>
-<p:sld xmlns:a="http://schemas.openxmlformats.org/drawingml/2006/main" xmlns:r="http://schemas.openxmlformats.org/officeDocument/2006/relationships" xmlns:p="http://schemas.openxmlformats.org/presentationml/2006/main">
-  <p:cSld>
-    <p:spTree>
-      <p:nvGrpSpPr>
-        <p:cNvPr id="1" name=""/>
-        <p:cNvGrpSpPr/>
-        <p:nvPr/>
-      </p:nvGrpSpPr>
-      <p:grpSpPr>
-        <a:xfrm>
-          <a:off x="0" y="0"/>
-          <a:ext cx="0" cy="0"/>
-          <a:chOff x="0" y="0"/>
-          <a:chExt cx="0" cy="0"/>
-        </a:xfrm>
-      </p:grpSpPr>
-      <p:sp>
-        <p:nvSpPr>
-          <p:cNvPr id="2" name="Title 1">
-            <a:extLst>
-              <a:ext uri="{FF2B5EF4-FFF2-40B4-BE49-F238E27FC236}">
-                <a16:creationId xmlns:a16="http://schemas.microsoft.com/office/drawing/2014/main" id="{40FF12ED-456E-BAED-281B-8F9FE4E7131B}"/>
-              </a:ext>
-            </a:extLst>
-          </p:cNvPr>
-          <p:cNvSpPr>
-            <a:spLocks noGrp="1"/>
-          </p:cNvSpPr>
-          <p:nvPr>
-            <p:ph type="title"/>
-          </p:nvPr>
-        </p:nvSpPr>
-        <p:spPr/>
-        <p:txBody>
-          <a:bodyPr/>
-          <a:lstStyle/>
-          <a:p>
-            <a:r>
-              <a:rPr lang="en-US" dirty="0"/>
-              <a:t>4.3 Flexograph Architecture</a:t>
-            </a:r>
-          </a:p>
-        </p:txBody>
-      </p:sp>
-      <p:sp>
-        <p:nvSpPr>
-          <p:cNvPr id="7" name="Content Placeholder 6">
-            <a:extLst>
-              <a:ext uri="{FF2B5EF4-FFF2-40B4-BE49-F238E27FC236}">
-                <a16:creationId xmlns:a16="http://schemas.microsoft.com/office/drawing/2014/main" id="{C8B77D4E-FDF0-2DFE-153B-59C3DDCF605F}"/>
-              </a:ext>
-            </a:extLst>
-          </p:cNvPr>
-          <p:cNvSpPr>
-            <a:spLocks noGrp="1"/>
-          </p:cNvSpPr>
-          <p:nvPr>
-            <p:ph sz="half" idx="1"/>
-          </p:nvPr>
-        </p:nvSpPr>
-        <p:spPr/>
-        <p:txBody>
-          <a:bodyPr/>
-          <a:lstStyle/>
-          <a:p>
-            <a:r>
-              <a:rPr lang="en-US" dirty="0"/>
-              <a:t>In the previous section we saw the components needed to build a graph database</a:t>
-            </a:r>
-          </a:p>
-          <a:p>
-            <a:r>
-              <a:rPr lang="en-US" dirty="0"/>
-              <a:t>We now examine the architecture of Flexograph and its three building blocks: the </a:t>
-            </a:r>
-            <a:r>
-              <a:rPr lang="en-US" b="1" dirty="0"/>
-              <a:t>representations</a:t>
-            </a:r>
-            <a:r>
-              <a:rPr lang="en-US" dirty="0"/>
-              <a:t>, the </a:t>
-            </a:r>
-            <a:r>
-              <a:rPr lang="en-US" b="1" dirty="0"/>
-              <a:t>API</a:t>
-            </a:r>
-            <a:r>
-              <a:rPr lang="en-US" dirty="0"/>
-              <a:t>, and the </a:t>
-            </a:r>
-            <a:r>
-              <a:rPr lang="en-US" b="1" dirty="0"/>
-              <a:t>framework</a:t>
-            </a:r>
-            <a:r>
-              <a:rPr lang="en-US" dirty="0"/>
-              <a:t> for higher level access primitives</a:t>
-            </a:r>
-          </a:p>
-        </p:txBody>
-      </p:sp>
-      <p:sp>
-        <p:nvSpPr>
-          <p:cNvPr id="5" name="Slide Number Placeholder 4">
-            <a:extLst>
-              <a:ext uri="{FF2B5EF4-FFF2-40B4-BE49-F238E27FC236}">
-                <a16:creationId xmlns:a16="http://schemas.microsoft.com/office/drawing/2014/main" id="{C71D5E94-1BF3-2863-B618-3BC59CCE2665}"/>
-              </a:ext>
-            </a:extLst>
-          </p:cNvPr>
-          <p:cNvSpPr>
-            <a:spLocks noGrp="1"/>
-          </p:cNvSpPr>
-          <p:nvPr>
-            <p:ph type="sldNum" sz="quarter" idx="12"/>
-          </p:nvPr>
-        </p:nvSpPr>
-        <p:spPr/>
-        <p:txBody>
-          <a:bodyPr/>
-          <a:lstStyle/>
-          <a:p>
-            <a:fld id="{EEBEF218-D4C5-B946-BB13-027BCA6FFA2A}" type="slidenum">
-              <a:rPr lang="en-US" smtClean="0"/>
-              <a:t>9</a:t>
-            </a:fld>
-            <a:endParaRPr lang="en-US"/>
-          </a:p>
-        </p:txBody>
-      </p:sp>
-      <p:sp>
-        <p:nvSpPr>
-          <p:cNvPr id="11" name="Shape 4">
-            <a:extLst>
-              <a:ext uri="{FF2B5EF4-FFF2-40B4-BE49-F238E27FC236}">
-                <a16:creationId xmlns:a16="http://schemas.microsoft.com/office/drawing/2014/main" id="{12F13D56-F26E-36C8-0183-F258C754B8A3}"/>
-              </a:ext>
-            </a:extLst>
-          </p:cNvPr>
-          <p:cNvSpPr txBox="1"/>
-          <p:nvPr/>
-        </p:nvSpPr>
-        <p:spPr>
-          <a:xfrm>
-            <a:off x="7326452" y="4881021"/>
-            <a:ext cx="1192106" cy="1192106"/>
-          </a:xfrm>
-          <a:prstGeom prst="rect">
-            <a:avLst/>
-          </a:prstGeom>
-        </p:spPr>
-        <p:style>
-          <a:lnRef idx="0">
-            <a:scrgbClr r="0" g="0" b="0"/>
-          </a:lnRef>
-          <a:fillRef idx="0">
-            <a:scrgbClr r="0" g="0" b="0"/>
-          </a:fillRef>
-          <a:effectRef idx="0">
-            <a:scrgbClr r="0" g="0" b="0"/>
-          </a:effectRef>
-          <a:fontRef idx="minor">
-            <a:schemeClr val="lt1"/>
-          </a:fontRef>
-        </p:style>
-        <p:txBody>
-          <a:bodyPr spcFirstLastPara="0" vert="horz" wrap="square" lIns="24130" tIns="24130" rIns="24130" bIns="24130" numCol="1" spcCol="1270" anchor="ctr" anchorCtr="0">
-            <a:noAutofit/>
-          </a:bodyPr>
-          <a:lstStyle/>
-          <a:p>
-            <a:pPr marL="0" lvl="0" indent="0" algn="ctr" defTabSz="844550">
-              <a:lnSpc>
-                <a:spcPct val="90000"/>
-              </a:lnSpc>
-              <a:spcBef>
-                <a:spcPct val="0"/>
-              </a:spcBef>
-              <a:spcAft>
-                <a:spcPct val="35000"/>
-              </a:spcAft>
-              <a:buNone/>
-            </a:pPr>
-            <a:r>
-              <a:rPr lang="en-US" sz="1900" kern="1200" dirty="0"/>
-              <a:t>Storage Backend</a:t>
-            </a:r>
-          </a:p>
-        </p:txBody>
-      </p:sp>
-      <p:graphicFrame>
-        <p:nvGraphicFramePr>
-          <p:cNvPr id="12" name="Diagram 11">
-            <a:extLst>
-              <a:ext uri="{FF2B5EF4-FFF2-40B4-BE49-F238E27FC236}">
-                <a16:creationId xmlns:a16="http://schemas.microsoft.com/office/drawing/2014/main" id="{A869848C-75FE-A641-08A0-4A883BD86C5A}"/>
-              </a:ext>
-            </a:extLst>
-          </p:cNvPr>
-          <p:cNvGraphicFramePr/>
-          <p:nvPr>
-            <p:extLst>
-              <p:ext uri="{D42A27DB-BD31-4B8C-83A1-F6EECF244321}">
-                <p14:modId xmlns:p14="http://schemas.microsoft.com/office/powerpoint/2010/main" val="1019878231"/>
-              </p:ext>
-            </p:extLst>
-          </p:nvPr>
-        </p:nvGraphicFramePr>
-        <p:xfrm>
-          <a:off x="5321597" y="0"/>
-          <a:ext cx="6019798" cy="6721475"/>
-        </p:xfrm>
-        <a:graphic>
-          <a:graphicData uri="http://schemas.openxmlformats.org/drawingml/2006/diagram">
-            <dgm:relIds xmlns:dgm="http://schemas.openxmlformats.org/drawingml/2006/diagram" xmlns:r="http://schemas.openxmlformats.org/officeDocument/2006/relationships" r:dm="rId2" r:lo="rId3" r:qs="rId4" r:cs="rId5"/>
-          </a:graphicData>
-        </a:graphic>
-      </p:graphicFrame>
-    </p:spTree>
-    <p:extLst>
-      <p:ext uri="{BB962C8B-B14F-4D97-AF65-F5344CB8AC3E}">
-        <p14:creationId xmlns:p14="http://schemas.microsoft.com/office/powerpoint/2010/main" val="2618468705"/>
       </p:ext>
     </p:extLst>
   </p:cSld>
